--- a/Poster_draft_7-30-25.pptx
+++ b/Poster_draft_7-30-25.pptx
@@ -10,7 +10,7 @@
   <p:sldIdLst>
     <p:sldId id="256" r:id="rId2"/>
   </p:sldIdLst>
-  <p:sldSz cx="43891200" cy="32918400"/>
+  <p:sldSz cx="36576000" cy="27432000"/>
   <p:notesSz cx="6858000" cy="9144000"/>
   <p:defaultTextStyle>
     <a:defPPr marR="0" lvl="0" algn="l" rtl="0">
@@ -38,7 +38,7 @@
         <a:srgbClr val="000000"/>
       </a:buClr>
       <a:buFont typeface="Arial"/>
-      <a:defRPr sz="1400" b="0" i="0" u="none" strike="noStrike" cap="none">
+      <a:defRPr sz="1167" b="0" i="0" u="none" strike="noStrike" cap="none">
         <a:solidFill>
           <a:srgbClr val="000000"/>
         </a:solidFill>
@@ -62,7 +62,7 @@
         <a:srgbClr val="000000"/>
       </a:buClr>
       <a:buFont typeface="Arial"/>
-      <a:defRPr sz="1400" b="0" i="0" u="none" strike="noStrike" cap="none">
+      <a:defRPr sz="1167" b="0" i="0" u="none" strike="noStrike" cap="none">
         <a:solidFill>
           <a:srgbClr val="000000"/>
         </a:solidFill>
@@ -86,7 +86,7 @@
         <a:srgbClr val="000000"/>
       </a:buClr>
       <a:buFont typeface="Arial"/>
-      <a:defRPr sz="1400" b="0" i="0" u="none" strike="noStrike" cap="none">
+      <a:defRPr sz="1167" b="0" i="0" u="none" strike="noStrike" cap="none">
         <a:solidFill>
           <a:srgbClr val="000000"/>
         </a:solidFill>
@@ -110,7 +110,7 @@
         <a:srgbClr val="000000"/>
       </a:buClr>
       <a:buFont typeface="Arial"/>
-      <a:defRPr sz="1400" b="0" i="0" u="none" strike="noStrike" cap="none">
+      <a:defRPr sz="1167" b="0" i="0" u="none" strike="noStrike" cap="none">
         <a:solidFill>
           <a:srgbClr val="000000"/>
         </a:solidFill>
@@ -134,7 +134,7 @@
         <a:srgbClr val="000000"/>
       </a:buClr>
       <a:buFont typeface="Arial"/>
-      <a:defRPr sz="1400" b="0" i="0" u="none" strike="noStrike" cap="none">
+      <a:defRPr sz="1167" b="0" i="0" u="none" strike="noStrike" cap="none">
         <a:solidFill>
           <a:srgbClr val="000000"/>
         </a:solidFill>
@@ -158,7 +158,7 @@
         <a:srgbClr val="000000"/>
       </a:buClr>
       <a:buFont typeface="Arial"/>
-      <a:defRPr sz="1400" b="0" i="0" u="none" strike="noStrike" cap="none">
+      <a:defRPr sz="1167" b="0" i="0" u="none" strike="noStrike" cap="none">
         <a:solidFill>
           <a:srgbClr val="000000"/>
         </a:solidFill>
@@ -182,7 +182,7 @@
         <a:srgbClr val="000000"/>
       </a:buClr>
       <a:buFont typeface="Arial"/>
-      <a:defRPr sz="1400" b="0" i="0" u="none" strike="noStrike" cap="none">
+      <a:defRPr sz="1167" b="0" i="0" u="none" strike="noStrike" cap="none">
         <a:solidFill>
           <a:srgbClr val="000000"/>
         </a:solidFill>
@@ -206,7 +206,7 @@
         <a:srgbClr val="000000"/>
       </a:buClr>
       <a:buFont typeface="Arial"/>
-      <a:defRPr sz="1400" b="0" i="0" u="none" strike="noStrike" cap="none">
+      <a:defRPr sz="1167" b="0" i="0" u="none" strike="noStrike" cap="none">
         <a:solidFill>
           <a:srgbClr val="000000"/>
         </a:solidFill>
@@ -230,7 +230,7 @@
         <a:srgbClr val="000000"/>
       </a:buClr>
       <a:buFont typeface="Arial"/>
-      <a:defRPr sz="1400" b="0" i="0" u="none" strike="noStrike" cap="none">
+      <a:defRPr sz="1167" b="0" i="0" u="none" strike="noStrike" cap="none">
         <a:solidFill>
           <a:srgbClr val="000000"/>
         </a:solidFill>
@@ -244,12 +244,12 @@
   <p:extLst>
     <p:ext uri="{EFAFB233-063F-42B5-8137-9DF3F51BA10A}">
       <p15:sldGuideLst xmlns:p15="http://schemas.microsoft.com/office/powerpoint/2012/main">
-        <p15:guide id="1" orient="horz" pos="10368">
+        <p15:guide id="1" orient="horz" pos="8640" userDrawn="1">
           <p15:clr>
             <a:srgbClr val="A4A3A4"/>
           </p15:clr>
         </p15:guide>
-        <p15:guide id="2" pos="13824">
+        <p15:guide id="2" pos="11520" userDrawn="1">
           <p15:clr>
             <a:srgbClr val="A4A3A4"/>
           </p15:clr>
@@ -1247,7 +1247,7 @@
         <a:srgbClr val="000000"/>
       </a:buClr>
       <a:buFont typeface="Arial"/>
-      <a:defRPr sz="1400" b="0" i="0" u="none" strike="noStrike" cap="none">
+      <a:defRPr sz="1167" b="0" i="0" u="none" strike="noStrike" cap="none">
         <a:solidFill>
           <a:srgbClr val="000000"/>
         </a:solidFill>
@@ -1271,7 +1271,7 @@
         <a:srgbClr val="000000"/>
       </a:buClr>
       <a:buFont typeface="Arial"/>
-      <a:defRPr sz="1400" b="0" i="0" u="none" strike="noStrike" cap="none">
+      <a:defRPr sz="1167" b="0" i="0" u="none" strike="noStrike" cap="none">
         <a:solidFill>
           <a:srgbClr val="000000"/>
         </a:solidFill>
@@ -1295,7 +1295,7 @@
         <a:srgbClr val="000000"/>
       </a:buClr>
       <a:buFont typeface="Arial"/>
-      <a:defRPr sz="1400" b="0" i="0" u="none" strike="noStrike" cap="none">
+      <a:defRPr sz="1167" b="0" i="0" u="none" strike="noStrike" cap="none">
         <a:solidFill>
           <a:srgbClr val="000000"/>
         </a:solidFill>
@@ -1319,7 +1319,7 @@
         <a:srgbClr val="000000"/>
       </a:buClr>
       <a:buFont typeface="Arial"/>
-      <a:defRPr sz="1400" b="0" i="0" u="none" strike="noStrike" cap="none">
+      <a:defRPr sz="1167" b="0" i="0" u="none" strike="noStrike" cap="none">
         <a:solidFill>
           <a:srgbClr val="000000"/>
         </a:solidFill>
@@ -1343,7 +1343,7 @@
         <a:srgbClr val="000000"/>
       </a:buClr>
       <a:buFont typeface="Arial"/>
-      <a:defRPr sz="1400" b="0" i="0" u="none" strike="noStrike" cap="none">
+      <a:defRPr sz="1167" b="0" i="0" u="none" strike="noStrike" cap="none">
         <a:solidFill>
           <a:srgbClr val="000000"/>
         </a:solidFill>
@@ -1367,7 +1367,7 @@
         <a:srgbClr val="000000"/>
       </a:buClr>
       <a:buFont typeface="Arial"/>
-      <a:defRPr sz="1400" b="0" i="0" u="none" strike="noStrike" cap="none">
+      <a:defRPr sz="1167" b="0" i="0" u="none" strike="noStrike" cap="none">
         <a:solidFill>
           <a:srgbClr val="000000"/>
         </a:solidFill>
@@ -1391,7 +1391,7 @@
         <a:srgbClr val="000000"/>
       </a:buClr>
       <a:buFont typeface="Arial"/>
-      <a:defRPr sz="1400" b="0" i="0" u="none" strike="noStrike" cap="none">
+      <a:defRPr sz="1167" b="0" i="0" u="none" strike="noStrike" cap="none">
         <a:solidFill>
           <a:srgbClr val="000000"/>
         </a:solidFill>
@@ -1415,7 +1415,7 @@
         <a:srgbClr val="000000"/>
       </a:buClr>
       <a:buFont typeface="Arial"/>
-      <a:defRPr sz="1400" b="0" i="0" u="none" strike="noStrike" cap="none">
+      <a:defRPr sz="1167" b="0" i="0" u="none" strike="noStrike" cap="none">
         <a:solidFill>
           <a:srgbClr val="000000"/>
         </a:solidFill>
@@ -1439,7 +1439,7 @@
         <a:srgbClr val="000000"/>
       </a:buClr>
       <a:buFont typeface="Arial"/>
-      <a:defRPr sz="1400" b="0" i="0" u="none" strike="noStrike" cap="none">
+      <a:defRPr sz="1167" b="0" i="0" u="none" strike="noStrike" cap="none">
         <a:solidFill>
           <a:srgbClr val="000000"/>
         </a:solidFill>
@@ -1586,8 +1586,8 @@
         </p:nvSpPr>
         <p:spPr>
           <a:xfrm>
-            <a:off x="2194560" y="30510482"/>
-            <a:ext cx="10241280" cy="1752600"/>
+            <a:off x="1828800" y="25425402"/>
+            <a:ext cx="8534400" cy="1460500"/>
           </a:xfrm>
           <a:prstGeom prst="rect">
             <a:avLst/>
@@ -1719,8 +1719,8 @@
         </p:nvSpPr>
         <p:spPr>
           <a:xfrm>
-            <a:off x="14996160" y="30510482"/>
-            <a:ext cx="13898880" cy="1752600"/>
+            <a:off x="12496800" y="25425402"/>
+            <a:ext cx="11582400" cy="1460500"/>
           </a:xfrm>
           <a:prstGeom prst="rect">
             <a:avLst/>
@@ -1852,8 +1852,8 @@
         </p:nvSpPr>
         <p:spPr>
           <a:xfrm>
-            <a:off x="31455360" y="30510482"/>
-            <a:ext cx="10241280" cy="1752600"/>
+            <a:off x="26212800" y="25425402"/>
+            <a:ext cx="8534400" cy="1460500"/>
           </a:xfrm>
           <a:prstGeom prst="rect">
             <a:avLst/>
@@ -1933,20 +1933,12 @@
             </a:lvl9pPr>
           </a:lstStyle>
           <a:p>
-            <a:pPr marL="0" lvl="0" indent="0" algn="r" rtl="0">
-              <a:spcBef>
-                <a:spcPts val="0"/>
-              </a:spcBef>
-              <a:spcAft>
-                <a:spcPts val="0"/>
-              </a:spcAft>
-              <a:buNone/>
-            </a:pPr>
             <a:fld id="{00000000-1234-1234-1234-123412341234}" type="slidenum">
-              <a:rPr lang="en-US"/>
+              <a:rPr lang="en-US" smtClean="0"/>
+              <a:pPr/>
               <a:t>‹#›</a:t>
             </a:fld>
-            <a:endParaRPr/>
+            <a:endParaRPr lang="en-US"/>
           </a:p>
         </p:txBody>
       </p:sp>
@@ -1987,8 +1979,8 @@
         </p:nvSpPr>
         <p:spPr>
           <a:xfrm>
-            <a:off x="2194560" y="1318262"/>
-            <a:ext cx="39502080" cy="5486400"/>
+            <a:off x="1828800" y="1098552"/>
+            <a:ext cx="32918400" cy="4572000"/>
           </a:xfrm>
           <a:prstGeom prst="rect">
             <a:avLst/>
@@ -2123,8 +2115,8 @@
         </p:nvSpPr>
         <p:spPr>
           <a:xfrm rot="5400000">
-            <a:off x="11083289" y="-1207766"/>
-            <a:ext cx="21724622" cy="39502080"/>
+            <a:off x="9236074" y="-1006472"/>
+            <a:ext cx="18103852" cy="32918400"/>
           </a:xfrm>
           <a:prstGeom prst="rect">
             <a:avLst/>
@@ -2139,9 +2131,9 @@
             <a:normAutofit/>
           </a:bodyPr>
           <a:lstStyle>
-            <a:lvl1pPr marL="457200" lvl="0" indent="-342900" algn="l">
-              <a:spcBef>
-                <a:spcPts val="360"/>
+            <a:lvl1pPr marL="380985" lvl="0" indent="-285739" algn="l">
+              <a:spcBef>
+                <a:spcPts val="300"/>
               </a:spcBef>
               <a:spcAft>
                 <a:spcPts val="0"/>
@@ -2153,9 +2145,9 @@
               <a:buChar char="•"/>
               <a:defRPr/>
             </a:lvl1pPr>
-            <a:lvl2pPr marL="914400" lvl="1" indent="-342900" algn="l">
-              <a:spcBef>
-                <a:spcPts val="360"/>
+            <a:lvl2pPr marL="761970" lvl="1" indent="-285739" algn="l">
+              <a:spcBef>
+                <a:spcPts val="300"/>
               </a:spcBef>
               <a:spcAft>
                 <a:spcPts val="0"/>
@@ -2167,9 +2159,9 @@
               <a:buChar char="–"/>
               <a:defRPr/>
             </a:lvl2pPr>
-            <a:lvl3pPr marL="1371600" lvl="2" indent="-342900" algn="l">
-              <a:spcBef>
-                <a:spcPts val="360"/>
+            <a:lvl3pPr marL="1142954" lvl="2" indent="-285739" algn="l">
+              <a:spcBef>
+                <a:spcPts val="300"/>
               </a:spcBef>
               <a:spcAft>
                 <a:spcPts val="0"/>
@@ -2181,9 +2173,9 @@
               <a:buChar char="•"/>
               <a:defRPr/>
             </a:lvl3pPr>
-            <a:lvl4pPr marL="1828800" lvl="3" indent="-342900" algn="l">
-              <a:spcBef>
-                <a:spcPts val="360"/>
+            <a:lvl4pPr marL="1523939" lvl="3" indent="-285739" algn="l">
+              <a:spcBef>
+                <a:spcPts val="300"/>
               </a:spcBef>
               <a:spcAft>
                 <a:spcPts val="0"/>
@@ -2195,9 +2187,9 @@
               <a:buChar char="–"/>
               <a:defRPr/>
             </a:lvl4pPr>
-            <a:lvl5pPr marL="2286000" lvl="4" indent="-342900" algn="l">
-              <a:spcBef>
-                <a:spcPts val="360"/>
+            <a:lvl5pPr marL="1904924" lvl="4" indent="-285739" algn="l">
+              <a:spcBef>
+                <a:spcPts val="300"/>
               </a:spcBef>
               <a:spcAft>
                 <a:spcPts val="0"/>
@@ -2209,9 +2201,9 @@
               <a:buChar char="»"/>
               <a:defRPr/>
             </a:lvl5pPr>
-            <a:lvl6pPr marL="2743200" lvl="5" indent="-342900" algn="l">
-              <a:spcBef>
-                <a:spcPts val="360"/>
+            <a:lvl6pPr marL="2285909" lvl="5" indent="-285739" algn="l">
+              <a:spcBef>
+                <a:spcPts val="300"/>
               </a:spcBef>
               <a:spcAft>
                 <a:spcPts val="0"/>
@@ -2223,9 +2215,9 @@
               <a:buChar char="•"/>
               <a:defRPr/>
             </a:lvl6pPr>
-            <a:lvl7pPr marL="3200400" lvl="6" indent="-342900" algn="l">
-              <a:spcBef>
-                <a:spcPts val="360"/>
+            <a:lvl7pPr marL="2666893" lvl="6" indent="-285739" algn="l">
+              <a:spcBef>
+                <a:spcPts val="300"/>
               </a:spcBef>
               <a:spcAft>
                 <a:spcPts val="0"/>
@@ -2237,9 +2229,9 @@
               <a:buChar char="•"/>
               <a:defRPr/>
             </a:lvl7pPr>
-            <a:lvl8pPr marL="3657600" lvl="7" indent="-342900" algn="l">
-              <a:spcBef>
-                <a:spcPts val="360"/>
+            <a:lvl8pPr marL="3047878" lvl="7" indent="-285739" algn="l">
+              <a:spcBef>
+                <a:spcPts val="300"/>
               </a:spcBef>
               <a:spcAft>
                 <a:spcPts val="0"/>
@@ -2251,9 +2243,9 @@
               <a:buChar char="•"/>
               <a:defRPr/>
             </a:lvl8pPr>
-            <a:lvl9pPr marL="4114800" lvl="8" indent="-342900" algn="l">
-              <a:spcBef>
-                <a:spcPts val="360"/>
+            <a:lvl9pPr marL="3428863" lvl="8" indent="-285739" algn="l">
+              <a:spcBef>
+                <a:spcPts val="300"/>
               </a:spcBef>
               <a:spcAft>
                 <a:spcPts val="0"/>
@@ -2283,8 +2275,8 @@
         </p:nvSpPr>
         <p:spPr>
           <a:xfrm>
-            <a:off x="2194560" y="30510482"/>
-            <a:ext cx="10241280" cy="1752600"/>
+            <a:off x="1828800" y="25425402"/>
+            <a:ext cx="8534400" cy="1460500"/>
           </a:xfrm>
           <a:prstGeom prst="rect">
             <a:avLst/>
@@ -2416,8 +2408,8 @@
         </p:nvSpPr>
         <p:spPr>
           <a:xfrm>
-            <a:off x="14996160" y="30510482"/>
-            <a:ext cx="13898880" cy="1752600"/>
+            <a:off x="12496800" y="25425402"/>
+            <a:ext cx="11582400" cy="1460500"/>
           </a:xfrm>
           <a:prstGeom prst="rect">
             <a:avLst/>
@@ -2549,8 +2541,8 @@
         </p:nvSpPr>
         <p:spPr>
           <a:xfrm>
-            <a:off x="31455360" y="30510482"/>
-            <a:ext cx="10241280" cy="1752600"/>
+            <a:off x="26212800" y="25425402"/>
+            <a:ext cx="8534400" cy="1460500"/>
           </a:xfrm>
           <a:prstGeom prst="rect">
             <a:avLst/>
@@ -2630,20 +2622,12 @@
             </a:lvl9pPr>
           </a:lstStyle>
           <a:p>
-            <a:pPr marL="0" lvl="0" indent="0" algn="r" rtl="0">
-              <a:spcBef>
-                <a:spcPts val="0"/>
-              </a:spcBef>
-              <a:spcAft>
-                <a:spcPts val="0"/>
-              </a:spcAft>
-              <a:buNone/>
-            </a:pPr>
             <a:fld id="{00000000-1234-1234-1234-123412341234}" type="slidenum">
-              <a:rPr lang="en-US"/>
+              <a:rPr lang="en-US" smtClean="0"/>
+              <a:pPr/>
               <a:t>‹#›</a:t>
             </a:fld>
-            <a:endParaRPr/>
+            <a:endParaRPr lang="en-US"/>
           </a:p>
         </p:txBody>
       </p:sp>
@@ -2684,8 +2668,8 @@
         </p:nvSpPr>
         <p:spPr>
           <a:xfrm rot="5400000">
-            <a:off x="22715220" y="10424165"/>
-            <a:ext cx="28087320" cy="9875520"/>
+            <a:off x="18929350" y="8686804"/>
+            <a:ext cx="23406100" cy="8229600"/>
           </a:xfrm>
           <a:prstGeom prst="rect">
             <a:avLst/>
@@ -2820,8 +2804,8 @@
         </p:nvSpPr>
         <p:spPr>
           <a:xfrm rot="5400000">
-            <a:off x="2598420" y="914405"/>
-            <a:ext cx="28087320" cy="28895040"/>
+            <a:off x="2165350" y="762004"/>
+            <a:ext cx="23406100" cy="24079200"/>
           </a:xfrm>
           <a:prstGeom prst="rect">
             <a:avLst/>
@@ -2836,9 +2820,9 @@
             <a:normAutofit/>
           </a:bodyPr>
           <a:lstStyle>
-            <a:lvl1pPr marL="457200" lvl="0" indent="-342900" algn="l">
-              <a:spcBef>
-                <a:spcPts val="360"/>
+            <a:lvl1pPr marL="380985" lvl="0" indent="-285739" algn="l">
+              <a:spcBef>
+                <a:spcPts val="300"/>
               </a:spcBef>
               <a:spcAft>
                 <a:spcPts val="0"/>
@@ -2850,9 +2834,9 @@
               <a:buChar char="•"/>
               <a:defRPr/>
             </a:lvl1pPr>
-            <a:lvl2pPr marL="914400" lvl="1" indent="-342900" algn="l">
-              <a:spcBef>
-                <a:spcPts val="360"/>
+            <a:lvl2pPr marL="761970" lvl="1" indent="-285739" algn="l">
+              <a:spcBef>
+                <a:spcPts val="300"/>
               </a:spcBef>
               <a:spcAft>
                 <a:spcPts val="0"/>
@@ -2864,9 +2848,9 @@
               <a:buChar char="–"/>
               <a:defRPr/>
             </a:lvl2pPr>
-            <a:lvl3pPr marL="1371600" lvl="2" indent="-342900" algn="l">
-              <a:spcBef>
-                <a:spcPts val="360"/>
+            <a:lvl3pPr marL="1142954" lvl="2" indent="-285739" algn="l">
+              <a:spcBef>
+                <a:spcPts val="300"/>
               </a:spcBef>
               <a:spcAft>
                 <a:spcPts val="0"/>
@@ -2878,9 +2862,9 @@
               <a:buChar char="•"/>
               <a:defRPr/>
             </a:lvl3pPr>
-            <a:lvl4pPr marL="1828800" lvl="3" indent="-342900" algn="l">
-              <a:spcBef>
-                <a:spcPts val="360"/>
+            <a:lvl4pPr marL="1523939" lvl="3" indent="-285739" algn="l">
+              <a:spcBef>
+                <a:spcPts val="300"/>
               </a:spcBef>
               <a:spcAft>
                 <a:spcPts val="0"/>
@@ -2892,9 +2876,9 @@
               <a:buChar char="–"/>
               <a:defRPr/>
             </a:lvl4pPr>
-            <a:lvl5pPr marL="2286000" lvl="4" indent="-342900" algn="l">
-              <a:spcBef>
-                <a:spcPts val="360"/>
+            <a:lvl5pPr marL="1904924" lvl="4" indent="-285739" algn="l">
+              <a:spcBef>
+                <a:spcPts val="300"/>
               </a:spcBef>
               <a:spcAft>
                 <a:spcPts val="0"/>
@@ -2906,9 +2890,9 @@
               <a:buChar char="»"/>
               <a:defRPr/>
             </a:lvl5pPr>
-            <a:lvl6pPr marL="2743200" lvl="5" indent="-342900" algn="l">
-              <a:spcBef>
-                <a:spcPts val="360"/>
+            <a:lvl6pPr marL="2285909" lvl="5" indent="-285739" algn="l">
+              <a:spcBef>
+                <a:spcPts val="300"/>
               </a:spcBef>
               <a:spcAft>
                 <a:spcPts val="0"/>
@@ -2920,9 +2904,9 @@
               <a:buChar char="•"/>
               <a:defRPr/>
             </a:lvl6pPr>
-            <a:lvl7pPr marL="3200400" lvl="6" indent="-342900" algn="l">
-              <a:spcBef>
-                <a:spcPts val="360"/>
+            <a:lvl7pPr marL="2666893" lvl="6" indent="-285739" algn="l">
+              <a:spcBef>
+                <a:spcPts val="300"/>
               </a:spcBef>
               <a:spcAft>
                 <a:spcPts val="0"/>
@@ -2934,9 +2918,9 @@
               <a:buChar char="•"/>
               <a:defRPr/>
             </a:lvl7pPr>
-            <a:lvl8pPr marL="3657600" lvl="7" indent="-342900" algn="l">
-              <a:spcBef>
-                <a:spcPts val="360"/>
+            <a:lvl8pPr marL="3047878" lvl="7" indent="-285739" algn="l">
+              <a:spcBef>
+                <a:spcPts val="300"/>
               </a:spcBef>
               <a:spcAft>
                 <a:spcPts val="0"/>
@@ -2948,9 +2932,9 @@
               <a:buChar char="•"/>
               <a:defRPr/>
             </a:lvl8pPr>
-            <a:lvl9pPr marL="4114800" lvl="8" indent="-342900" algn="l">
-              <a:spcBef>
-                <a:spcPts val="360"/>
+            <a:lvl9pPr marL="3428863" lvl="8" indent="-285739" algn="l">
+              <a:spcBef>
+                <a:spcPts val="300"/>
               </a:spcBef>
               <a:spcAft>
                 <a:spcPts val="0"/>
@@ -2980,8 +2964,8 @@
         </p:nvSpPr>
         <p:spPr>
           <a:xfrm>
-            <a:off x="2194560" y="30510482"/>
-            <a:ext cx="10241280" cy="1752600"/>
+            <a:off x="1828800" y="25425402"/>
+            <a:ext cx="8534400" cy="1460500"/>
           </a:xfrm>
           <a:prstGeom prst="rect">
             <a:avLst/>
@@ -3113,8 +3097,8 @@
         </p:nvSpPr>
         <p:spPr>
           <a:xfrm>
-            <a:off x="14996160" y="30510482"/>
-            <a:ext cx="13898880" cy="1752600"/>
+            <a:off x="12496800" y="25425402"/>
+            <a:ext cx="11582400" cy="1460500"/>
           </a:xfrm>
           <a:prstGeom prst="rect">
             <a:avLst/>
@@ -3246,8 +3230,8 @@
         </p:nvSpPr>
         <p:spPr>
           <a:xfrm>
-            <a:off x="31455360" y="30510482"/>
-            <a:ext cx="10241280" cy="1752600"/>
+            <a:off x="26212800" y="25425402"/>
+            <a:ext cx="8534400" cy="1460500"/>
           </a:xfrm>
           <a:prstGeom prst="rect">
             <a:avLst/>
@@ -3327,20 +3311,12 @@
             </a:lvl9pPr>
           </a:lstStyle>
           <a:p>
-            <a:pPr marL="0" lvl="0" indent="0" algn="r" rtl="0">
-              <a:spcBef>
-                <a:spcPts val="0"/>
-              </a:spcBef>
-              <a:spcAft>
-                <a:spcPts val="0"/>
-              </a:spcAft>
-              <a:buNone/>
-            </a:pPr>
             <a:fld id="{00000000-1234-1234-1234-123412341234}" type="slidenum">
-              <a:rPr lang="en-US"/>
+              <a:rPr lang="en-US" smtClean="0"/>
+              <a:pPr/>
               <a:t>‹#›</a:t>
             </a:fld>
-            <a:endParaRPr/>
+            <a:endParaRPr lang="en-US"/>
           </a:p>
         </p:txBody>
       </p:sp>
@@ -3381,8 +3357,8 @@
         </p:nvSpPr>
         <p:spPr>
           <a:xfrm>
-            <a:off x="3291840" y="10226042"/>
-            <a:ext cx="37307520" cy="7056120"/>
+            <a:off x="2743200" y="8521702"/>
+            <a:ext cx="31089600" cy="5880100"/>
           </a:xfrm>
           <a:prstGeom prst="rect">
             <a:avLst/>
@@ -3517,8 +3493,8 @@
         </p:nvSpPr>
         <p:spPr>
           <a:xfrm>
-            <a:off x="6583680" y="18653760"/>
-            <a:ext cx="30723840" cy="8412480"/>
+            <a:off x="5486400" y="15544800"/>
+            <a:ext cx="25603200" cy="7010400"/>
           </a:xfrm>
           <a:prstGeom prst="rect">
             <a:avLst/>
@@ -3535,7 +3511,7 @@
           <a:lstStyle>
             <a:lvl1pPr lvl="0" algn="ctr">
               <a:spcBef>
-                <a:spcPts val="3080"/>
+                <a:spcPts val="2567"/>
               </a:spcBef>
               <a:spcAft>
                 <a:spcPts val="0"/>
@@ -3553,7 +3529,7 @@
             </a:lvl1pPr>
             <a:lvl2pPr lvl="1" algn="ctr">
               <a:spcBef>
-                <a:spcPts val="2680"/>
+                <a:spcPts val="2233"/>
               </a:spcBef>
               <a:spcAft>
                 <a:spcPts val="0"/>
@@ -3571,7 +3547,7 @@
             </a:lvl2pPr>
             <a:lvl3pPr lvl="2" algn="ctr">
               <a:spcBef>
-                <a:spcPts val="2300"/>
+                <a:spcPts val="1917"/>
               </a:spcBef>
               <a:spcAft>
                 <a:spcPts val="0"/>
@@ -3589,7 +3565,7 @@
             </a:lvl3pPr>
             <a:lvl4pPr lvl="3" algn="ctr">
               <a:spcBef>
-                <a:spcPts val="1920"/>
+                <a:spcPts val="1600"/>
               </a:spcBef>
               <a:spcAft>
                 <a:spcPts val="0"/>
@@ -3607,7 +3583,7 @@
             </a:lvl4pPr>
             <a:lvl5pPr lvl="4" algn="ctr">
               <a:spcBef>
-                <a:spcPts val="1920"/>
+                <a:spcPts val="1600"/>
               </a:spcBef>
               <a:spcAft>
                 <a:spcPts val="0"/>
@@ -3625,7 +3601,7 @@
             </a:lvl5pPr>
             <a:lvl6pPr lvl="5" algn="ctr">
               <a:spcBef>
-                <a:spcPts val="1920"/>
+                <a:spcPts val="1600"/>
               </a:spcBef>
               <a:spcAft>
                 <a:spcPts val="0"/>
@@ -3643,7 +3619,7 @@
             </a:lvl6pPr>
             <a:lvl7pPr lvl="6" algn="ctr">
               <a:spcBef>
-                <a:spcPts val="1920"/>
+                <a:spcPts val="1600"/>
               </a:spcBef>
               <a:spcAft>
                 <a:spcPts val="0"/>
@@ -3661,7 +3637,7 @@
             </a:lvl7pPr>
             <a:lvl8pPr lvl="7" algn="ctr">
               <a:spcBef>
-                <a:spcPts val="1920"/>
+                <a:spcPts val="1600"/>
               </a:spcBef>
               <a:spcAft>
                 <a:spcPts val="0"/>
@@ -3679,7 +3655,7 @@
             </a:lvl8pPr>
             <a:lvl9pPr lvl="8" algn="ctr">
               <a:spcBef>
-                <a:spcPts val="1920"/>
+                <a:spcPts val="1600"/>
               </a:spcBef>
               <a:spcAft>
                 <a:spcPts val="0"/>
@@ -3713,8 +3689,8 @@
         </p:nvSpPr>
         <p:spPr>
           <a:xfrm>
-            <a:off x="2194560" y="30510482"/>
-            <a:ext cx="10241280" cy="1752600"/>
+            <a:off x="1828800" y="25425402"/>
+            <a:ext cx="8534400" cy="1460500"/>
           </a:xfrm>
           <a:prstGeom prst="rect">
             <a:avLst/>
@@ -3846,8 +3822,8 @@
         </p:nvSpPr>
         <p:spPr>
           <a:xfrm>
-            <a:off x="14996160" y="30510482"/>
-            <a:ext cx="13898880" cy="1752600"/>
+            <a:off x="12496800" y="25425402"/>
+            <a:ext cx="11582400" cy="1460500"/>
           </a:xfrm>
           <a:prstGeom prst="rect">
             <a:avLst/>
@@ -3979,8 +3955,8 @@
         </p:nvSpPr>
         <p:spPr>
           <a:xfrm>
-            <a:off x="31455360" y="30510482"/>
-            <a:ext cx="10241280" cy="1752600"/>
+            <a:off x="26212800" y="25425402"/>
+            <a:ext cx="8534400" cy="1460500"/>
           </a:xfrm>
           <a:prstGeom prst="rect">
             <a:avLst/>
@@ -4060,20 +4036,12 @@
             </a:lvl9pPr>
           </a:lstStyle>
           <a:p>
-            <a:pPr marL="0" lvl="0" indent="0" algn="r" rtl="0">
-              <a:spcBef>
-                <a:spcPts val="0"/>
-              </a:spcBef>
-              <a:spcAft>
-                <a:spcPts val="0"/>
-              </a:spcAft>
-              <a:buNone/>
-            </a:pPr>
             <a:fld id="{00000000-1234-1234-1234-123412341234}" type="slidenum">
-              <a:rPr lang="en-US"/>
+              <a:rPr lang="en-US" smtClean="0"/>
+              <a:pPr/>
               <a:t>‹#›</a:t>
             </a:fld>
-            <a:endParaRPr/>
+            <a:endParaRPr lang="en-US"/>
           </a:p>
         </p:txBody>
       </p:sp>
@@ -4114,8 +4082,8 @@
         </p:nvSpPr>
         <p:spPr>
           <a:xfrm>
-            <a:off x="2194560" y="1318262"/>
-            <a:ext cx="39502080" cy="5486400"/>
+            <a:off x="1828800" y="1098552"/>
+            <a:ext cx="32918400" cy="4572000"/>
           </a:xfrm>
           <a:prstGeom prst="rect">
             <a:avLst/>
@@ -4250,8 +4218,8 @@
         </p:nvSpPr>
         <p:spPr>
           <a:xfrm>
-            <a:off x="2194560" y="7680963"/>
-            <a:ext cx="39502080" cy="21724622"/>
+            <a:off x="1828800" y="6400802"/>
+            <a:ext cx="32918400" cy="18103852"/>
           </a:xfrm>
           <a:prstGeom prst="rect">
             <a:avLst/>
@@ -4266,9 +4234,9 @@
             <a:normAutofit/>
           </a:bodyPr>
           <a:lstStyle>
-            <a:lvl1pPr marL="457200" lvl="0" indent="-342900" algn="l">
-              <a:spcBef>
-                <a:spcPts val="360"/>
+            <a:lvl1pPr marL="380985" lvl="0" indent="-285739" algn="l">
+              <a:spcBef>
+                <a:spcPts val="300"/>
               </a:spcBef>
               <a:spcAft>
                 <a:spcPts val="0"/>
@@ -4280,9 +4248,9 @@
               <a:buChar char="•"/>
               <a:defRPr/>
             </a:lvl1pPr>
-            <a:lvl2pPr marL="914400" lvl="1" indent="-342900" algn="l">
-              <a:spcBef>
-                <a:spcPts val="360"/>
+            <a:lvl2pPr marL="761970" lvl="1" indent="-285739" algn="l">
+              <a:spcBef>
+                <a:spcPts val="300"/>
               </a:spcBef>
               <a:spcAft>
                 <a:spcPts val="0"/>
@@ -4294,9 +4262,9 @@
               <a:buChar char="–"/>
               <a:defRPr/>
             </a:lvl2pPr>
-            <a:lvl3pPr marL="1371600" lvl="2" indent="-342900" algn="l">
-              <a:spcBef>
-                <a:spcPts val="360"/>
+            <a:lvl3pPr marL="1142954" lvl="2" indent="-285739" algn="l">
+              <a:spcBef>
+                <a:spcPts val="300"/>
               </a:spcBef>
               <a:spcAft>
                 <a:spcPts val="0"/>
@@ -4308,9 +4276,9 @@
               <a:buChar char="•"/>
               <a:defRPr/>
             </a:lvl3pPr>
-            <a:lvl4pPr marL="1828800" lvl="3" indent="-342900" algn="l">
-              <a:spcBef>
-                <a:spcPts val="360"/>
+            <a:lvl4pPr marL="1523939" lvl="3" indent="-285739" algn="l">
+              <a:spcBef>
+                <a:spcPts val="300"/>
               </a:spcBef>
               <a:spcAft>
                 <a:spcPts val="0"/>
@@ -4322,9 +4290,9 @@
               <a:buChar char="–"/>
               <a:defRPr/>
             </a:lvl4pPr>
-            <a:lvl5pPr marL="2286000" lvl="4" indent="-342900" algn="l">
-              <a:spcBef>
-                <a:spcPts val="360"/>
+            <a:lvl5pPr marL="1904924" lvl="4" indent="-285739" algn="l">
+              <a:spcBef>
+                <a:spcPts val="300"/>
               </a:spcBef>
               <a:spcAft>
                 <a:spcPts val="0"/>
@@ -4336,9 +4304,9 @@
               <a:buChar char="»"/>
               <a:defRPr/>
             </a:lvl5pPr>
-            <a:lvl6pPr marL="2743200" lvl="5" indent="-342900" algn="l">
-              <a:spcBef>
-                <a:spcPts val="360"/>
+            <a:lvl6pPr marL="2285909" lvl="5" indent="-285739" algn="l">
+              <a:spcBef>
+                <a:spcPts val="300"/>
               </a:spcBef>
               <a:spcAft>
                 <a:spcPts val="0"/>
@@ -4350,9 +4318,9 @@
               <a:buChar char="•"/>
               <a:defRPr/>
             </a:lvl6pPr>
-            <a:lvl7pPr marL="3200400" lvl="6" indent="-342900" algn="l">
-              <a:spcBef>
-                <a:spcPts val="360"/>
+            <a:lvl7pPr marL="2666893" lvl="6" indent="-285739" algn="l">
+              <a:spcBef>
+                <a:spcPts val="300"/>
               </a:spcBef>
               <a:spcAft>
                 <a:spcPts val="0"/>
@@ -4364,9 +4332,9 @@
               <a:buChar char="•"/>
               <a:defRPr/>
             </a:lvl7pPr>
-            <a:lvl8pPr marL="3657600" lvl="7" indent="-342900" algn="l">
-              <a:spcBef>
-                <a:spcPts val="360"/>
+            <a:lvl8pPr marL="3047878" lvl="7" indent="-285739" algn="l">
+              <a:spcBef>
+                <a:spcPts val="300"/>
               </a:spcBef>
               <a:spcAft>
                 <a:spcPts val="0"/>
@@ -4378,9 +4346,9 @@
               <a:buChar char="•"/>
               <a:defRPr/>
             </a:lvl8pPr>
-            <a:lvl9pPr marL="4114800" lvl="8" indent="-342900" algn="l">
-              <a:spcBef>
-                <a:spcPts val="360"/>
+            <a:lvl9pPr marL="3428863" lvl="8" indent="-285739" algn="l">
+              <a:spcBef>
+                <a:spcPts val="300"/>
               </a:spcBef>
               <a:spcAft>
                 <a:spcPts val="0"/>
@@ -4410,8 +4378,8 @@
         </p:nvSpPr>
         <p:spPr>
           <a:xfrm>
-            <a:off x="2194560" y="30510482"/>
-            <a:ext cx="10241280" cy="1752600"/>
+            <a:off x="1828800" y="25425402"/>
+            <a:ext cx="8534400" cy="1460500"/>
           </a:xfrm>
           <a:prstGeom prst="rect">
             <a:avLst/>
@@ -4543,8 +4511,8 @@
         </p:nvSpPr>
         <p:spPr>
           <a:xfrm>
-            <a:off x="14996160" y="30510482"/>
-            <a:ext cx="13898880" cy="1752600"/>
+            <a:off x="12496800" y="25425402"/>
+            <a:ext cx="11582400" cy="1460500"/>
           </a:xfrm>
           <a:prstGeom prst="rect">
             <a:avLst/>
@@ -4676,8 +4644,8 @@
         </p:nvSpPr>
         <p:spPr>
           <a:xfrm>
-            <a:off x="31455360" y="30510482"/>
-            <a:ext cx="10241280" cy="1752600"/>
+            <a:off x="26212800" y="25425402"/>
+            <a:ext cx="8534400" cy="1460500"/>
           </a:xfrm>
           <a:prstGeom prst="rect">
             <a:avLst/>
@@ -4757,20 +4725,12 @@
             </a:lvl9pPr>
           </a:lstStyle>
           <a:p>
-            <a:pPr marL="0" lvl="0" indent="0" algn="r" rtl="0">
-              <a:spcBef>
-                <a:spcPts val="0"/>
-              </a:spcBef>
-              <a:spcAft>
-                <a:spcPts val="0"/>
-              </a:spcAft>
-              <a:buNone/>
-            </a:pPr>
             <a:fld id="{00000000-1234-1234-1234-123412341234}" type="slidenum">
-              <a:rPr lang="en-US"/>
+              <a:rPr lang="en-US" smtClean="0"/>
+              <a:pPr/>
               <a:t>‹#›</a:t>
             </a:fld>
-            <a:endParaRPr/>
+            <a:endParaRPr lang="en-US"/>
           </a:p>
         </p:txBody>
       </p:sp>
@@ -4811,8 +4771,8 @@
         </p:nvSpPr>
         <p:spPr>
           <a:xfrm>
-            <a:off x="3467102" y="21153122"/>
-            <a:ext cx="37307520" cy="6537960"/>
+            <a:off x="2889252" y="17627602"/>
+            <a:ext cx="31089600" cy="5448300"/>
           </a:xfrm>
           <a:prstGeom prst="rect">
             <a:avLst/>
@@ -4840,7 +4800,7 @@
               <a:buSzPts val="19200"/>
               <a:buFont typeface="Calibri"/>
               <a:buNone/>
-              <a:defRPr sz="19200" b="1" cap="none"/>
+              <a:defRPr sz="15999" b="1" cap="none"/>
             </a:lvl1pPr>
             <a:lvl2pPr lvl="1">
               <a:spcBef>
@@ -4948,8 +4908,8 @@
         </p:nvSpPr>
         <p:spPr>
           <a:xfrm>
-            <a:off x="3467102" y="13952225"/>
-            <a:ext cx="37307520" cy="7200898"/>
+            <a:off x="2889252" y="11626854"/>
+            <a:ext cx="31089600" cy="6000748"/>
           </a:xfrm>
           <a:prstGeom prst="rect">
             <a:avLst/>
@@ -4964,9 +4924,9 @@
             <a:normAutofit/>
           </a:bodyPr>
           <a:lstStyle>
-            <a:lvl1pPr marL="457200" lvl="0" indent="-228600" algn="l">
-              <a:spcBef>
-                <a:spcPts val="1920"/>
+            <a:lvl1pPr marL="380985" lvl="0" indent="-190492" algn="l">
+              <a:spcBef>
+                <a:spcPts val="1600"/>
               </a:spcBef>
               <a:spcAft>
                 <a:spcPts val="0"/>
@@ -4976,15 +4936,15 @@
               </a:buClr>
               <a:buSzPts val="9600"/>
               <a:buNone/>
-              <a:defRPr sz="9600">
+              <a:defRPr sz="8000">
                 <a:solidFill>
                   <a:srgbClr val="888888"/>
                 </a:solidFill>
               </a:defRPr>
             </a:lvl1pPr>
-            <a:lvl2pPr marL="914400" lvl="1" indent="-228600" algn="l">
-              <a:spcBef>
-                <a:spcPts val="1720"/>
+            <a:lvl2pPr marL="761970" lvl="1" indent="-190492" algn="l">
+              <a:spcBef>
+                <a:spcPts val="1433"/>
               </a:spcBef>
               <a:spcAft>
                 <a:spcPts val="0"/>
@@ -4994,15 +4954,15 @@
               </a:buClr>
               <a:buSzPts val="8600"/>
               <a:buNone/>
-              <a:defRPr sz="8600">
+              <a:defRPr sz="7166">
                 <a:solidFill>
                   <a:srgbClr val="888888"/>
                 </a:solidFill>
               </a:defRPr>
             </a:lvl2pPr>
-            <a:lvl3pPr marL="1371600" lvl="2" indent="-228600" algn="l">
-              <a:spcBef>
-                <a:spcPts val="1540"/>
+            <a:lvl3pPr marL="1142954" lvl="2" indent="-190492" algn="l">
+              <a:spcBef>
+                <a:spcPts val="1283"/>
               </a:spcBef>
               <a:spcAft>
                 <a:spcPts val="0"/>
@@ -5012,15 +4972,15 @@
               </a:buClr>
               <a:buSzPts val="7700"/>
               <a:buNone/>
-              <a:defRPr sz="7700">
+              <a:defRPr sz="6416">
                 <a:solidFill>
                   <a:srgbClr val="888888"/>
                 </a:solidFill>
               </a:defRPr>
             </a:lvl3pPr>
-            <a:lvl4pPr marL="1828800" lvl="3" indent="-228600" algn="l">
-              <a:spcBef>
-                <a:spcPts val="1340"/>
+            <a:lvl4pPr marL="1523939" lvl="3" indent="-190492" algn="l">
+              <a:spcBef>
+                <a:spcPts val="1117"/>
               </a:spcBef>
               <a:spcAft>
                 <a:spcPts val="0"/>
@@ -5030,15 +4990,15 @@
               </a:buClr>
               <a:buSzPts val="6700"/>
               <a:buNone/>
-              <a:defRPr sz="6700">
+              <a:defRPr sz="5583">
                 <a:solidFill>
                   <a:srgbClr val="888888"/>
                 </a:solidFill>
               </a:defRPr>
             </a:lvl4pPr>
-            <a:lvl5pPr marL="2286000" lvl="4" indent="-228600" algn="l">
-              <a:spcBef>
-                <a:spcPts val="1340"/>
+            <a:lvl5pPr marL="1904924" lvl="4" indent="-190492" algn="l">
+              <a:spcBef>
+                <a:spcPts val="1117"/>
               </a:spcBef>
               <a:spcAft>
                 <a:spcPts val="0"/>
@@ -5048,15 +5008,15 @@
               </a:buClr>
               <a:buSzPts val="6700"/>
               <a:buNone/>
-              <a:defRPr sz="6700">
+              <a:defRPr sz="5583">
                 <a:solidFill>
                   <a:srgbClr val="888888"/>
                 </a:solidFill>
               </a:defRPr>
             </a:lvl5pPr>
-            <a:lvl6pPr marL="2743200" lvl="5" indent="-228600" algn="l">
-              <a:spcBef>
-                <a:spcPts val="1340"/>
+            <a:lvl6pPr marL="2285909" lvl="5" indent="-190492" algn="l">
+              <a:spcBef>
+                <a:spcPts val="1117"/>
               </a:spcBef>
               <a:spcAft>
                 <a:spcPts val="0"/>
@@ -5066,15 +5026,15 @@
               </a:buClr>
               <a:buSzPts val="6700"/>
               <a:buNone/>
-              <a:defRPr sz="6700">
+              <a:defRPr sz="5583">
                 <a:solidFill>
                   <a:srgbClr val="888888"/>
                 </a:solidFill>
               </a:defRPr>
             </a:lvl6pPr>
-            <a:lvl7pPr marL="3200400" lvl="6" indent="-228600" algn="l">
-              <a:spcBef>
-                <a:spcPts val="1340"/>
+            <a:lvl7pPr marL="2666893" lvl="6" indent="-190492" algn="l">
+              <a:spcBef>
+                <a:spcPts val="1117"/>
               </a:spcBef>
               <a:spcAft>
                 <a:spcPts val="0"/>
@@ -5084,15 +5044,15 @@
               </a:buClr>
               <a:buSzPts val="6700"/>
               <a:buNone/>
-              <a:defRPr sz="6700">
+              <a:defRPr sz="5583">
                 <a:solidFill>
                   <a:srgbClr val="888888"/>
                 </a:solidFill>
               </a:defRPr>
             </a:lvl7pPr>
-            <a:lvl8pPr marL="3657600" lvl="7" indent="-228600" algn="l">
-              <a:spcBef>
-                <a:spcPts val="1340"/>
+            <a:lvl8pPr marL="3047878" lvl="7" indent="-190492" algn="l">
+              <a:spcBef>
+                <a:spcPts val="1117"/>
               </a:spcBef>
               <a:spcAft>
                 <a:spcPts val="0"/>
@@ -5102,15 +5062,15 @@
               </a:buClr>
               <a:buSzPts val="6700"/>
               <a:buNone/>
-              <a:defRPr sz="6700">
+              <a:defRPr sz="5583">
                 <a:solidFill>
                   <a:srgbClr val="888888"/>
                 </a:solidFill>
               </a:defRPr>
             </a:lvl8pPr>
-            <a:lvl9pPr marL="4114800" lvl="8" indent="-228600" algn="l">
-              <a:spcBef>
-                <a:spcPts val="1340"/>
+            <a:lvl9pPr marL="3428863" lvl="8" indent="-190492" algn="l">
+              <a:spcBef>
+                <a:spcPts val="1117"/>
               </a:spcBef>
               <a:spcAft>
                 <a:spcPts val="0"/>
@@ -5120,7 +5080,7 @@
               </a:buClr>
               <a:buSzPts val="6700"/>
               <a:buNone/>
-              <a:defRPr sz="6700">
+              <a:defRPr sz="5583">
                 <a:solidFill>
                   <a:srgbClr val="888888"/>
                 </a:solidFill>
@@ -5144,8 +5104,8 @@
         </p:nvSpPr>
         <p:spPr>
           <a:xfrm>
-            <a:off x="2194560" y="30510482"/>
-            <a:ext cx="10241280" cy="1752600"/>
+            <a:off x="1828800" y="25425402"/>
+            <a:ext cx="8534400" cy="1460500"/>
           </a:xfrm>
           <a:prstGeom prst="rect">
             <a:avLst/>
@@ -5277,8 +5237,8 @@
         </p:nvSpPr>
         <p:spPr>
           <a:xfrm>
-            <a:off x="14996160" y="30510482"/>
-            <a:ext cx="13898880" cy="1752600"/>
+            <a:off x="12496800" y="25425402"/>
+            <a:ext cx="11582400" cy="1460500"/>
           </a:xfrm>
           <a:prstGeom prst="rect">
             <a:avLst/>
@@ -5410,8 +5370,8 @@
         </p:nvSpPr>
         <p:spPr>
           <a:xfrm>
-            <a:off x="31455360" y="30510482"/>
-            <a:ext cx="10241280" cy="1752600"/>
+            <a:off x="26212800" y="25425402"/>
+            <a:ext cx="8534400" cy="1460500"/>
           </a:xfrm>
           <a:prstGeom prst="rect">
             <a:avLst/>
@@ -5491,20 +5451,12 @@
             </a:lvl9pPr>
           </a:lstStyle>
           <a:p>
-            <a:pPr marL="0" lvl="0" indent="0" algn="r" rtl="0">
-              <a:spcBef>
-                <a:spcPts val="0"/>
-              </a:spcBef>
-              <a:spcAft>
-                <a:spcPts val="0"/>
-              </a:spcAft>
-              <a:buNone/>
-            </a:pPr>
             <a:fld id="{00000000-1234-1234-1234-123412341234}" type="slidenum">
-              <a:rPr lang="en-US"/>
+              <a:rPr lang="en-US" smtClean="0"/>
+              <a:pPr/>
               <a:t>‹#›</a:t>
             </a:fld>
-            <a:endParaRPr/>
+            <a:endParaRPr lang="en-US"/>
           </a:p>
         </p:txBody>
       </p:sp>
@@ -5545,8 +5497,8 @@
         </p:nvSpPr>
         <p:spPr>
           <a:xfrm>
-            <a:off x="2194560" y="1318262"/>
-            <a:ext cx="39502080" cy="5486400"/>
+            <a:off x="1828800" y="1098552"/>
+            <a:ext cx="32918400" cy="4572000"/>
           </a:xfrm>
           <a:prstGeom prst="rect">
             <a:avLst/>
@@ -5681,8 +5633,8 @@
         </p:nvSpPr>
         <p:spPr>
           <a:xfrm>
-            <a:off x="2194560" y="7680963"/>
-            <a:ext cx="19385280" cy="21724622"/>
+            <a:off x="1828800" y="6400802"/>
+            <a:ext cx="16154400" cy="18103852"/>
           </a:xfrm>
           <a:prstGeom prst="rect">
             <a:avLst/>
@@ -5697,9 +5649,9 @@
             <a:normAutofit/>
           </a:bodyPr>
           <a:lstStyle>
-            <a:lvl1pPr marL="457200" lvl="0" indent="-1079500" algn="l">
-              <a:spcBef>
-                <a:spcPts val="2680"/>
+            <a:lvl1pPr marL="380985" lvl="0" indent="-899547" algn="l">
+              <a:spcBef>
+                <a:spcPts val="2233"/>
               </a:spcBef>
               <a:spcAft>
                 <a:spcPts val="0"/>
@@ -5709,11 +5661,11 @@
               </a:buClr>
               <a:buSzPts val="13400"/>
               <a:buChar char="•"/>
-              <a:defRPr sz="13400"/>
+              <a:defRPr sz="11166"/>
             </a:lvl1pPr>
-            <a:lvl2pPr marL="914400" lvl="1" indent="-958850" algn="l">
-              <a:spcBef>
-                <a:spcPts val="2300"/>
+            <a:lvl2pPr marL="761970" lvl="1" indent="-799010" algn="l">
+              <a:spcBef>
+                <a:spcPts val="1917"/>
               </a:spcBef>
               <a:spcAft>
                 <a:spcPts val="0"/>
@@ -5723,11 +5675,11 @@
               </a:buClr>
               <a:buSzPts val="11500"/>
               <a:buChar char="–"/>
-              <a:defRPr sz="11500"/>
+              <a:defRPr sz="9583"/>
             </a:lvl2pPr>
-            <a:lvl3pPr marL="1371600" lvl="2" indent="-838200" algn="l">
-              <a:spcBef>
-                <a:spcPts val="1920"/>
+            <a:lvl3pPr marL="1142954" lvl="2" indent="-698472" algn="l">
+              <a:spcBef>
+                <a:spcPts val="1600"/>
               </a:spcBef>
               <a:spcAft>
                 <a:spcPts val="0"/>
@@ -5737,11 +5689,11 @@
               </a:buClr>
               <a:buSzPts val="9600"/>
               <a:buChar char="•"/>
-              <a:defRPr sz="9600"/>
+              <a:defRPr sz="8000"/>
             </a:lvl3pPr>
-            <a:lvl4pPr marL="1828800" lvl="3" indent="-774700" algn="l">
-              <a:spcBef>
-                <a:spcPts val="1720"/>
+            <a:lvl4pPr marL="1523939" lvl="3" indent="-645558" algn="l">
+              <a:spcBef>
+                <a:spcPts val="1433"/>
               </a:spcBef>
               <a:spcAft>
                 <a:spcPts val="0"/>
@@ -5751,11 +5703,11 @@
               </a:buClr>
               <a:buSzPts val="8600"/>
               <a:buChar char="–"/>
-              <a:defRPr sz="8600"/>
+              <a:defRPr sz="7166"/>
             </a:lvl4pPr>
-            <a:lvl5pPr marL="2286000" lvl="4" indent="-774700" algn="l">
-              <a:spcBef>
-                <a:spcPts val="1720"/>
+            <a:lvl5pPr marL="1904924" lvl="4" indent="-645558" algn="l">
+              <a:spcBef>
+                <a:spcPts val="1433"/>
               </a:spcBef>
               <a:spcAft>
                 <a:spcPts val="0"/>
@@ -5765,11 +5717,11 @@
               </a:buClr>
               <a:buSzPts val="8600"/>
               <a:buChar char="»"/>
-              <a:defRPr sz="8600"/>
+              <a:defRPr sz="7166"/>
             </a:lvl5pPr>
-            <a:lvl6pPr marL="2743200" lvl="5" indent="-774700" algn="l">
-              <a:spcBef>
-                <a:spcPts val="1720"/>
+            <a:lvl6pPr marL="2285909" lvl="5" indent="-645558" algn="l">
+              <a:spcBef>
+                <a:spcPts val="1433"/>
               </a:spcBef>
               <a:spcAft>
                 <a:spcPts val="0"/>
@@ -5779,11 +5731,11 @@
               </a:buClr>
               <a:buSzPts val="8600"/>
               <a:buChar char="•"/>
-              <a:defRPr sz="8600"/>
+              <a:defRPr sz="7166"/>
             </a:lvl6pPr>
-            <a:lvl7pPr marL="3200400" lvl="6" indent="-774700" algn="l">
-              <a:spcBef>
-                <a:spcPts val="1720"/>
+            <a:lvl7pPr marL="2666893" lvl="6" indent="-645558" algn="l">
+              <a:spcBef>
+                <a:spcPts val="1433"/>
               </a:spcBef>
               <a:spcAft>
                 <a:spcPts val="0"/>
@@ -5793,11 +5745,11 @@
               </a:buClr>
               <a:buSzPts val="8600"/>
               <a:buChar char="•"/>
-              <a:defRPr sz="8600"/>
+              <a:defRPr sz="7166"/>
             </a:lvl7pPr>
-            <a:lvl8pPr marL="3657600" lvl="7" indent="-774700" algn="l">
-              <a:spcBef>
-                <a:spcPts val="1720"/>
+            <a:lvl8pPr marL="3047878" lvl="7" indent="-645558" algn="l">
+              <a:spcBef>
+                <a:spcPts val="1433"/>
               </a:spcBef>
               <a:spcAft>
                 <a:spcPts val="0"/>
@@ -5807,11 +5759,11 @@
               </a:buClr>
               <a:buSzPts val="8600"/>
               <a:buChar char="•"/>
-              <a:defRPr sz="8600"/>
+              <a:defRPr sz="7166"/>
             </a:lvl8pPr>
-            <a:lvl9pPr marL="4114800" lvl="8" indent="-774700" algn="l">
-              <a:spcBef>
-                <a:spcPts val="1720"/>
+            <a:lvl9pPr marL="3428863" lvl="8" indent="-645558" algn="l">
+              <a:spcBef>
+                <a:spcPts val="1433"/>
               </a:spcBef>
               <a:spcAft>
                 <a:spcPts val="0"/>
@@ -5821,7 +5773,7 @@
               </a:buClr>
               <a:buSzPts val="8600"/>
               <a:buChar char="•"/>
-              <a:defRPr sz="8600"/>
+              <a:defRPr sz="7166"/>
             </a:lvl9pPr>
           </a:lstStyle>
           <a:p>
@@ -5841,8 +5793,8 @@
         </p:nvSpPr>
         <p:spPr>
           <a:xfrm>
-            <a:off x="22311360" y="7680963"/>
-            <a:ext cx="19385280" cy="21724622"/>
+            <a:off x="18592800" y="6400802"/>
+            <a:ext cx="16154400" cy="18103852"/>
           </a:xfrm>
           <a:prstGeom prst="rect">
             <a:avLst/>
@@ -5857,9 +5809,9 @@
             <a:normAutofit/>
           </a:bodyPr>
           <a:lstStyle>
-            <a:lvl1pPr marL="457200" lvl="0" indent="-1079500" algn="l">
-              <a:spcBef>
-                <a:spcPts val="2680"/>
+            <a:lvl1pPr marL="380985" lvl="0" indent="-899547" algn="l">
+              <a:spcBef>
+                <a:spcPts val="2233"/>
               </a:spcBef>
               <a:spcAft>
                 <a:spcPts val="0"/>
@@ -5869,11 +5821,11 @@
               </a:buClr>
               <a:buSzPts val="13400"/>
               <a:buChar char="•"/>
-              <a:defRPr sz="13400"/>
+              <a:defRPr sz="11166"/>
             </a:lvl1pPr>
-            <a:lvl2pPr marL="914400" lvl="1" indent="-958850" algn="l">
-              <a:spcBef>
-                <a:spcPts val="2300"/>
+            <a:lvl2pPr marL="761970" lvl="1" indent="-799010" algn="l">
+              <a:spcBef>
+                <a:spcPts val="1917"/>
               </a:spcBef>
               <a:spcAft>
                 <a:spcPts val="0"/>
@@ -5883,11 +5835,11 @@
               </a:buClr>
               <a:buSzPts val="11500"/>
               <a:buChar char="–"/>
-              <a:defRPr sz="11500"/>
+              <a:defRPr sz="9583"/>
             </a:lvl2pPr>
-            <a:lvl3pPr marL="1371600" lvl="2" indent="-838200" algn="l">
-              <a:spcBef>
-                <a:spcPts val="1920"/>
+            <a:lvl3pPr marL="1142954" lvl="2" indent="-698472" algn="l">
+              <a:spcBef>
+                <a:spcPts val="1600"/>
               </a:spcBef>
               <a:spcAft>
                 <a:spcPts val="0"/>
@@ -5897,11 +5849,11 @@
               </a:buClr>
               <a:buSzPts val="9600"/>
               <a:buChar char="•"/>
-              <a:defRPr sz="9600"/>
+              <a:defRPr sz="8000"/>
             </a:lvl3pPr>
-            <a:lvl4pPr marL="1828800" lvl="3" indent="-774700" algn="l">
-              <a:spcBef>
-                <a:spcPts val="1720"/>
+            <a:lvl4pPr marL="1523939" lvl="3" indent="-645558" algn="l">
+              <a:spcBef>
+                <a:spcPts val="1433"/>
               </a:spcBef>
               <a:spcAft>
                 <a:spcPts val="0"/>
@@ -5911,11 +5863,11 @@
               </a:buClr>
               <a:buSzPts val="8600"/>
               <a:buChar char="–"/>
-              <a:defRPr sz="8600"/>
+              <a:defRPr sz="7166"/>
             </a:lvl4pPr>
-            <a:lvl5pPr marL="2286000" lvl="4" indent="-774700" algn="l">
-              <a:spcBef>
-                <a:spcPts val="1720"/>
+            <a:lvl5pPr marL="1904924" lvl="4" indent="-645558" algn="l">
+              <a:spcBef>
+                <a:spcPts val="1433"/>
               </a:spcBef>
               <a:spcAft>
                 <a:spcPts val="0"/>
@@ -5925,11 +5877,11 @@
               </a:buClr>
               <a:buSzPts val="8600"/>
               <a:buChar char="»"/>
-              <a:defRPr sz="8600"/>
+              <a:defRPr sz="7166"/>
             </a:lvl5pPr>
-            <a:lvl6pPr marL="2743200" lvl="5" indent="-774700" algn="l">
-              <a:spcBef>
-                <a:spcPts val="1720"/>
+            <a:lvl6pPr marL="2285909" lvl="5" indent="-645558" algn="l">
+              <a:spcBef>
+                <a:spcPts val="1433"/>
               </a:spcBef>
               <a:spcAft>
                 <a:spcPts val="0"/>
@@ -5939,11 +5891,11 @@
               </a:buClr>
               <a:buSzPts val="8600"/>
               <a:buChar char="•"/>
-              <a:defRPr sz="8600"/>
+              <a:defRPr sz="7166"/>
             </a:lvl6pPr>
-            <a:lvl7pPr marL="3200400" lvl="6" indent="-774700" algn="l">
-              <a:spcBef>
-                <a:spcPts val="1720"/>
+            <a:lvl7pPr marL="2666893" lvl="6" indent="-645558" algn="l">
+              <a:spcBef>
+                <a:spcPts val="1433"/>
               </a:spcBef>
               <a:spcAft>
                 <a:spcPts val="0"/>
@@ -5953,11 +5905,11 @@
               </a:buClr>
               <a:buSzPts val="8600"/>
               <a:buChar char="•"/>
-              <a:defRPr sz="8600"/>
+              <a:defRPr sz="7166"/>
             </a:lvl7pPr>
-            <a:lvl8pPr marL="3657600" lvl="7" indent="-774700" algn="l">
-              <a:spcBef>
-                <a:spcPts val="1720"/>
+            <a:lvl8pPr marL="3047878" lvl="7" indent="-645558" algn="l">
+              <a:spcBef>
+                <a:spcPts val="1433"/>
               </a:spcBef>
               <a:spcAft>
                 <a:spcPts val="0"/>
@@ -5967,11 +5919,11 @@
               </a:buClr>
               <a:buSzPts val="8600"/>
               <a:buChar char="•"/>
-              <a:defRPr sz="8600"/>
+              <a:defRPr sz="7166"/>
             </a:lvl8pPr>
-            <a:lvl9pPr marL="4114800" lvl="8" indent="-774700" algn="l">
-              <a:spcBef>
-                <a:spcPts val="1720"/>
+            <a:lvl9pPr marL="3428863" lvl="8" indent="-645558" algn="l">
+              <a:spcBef>
+                <a:spcPts val="1433"/>
               </a:spcBef>
               <a:spcAft>
                 <a:spcPts val="0"/>
@@ -5981,7 +5933,7 @@
               </a:buClr>
               <a:buSzPts val="8600"/>
               <a:buChar char="•"/>
-              <a:defRPr sz="8600"/>
+              <a:defRPr sz="7166"/>
             </a:lvl9pPr>
           </a:lstStyle>
           <a:p>
@@ -6001,8 +5953,8 @@
         </p:nvSpPr>
         <p:spPr>
           <a:xfrm>
-            <a:off x="2194560" y="30510482"/>
-            <a:ext cx="10241280" cy="1752600"/>
+            <a:off x="1828800" y="25425402"/>
+            <a:ext cx="8534400" cy="1460500"/>
           </a:xfrm>
           <a:prstGeom prst="rect">
             <a:avLst/>
@@ -6134,8 +6086,8 @@
         </p:nvSpPr>
         <p:spPr>
           <a:xfrm>
-            <a:off x="14996160" y="30510482"/>
-            <a:ext cx="13898880" cy="1752600"/>
+            <a:off x="12496800" y="25425402"/>
+            <a:ext cx="11582400" cy="1460500"/>
           </a:xfrm>
           <a:prstGeom prst="rect">
             <a:avLst/>
@@ -6267,8 +6219,8 @@
         </p:nvSpPr>
         <p:spPr>
           <a:xfrm>
-            <a:off x="31455360" y="30510482"/>
-            <a:ext cx="10241280" cy="1752600"/>
+            <a:off x="26212800" y="25425402"/>
+            <a:ext cx="8534400" cy="1460500"/>
           </a:xfrm>
           <a:prstGeom prst="rect">
             <a:avLst/>
@@ -6348,20 +6300,12 @@
             </a:lvl9pPr>
           </a:lstStyle>
           <a:p>
-            <a:pPr marL="0" lvl="0" indent="0" algn="r" rtl="0">
-              <a:spcBef>
-                <a:spcPts val="0"/>
-              </a:spcBef>
-              <a:spcAft>
-                <a:spcPts val="0"/>
-              </a:spcAft>
-              <a:buNone/>
-            </a:pPr>
             <a:fld id="{00000000-1234-1234-1234-123412341234}" type="slidenum">
-              <a:rPr lang="en-US"/>
+              <a:rPr lang="en-US" smtClean="0"/>
+              <a:pPr/>
               <a:t>‹#›</a:t>
             </a:fld>
-            <a:endParaRPr/>
+            <a:endParaRPr lang="en-US"/>
           </a:p>
         </p:txBody>
       </p:sp>
@@ -6402,8 +6346,8 @@
         </p:nvSpPr>
         <p:spPr>
           <a:xfrm>
-            <a:off x="2194560" y="1318262"/>
-            <a:ext cx="39502080" cy="5486400"/>
+            <a:off x="1828800" y="1098552"/>
+            <a:ext cx="32918400" cy="4572000"/>
           </a:xfrm>
           <a:prstGeom prst="rect">
             <a:avLst/>
@@ -6539,8 +6483,8 @@
         </p:nvSpPr>
         <p:spPr>
           <a:xfrm>
-            <a:off x="2194560" y="7368542"/>
-            <a:ext cx="19392902" cy="3070858"/>
+            <a:off x="1828800" y="6140452"/>
+            <a:ext cx="16160752" cy="2559048"/>
           </a:xfrm>
           <a:prstGeom prst="rect">
             <a:avLst/>
@@ -6555,9 +6499,9 @@
             <a:normAutofit/>
           </a:bodyPr>
           <a:lstStyle>
-            <a:lvl1pPr marL="457200" lvl="0" indent="-228600" algn="l">
-              <a:spcBef>
-                <a:spcPts val="2300"/>
+            <a:lvl1pPr marL="380985" lvl="0" indent="-190492" algn="l">
+              <a:spcBef>
+                <a:spcPts val="1917"/>
               </a:spcBef>
               <a:spcAft>
                 <a:spcPts val="0"/>
@@ -6567,11 +6511,11 @@
               </a:buClr>
               <a:buSzPts val="11500"/>
               <a:buNone/>
-              <a:defRPr sz="11500" b="1"/>
+              <a:defRPr sz="9583" b="1"/>
             </a:lvl1pPr>
-            <a:lvl2pPr marL="914400" lvl="1" indent="-228600" algn="l">
-              <a:spcBef>
-                <a:spcPts val="1920"/>
+            <a:lvl2pPr marL="761970" lvl="1" indent="-190492" algn="l">
+              <a:spcBef>
+                <a:spcPts val="1600"/>
               </a:spcBef>
               <a:spcAft>
                 <a:spcPts val="0"/>
@@ -6581,11 +6525,11 @@
               </a:buClr>
               <a:buSzPts val="9600"/>
               <a:buNone/>
-              <a:defRPr sz="9600" b="1"/>
+              <a:defRPr sz="8000" b="1"/>
             </a:lvl2pPr>
-            <a:lvl3pPr marL="1371600" lvl="2" indent="-228600" algn="l">
-              <a:spcBef>
-                <a:spcPts val="1720"/>
+            <a:lvl3pPr marL="1142954" lvl="2" indent="-190492" algn="l">
+              <a:spcBef>
+                <a:spcPts val="1433"/>
               </a:spcBef>
               <a:spcAft>
                 <a:spcPts val="0"/>
@@ -6595,11 +6539,11 @@
               </a:buClr>
               <a:buSzPts val="8600"/>
               <a:buNone/>
-              <a:defRPr sz="8600" b="1"/>
+              <a:defRPr sz="7166" b="1"/>
             </a:lvl3pPr>
-            <a:lvl4pPr marL="1828800" lvl="3" indent="-228600" algn="l">
-              <a:spcBef>
-                <a:spcPts val="1540"/>
+            <a:lvl4pPr marL="1523939" lvl="3" indent="-190492" algn="l">
+              <a:spcBef>
+                <a:spcPts val="1283"/>
               </a:spcBef>
               <a:spcAft>
                 <a:spcPts val="0"/>
@@ -6609,11 +6553,11 @@
               </a:buClr>
               <a:buSzPts val="7700"/>
               <a:buNone/>
-              <a:defRPr sz="7700" b="1"/>
+              <a:defRPr sz="6416" b="1"/>
             </a:lvl4pPr>
-            <a:lvl5pPr marL="2286000" lvl="4" indent="-228600" algn="l">
-              <a:spcBef>
-                <a:spcPts val="1540"/>
+            <a:lvl5pPr marL="1904924" lvl="4" indent="-190492" algn="l">
+              <a:spcBef>
+                <a:spcPts val="1283"/>
               </a:spcBef>
               <a:spcAft>
                 <a:spcPts val="0"/>
@@ -6623,11 +6567,11 @@
               </a:buClr>
               <a:buSzPts val="7700"/>
               <a:buNone/>
-              <a:defRPr sz="7700" b="1"/>
+              <a:defRPr sz="6416" b="1"/>
             </a:lvl5pPr>
-            <a:lvl6pPr marL="2743200" lvl="5" indent="-228600" algn="l">
-              <a:spcBef>
-                <a:spcPts val="1540"/>
+            <a:lvl6pPr marL="2285909" lvl="5" indent="-190492" algn="l">
+              <a:spcBef>
+                <a:spcPts val="1283"/>
               </a:spcBef>
               <a:spcAft>
                 <a:spcPts val="0"/>
@@ -6637,11 +6581,11 @@
               </a:buClr>
               <a:buSzPts val="7700"/>
               <a:buNone/>
-              <a:defRPr sz="7700" b="1"/>
+              <a:defRPr sz="6416" b="1"/>
             </a:lvl6pPr>
-            <a:lvl7pPr marL="3200400" lvl="6" indent="-228600" algn="l">
-              <a:spcBef>
-                <a:spcPts val="1540"/>
+            <a:lvl7pPr marL="2666893" lvl="6" indent="-190492" algn="l">
+              <a:spcBef>
+                <a:spcPts val="1283"/>
               </a:spcBef>
               <a:spcAft>
                 <a:spcPts val="0"/>
@@ -6651,11 +6595,11 @@
               </a:buClr>
               <a:buSzPts val="7700"/>
               <a:buNone/>
-              <a:defRPr sz="7700" b="1"/>
+              <a:defRPr sz="6416" b="1"/>
             </a:lvl7pPr>
-            <a:lvl8pPr marL="3657600" lvl="7" indent="-228600" algn="l">
-              <a:spcBef>
-                <a:spcPts val="1540"/>
+            <a:lvl8pPr marL="3047878" lvl="7" indent="-190492" algn="l">
+              <a:spcBef>
+                <a:spcPts val="1283"/>
               </a:spcBef>
               <a:spcAft>
                 <a:spcPts val="0"/>
@@ -6665,11 +6609,11 @@
               </a:buClr>
               <a:buSzPts val="7700"/>
               <a:buNone/>
-              <a:defRPr sz="7700" b="1"/>
+              <a:defRPr sz="6416" b="1"/>
             </a:lvl8pPr>
-            <a:lvl9pPr marL="4114800" lvl="8" indent="-228600" algn="l">
-              <a:spcBef>
-                <a:spcPts val="1540"/>
+            <a:lvl9pPr marL="3428863" lvl="8" indent="-190492" algn="l">
+              <a:spcBef>
+                <a:spcPts val="1283"/>
               </a:spcBef>
               <a:spcAft>
                 <a:spcPts val="0"/>
@@ -6679,7 +6623,7 @@
               </a:buClr>
               <a:buSzPts val="7700"/>
               <a:buNone/>
-              <a:defRPr sz="7700" b="1"/>
+              <a:defRPr sz="6416" b="1"/>
             </a:lvl9pPr>
           </a:lstStyle>
           <a:p>
@@ -6699,8 +6643,8 @@
         </p:nvSpPr>
         <p:spPr>
           <a:xfrm>
-            <a:off x="2194560" y="10439400"/>
-            <a:ext cx="19392902" cy="18966182"/>
+            <a:off x="1828800" y="8699500"/>
+            <a:ext cx="16160752" cy="15805152"/>
           </a:xfrm>
           <a:prstGeom prst="rect">
             <a:avLst/>
@@ -6715,9 +6659,9 @@
             <a:normAutofit/>
           </a:bodyPr>
           <a:lstStyle>
-            <a:lvl1pPr marL="457200" lvl="0" indent="-958850" algn="l">
-              <a:spcBef>
-                <a:spcPts val="2300"/>
+            <a:lvl1pPr marL="380985" lvl="0" indent="-799010" algn="l">
+              <a:spcBef>
+                <a:spcPts val="1917"/>
               </a:spcBef>
               <a:spcAft>
                 <a:spcPts val="0"/>
@@ -6727,11 +6671,11 @@
               </a:buClr>
               <a:buSzPts val="11500"/>
               <a:buChar char="•"/>
-              <a:defRPr sz="11500"/>
+              <a:defRPr sz="9583"/>
             </a:lvl1pPr>
-            <a:lvl2pPr marL="914400" lvl="1" indent="-838200" algn="l">
-              <a:spcBef>
-                <a:spcPts val="1920"/>
+            <a:lvl2pPr marL="761970" lvl="1" indent="-698472" algn="l">
+              <a:spcBef>
+                <a:spcPts val="1600"/>
               </a:spcBef>
               <a:spcAft>
                 <a:spcPts val="0"/>
@@ -6741,11 +6685,11 @@
               </a:buClr>
               <a:buSzPts val="9600"/>
               <a:buChar char="–"/>
-              <a:defRPr sz="9600"/>
+              <a:defRPr sz="8000"/>
             </a:lvl2pPr>
-            <a:lvl3pPr marL="1371600" lvl="2" indent="-774700" algn="l">
-              <a:spcBef>
-                <a:spcPts val="1720"/>
+            <a:lvl3pPr marL="1142954" lvl="2" indent="-645558" algn="l">
+              <a:spcBef>
+                <a:spcPts val="1433"/>
               </a:spcBef>
               <a:spcAft>
                 <a:spcPts val="0"/>
@@ -6755,11 +6699,11 @@
               </a:buClr>
               <a:buSzPts val="8600"/>
               <a:buChar char="•"/>
-              <a:defRPr sz="8600"/>
+              <a:defRPr sz="7166"/>
             </a:lvl3pPr>
-            <a:lvl4pPr marL="1828800" lvl="3" indent="-717550" algn="l">
-              <a:spcBef>
-                <a:spcPts val="1540"/>
+            <a:lvl4pPr marL="1523939" lvl="3" indent="-597934" algn="l">
+              <a:spcBef>
+                <a:spcPts val="1283"/>
               </a:spcBef>
               <a:spcAft>
                 <a:spcPts val="0"/>
@@ -6769,11 +6713,11 @@
               </a:buClr>
               <a:buSzPts val="7700"/>
               <a:buChar char="–"/>
-              <a:defRPr sz="7700"/>
+              <a:defRPr sz="6416"/>
             </a:lvl4pPr>
-            <a:lvl5pPr marL="2286000" lvl="4" indent="-717550" algn="l">
-              <a:spcBef>
-                <a:spcPts val="1540"/>
+            <a:lvl5pPr marL="1904924" lvl="4" indent="-597934" algn="l">
+              <a:spcBef>
+                <a:spcPts val="1283"/>
               </a:spcBef>
               <a:spcAft>
                 <a:spcPts val="0"/>
@@ -6783,11 +6727,11 @@
               </a:buClr>
               <a:buSzPts val="7700"/>
               <a:buChar char="»"/>
-              <a:defRPr sz="7700"/>
+              <a:defRPr sz="6416"/>
             </a:lvl5pPr>
-            <a:lvl6pPr marL="2743200" lvl="5" indent="-717550" algn="l">
-              <a:spcBef>
-                <a:spcPts val="1540"/>
+            <a:lvl6pPr marL="2285909" lvl="5" indent="-597934" algn="l">
+              <a:spcBef>
+                <a:spcPts val="1283"/>
               </a:spcBef>
               <a:spcAft>
                 <a:spcPts val="0"/>
@@ -6797,11 +6741,11 @@
               </a:buClr>
               <a:buSzPts val="7700"/>
               <a:buChar char="•"/>
-              <a:defRPr sz="7700"/>
+              <a:defRPr sz="6416"/>
             </a:lvl6pPr>
-            <a:lvl7pPr marL="3200400" lvl="6" indent="-717550" algn="l">
-              <a:spcBef>
-                <a:spcPts val="1540"/>
+            <a:lvl7pPr marL="2666893" lvl="6" indent="-597934" algn="l">
+              <a:spcBef>
+                <a:spcPts val="1283"/>
               </a:spcBef>
               <a:spcAft>
                 <a:spcPts val="0"/>
@@ -6811,11 +6755,11 @@
               </a:buClr>
               <a:buSzPts val="7700"/>
               <a:buChar char="•"/>
-              <a:defRPr sz="7700"/>
+              <a:defRPr sz="6416"/>
             </a:lvl7pPr>
-            <a:lvl8pPr marL="3657600" lvl="7" indent="-717550" algn="l">
-              <a:spcBef>
-                <a:spcPts val="1540"/>
+            <a:lvl8pPr marL="3047878" lvl="7" indent="-597934" algn="l">
+              <a:spcBef>
+                <a:spcPts val="1283"/>
               </a:spcBef>
               <a:spcAft>
                 <a:spcPts val="0"/>
@@ -6825,11 +6769,11 @@
               </a:buClr>
               <a:buSzPts val="7700"/>
               <a:buChar char="•"/>
-              <a:defRPr sz="7700"/>
+              <a:defRPr sz="6416"/>
             </a:lvl8pPr>
-            <a:lvl9pPr marL="4114800" lvl="8" indent="-717550" algn="l">
-              <a:spcBef>
-                <a:spcPts val="1540"/>
+            <a:lvl9pPr marL="3428863" lvl="8" indent="-597934" algn="l">
+              <a:spcBef>
+                <a:spcPts val="1283"/>
               </a:spcBef>
               <a:spcAft>
                 <a:spcPts val="0"/>
@@ -6839,7 +6783,7 @@
               </a:buClr>
               <a:buSzPts val="7700"/>
               <a:buChar char="•"/>
-              <a:defRPr sz="7700"/>
+              <a:defRPr sz="6416"/>
             </a:lvl9pPr>
           </a:lstStyle>
           <a:p>
@@ -6859,8 +6803,8 @@
         </p:nvSpPr>
         <p:spPr>
           <a:xfrm>
-            <a:off x="22296122" y="7368542"/>
-            <a:ext cx="19400520" cy="3070858"/>
+            <a:off x="18580102" y="6140452"/>
+            <a:ext cx="16167100" cy="2559048"/>
           </a:xfrm>
           <a:prstGeom prst="rect">
             <a:avLst/>
@@ -6875,9 +6819,9 @@
             <a:normAutofit/>
           </a:bodyPr>
           <a:lstStyle>
-            <a:lvl1pPr marL="457200" lvl="0" indent="-228600" algn="l">
-              <a:spcBef>
-                <a:spcPts val="2300"/>
+            <a:lvl1pPr marL="380985" lvl="0" indent="-190492" algn="l">
+              <a:spcBef>
+                <a:spcPts val="1917"/>
               </a:spcBef>
               <a:spcAft>
                 <a:spcPts val="0"/>
@@ -6887,11 +6831,11 @@
               </a:buClr>
               <a:buSzPts val="11500"/>
               <a:buNone/>
-              <a:defRPr sz="11500" b="1"/>
+              <a:defRPr sz="9583" b="1"/>
             </a:lvl1pPr>
-            <a:lvl2pPr marL="914400" lvl="1" indent="-228600" algn="l">
-              <a:spcBef>
-                <a:spcPts val="1920"/>
+            <a:lvl2pPr marL="761970" lvl="1" indent="-190492" algn="l">
+              <a:spcBef>
+                <a:spcPts val="1600"/>
               </a:spcBef>
               <a:spcAft>
                 <a:spcPts val="0"/>
@@ -6901,11 +6845,11 @@
               </a:buClr>
               <a:buSzPts val="9600"/>
               <a:buNone/>
-              <a:defRPr sz="9600" b="1"/>
+              <a:defRPr sz="8000" b="1"/>
             </a:lvl2pPr>
-            <a:lvl3pPr marL="1371600" lvl="2" indent="-228600" algn="l">
-              <a:spcBef>
-                <a:spcPts val="1720"/>
+            <a:lvl3pPr marL="1142954" lvl="2" indent="-190492" algn="l">
+              <a:spcBef>
+                <a:spcPts val="1433"/>
               </a:spcBef>
               <a:spcAft>
                 <a:spcPts val="0"/>
@@ -6915,11 +6859,11 @@
               </a:buClr>
               <a:buSzPts val="8600"/>
               <a:buNone/>
-              <a:defRPr sz="8600" b="1"/>
+              <a:defRPr sz="7166" b="1"/>
             </a:lvl3pPr>
-            <a:lvl4pPr marL="1828800" lvl="3" indent="-228600" algn="l">
-              <a:spcBef>
-                <a:spcPts val="1540"/>
+            <a:lvl4pPr marL="1523939" lvl="3" indent="-190492" algn="l">
+              <a:spcBef>
+                <a:spcPts val="1283"/>
               </a:spcBef>
               <a:spcAft>
                 <a:spcPts val="0"/>
@@ -6929,11 +6873,11 @@
               </a:buClr>
               <a:buSzPts val="7700"/>
               <a:buNone/>
-              <a:defRPr sz="7700" b="1"/>
+              <a:defRPr sz="6416" b="1"/>
             </a:lvl4pPr>
-            <a:lvl5pPr marL="2286000" lvl="4" indent="-228600" algn="l">
-              <a:spcBef>
-                <a:spcPts val="1540"/>
+            <a:lvl5pPr marL="1904924" lvl="4" indent="-190492" algn="l">
+              <a:spcBef>
+                <a:spcPts val="1283"/>
               </a:spcBef>
               <a:spcAft>
                 <a:spcPts val="0"/>
@@ -6943,11 +6887,11 @@
               </a:buClr>
               <a:buSzPts val="7700"/>
               <a:buNone/>
-              <a:defRPr sz="7700" b="1"/>
+              <a:defRPr sz="6416" b="1"/>
             </a:lvl5pPr>
-            <a:lvl6pPr marL="2743200" lvl="5" indent="-228600" algn="l">
-              <a:spcBef>
-                <a:spcPts val="1540"/>
+            <a:lvl6pPr marL="2285909" lvl="5" indent="-190492" algn="l">
+              <a:spcBef>
+                <a:spcPts val="1283"/>
               </a:spcBef>
               <a:spcAft>
                 <a:spcPts val="0"/>
@@ -6957,11 +6901,11 @@
               </a:buClr>
               <a:buSzPts val="7700"/>
               <a:buNone/>
-              <a:defRPr sz="7700" b="1"/>
+              <a:defRPr sz="6416" b="1"/>
             </a:lvl6pPr>
-            <a:lvl7pPr marL="3200400" lvl="6" indent="-228600" algn="l">
-              <a:spcBef>
-                <a:spcPts val="1540"/>
+            <a:lvl7pPr marL="2666893" lvl="6" indent="-190492" algn="l">
+              <a:spcBef>
+                <a:spcPts val="1283"/>
               </a:spcBef>
               <a:spcAft>
                 <a:spcPts val="0"/>
@@ -6971,11 +6915,11 @@
               </a:buClr>
               <a:buSzPts val="7700"/>
               <a:buNone/>
-              <a:defRPr sz="7700" b="1"/>
+              <a:defRPr sz="6416" b="1"/>
             </a:lvl7pPr>
-            <a:lvl8pPr marL="3657600" lvl="7" indent="-228600" algn="l">
-              <a:spcBef>
-                <a:spcPts val="1540"/>
+            <a:lvl8pPr marL="3047878" lvl="7" indent="-190492" algn="l">
+              <a:spcBef>
+                <a:spcPts val="1283"/>
               </a:spcBef>
               <a:spcAft>
                 <a:spcPts val="0"/>
@@ -6985,11 +6929,11 @@
               </a:buClr>
               <a:buSzPts val="7700"/>
               <a:buNone/>
-              <a:defRPr sz="7700" b="1"/>
+              <a:defRPr sz="6416" b="1"/>
             </a:lvl8pPr>
-            <a:lvl9pPr marL="4114800" lvl="8" indent="-228600" algn="l">
-              <a:spcBef>
-                <a:spcPts val="1540"/>
+            <a:lvl9pPr marL="3428863" lvl="8" indent="-190492" algn="l">
+              <a:spcBef>
+                <a:spcPts val="1283"/>
               </a:spcBef>
               <a:spcAft>
                 <a:spcPts val="0"/>
@@ -6999,7 +6943,7 @@
               </a:buClr>
               <a:buSzPts val="7700"/>
               <a:buNone/>
-              <a:defRPr sz="7700" b="1"/>
+              <a:defRPr sz="6416" b="1"/>
             </a:lvl9pPr>
           </a:lstStyle>
           <a:p>
@@ -7019,8 +6963,8 @@
         </p:nvSpPr>
         <p:spPr>
           <a:xfrm>
-            <a:off x="22296122" y="10439400"/>
-            <a:ext cx="19400520" cy="18966182"/>
+            <a:off x="18580102" y="8699500"/>
+            <a:ext cx="16167100" cy="15805152"/>
           </a:xfrm>
           <a:prstGeom prst="rect">
             <a:avLst/>
@@ -7035,9 +6979,9 @@
             <a:normAutofit/>
           </a:bodyPr>
           <a:lstStyle>
-            <a:lvl1pPr marL="457200" lvl="0" indent="-958850" algn="l">
-              <a:spcBef>
-                <a:spcPts val="2300"/>
+            <a:lvl1pPr marL="380985" lvl="0" indent="-799010" algn="l">
+              <a:spcBef>
+                <a:spcPts val="1917"/>
               </a:spcBef>
               <a:spcAft>
                 <a:spcPts val="0"/>
@@ -7047,11 +6991,11 @@
               </a:buClr>
               <a:buSzPts val="11500"/>
               <a:buChar char="•"/>
-              <a:defRPr sz="11500"/>
+              <a:defRPr sz="9583"/>
             </a:lvl1pPr>
-            <a:lvl2pPr marL="914400" lvl="1" indent="-838200" algn="l">
-              <a:spcBef>
-                <a:spcPts val="1920"/>
+            <a:lvl2pPr marL="761970" lvl="1" indent="-698472" algn="l">
+              <a:spcBef>
+                <a:spcPts val="1600"/>
               </a:spcBef>
               <a:spcAft>
                 <a:spcPts val="0"/>
@@ -7061,11 +7005,11 @@
               </a:buClr>
               <a:buSzPts val="9600"/>
               <a:buChar char="–"/>
-              <a:defRPr sz="9600"/>
+              <a:defRPr sz="8000"/>
             </a:lvl2pPr>
-            <a:lvl3pPr marL="1371600" lvl="2" indent="-774700" algn="l">
-              <a:spcBef>
-                <a:spcPts val="1720"/>
+            <a:lvl3pPr marL="1142954" lvl="2" indent="-645558" algn="l">
+              <a:spcBef>
+                <a:spcPts val="1433"/>
               </a:spcBef>
               <a:spcAft>
                 <a:spcPts val="0"/>
@@ -7075,11 +7019,11 @@
               </a:buClr>
               <a:buSzPts val="8600"/>
               <a:buChar char="•"/>
-              <a:defRPr sz="8600"/>
+              <a:defRPr sz="7166"/>
             </a:lvl3pPr>
-            <a:lvl4pPr marL="1828800" lvl="3" indent="-717550" algn="l">
-              <a:spcBef>
-                <a:spcPts val="1540"/>
+            <a:lvl4pPr marL="1523939" lvl="3" indent="-597934" algn="l">
+              <a:spcBef>
+                <a:spcPts val="1283"/>
               </a:spcBef>
               <a:spcAft>
                 <a:spcPts val="0"/>
@@ -7089,11 +7033,11 @@
               </a:buClr>
               <a:buSzPts val="7700"/>
               <a:buChar char="–"/>
-              <a:defRPr sz="7700"/>
+              <a:defRPr sz="6416"/>
             </a:lvl4pPr>
-            <a:lvl5pPr marL="2286000" lvl="4" indent="-717550" algn="l">
-              <a:spcBef>
-                <a:spcPts val="1540"/>
+            <a:lvl5pPr marL="1904924" lvl="4" indent="-597934" algn="l">
+              <a:spcBef>
+                <a:spcPts val="1283"/>
               </a:spcBef>
               <a:spcAft>
                 <a:spcPts val="0"/>
@@ -7103,11 +7047,11 @@
               </a:buClr>
               <a:buSzPts val="7700"/>
               <a:buChar char="»"/>
-              <a:defRPr sz="7700"/>
+              <a:defRPr sz="6416"/>
             </a:lvl5pPr>
-            <a:lvl6pPr marL="2743200" lvl="5" indent="-717550" algn="l">
-              <a:spcBef>
-                <a:spcPts val="1540"/>
+            <a:lvl6pPr marL="2285909" lvl="5" indent="-597934" algn="l">
+              <a:spcBef>
+                <a:spcPts val="1283"/>
               </a:spcBef>
               <a:spcAft>
                 <a:spcPts val="0"/>
@@ -7117,11 +7061,11 @@
               </a:buClr>
               <a:buSzPts val="7700"/>
               <a:buChar char="•"/>
-              <a:defRPr sz="7700"/>
+              <a:defRPr sz="6416"/>
             </a:lvl6pPr>
-            <a:lvl7pPr marL="3200400" lvl="6" indent="-717550" algn="l">
-              <a:spcBef>
-                <a:spcPts val="1540"/>
+            <a:lvl7pPr marL="2666893" lvl="6" indent="-597934" algn="l">
+              <a:spcBef>
+                <a:spcPts val="1283"/>
               </a:spcBef>
               <a:spcAft>
                 <a:spcPts val="0"/>
@@ -7131,11 +7075,11 @@
               </a:buClr>
               <a:buSzPts val="7700"/>
               <a:buChar char="•"/>
-              <a:defRPr sz="7700"/>
+              <a:defRPr sz="6416"/>
             </a:lvl7pPr>
-            <a:lvl8pPr marL="3657600" lvl="7" indent="-717550" algn="l">
-              <a:spcBef>
-                <a:spcPts val="1540"/>
+            <a:lvl8pPr marL="3047878" lvl="7" indent="-597934" algn="l">
+              <a:spcBef>
+                <a:spcPts val="1283"/>
               </a:spcBef>
               <a:spcAft>
                 <a:spcPts val="0"/>
@@ -7145,11 +7089,11 @@
               </a:buClr>
               <a:buSzPts val="7700"/>
               <a:buChar char="•"/>
-              <a:defRPr sz="7700"/>
+              <a:defRPr sz="6416"/>
             </a:lvl8pPr>
-            <a:lvl9pPr marL="4114800" lvl="8" indent="-717550" algn="l">
-              <a:spcBef>
-                <a:spcPts val="1540"/>
+            <a:lvl9pPr marL="3428863" lvl="8" indent="-597934" algn="l">
+              <a:spcBef>
+                <a:spcPts val="1283"/>
               </a:spcBef>
               <a:spcAft>
                 <a:spcPts val="0"/>
@@ -7159,7 +7103,7 @@
               </a:buClr>
               <a:buSzPts val="7700"/>
               <a:buChar char="•"/>
-              <a:defRPr sz="7700"/>
+              <a:defRPr sz="6416"/>
             </a:lvl9pPr>
           </a:lstStyle>
           <a:p>
@@ -7179,8 +7123,8 @@
         </p:nvSpPr>
         <p:spPr>
           <a:xfrm>
-            <a:off x="2194560" y="30510482"/>
-            <a:ext cx="10241280" cy="1752600"/>
+            <a:off x="1828800" y="25425402"/>
+            <a:ext cx="8534400" cy="1460500"/>
           </a:xfrm>
           <a:prstGeom prst="rect">
             <a:avLst/>
@@ -7312,8 +7256,8 @@
         </p:nvSpPr>
         <p:spPr>
           <a:xfrm>
-            <a:off x="14996160" y="30510482"/>
-            <a:ext cx="13898880" cy="1752600"/>
+            <a:off x="12496800" y="25425402"/>
+            <a:ext cx="11582400" cy="1460500"/>
           </a:xfrm>
           <a:prstGeom prst="rect">
             <a:avLst/>
@@ -7445,8 +7389,8 @@
         </p:nvSpPr>
         <p:spPr>
           <a:xfrm>
-            <a:off x="31455360" y="30510482"/>
-            <a:ext cx="10241280" cy="1752600"/>
+            <a:off x="26212800" y="25425402"/>
+            <a:ext cx="8534400" cy="1460500"/>
           </a:xfrm>
           <a:prstGeom prst="rect">
             <a:avLst/>
@@ -7526,20 +7470,12 @@
             </a:lvl9pPr>
           </a:lstStyle>
           <a:p>
-            <a:pPr marL="0" lvl="0" indent="0" algn="r" rtl="0">
-              <a:spcBef>
-                <a:spcPts val="0"/>
-              </a:spcBef>
-              <a:spcAft>
-                <a:spcPts val="0"/>
-              </a:spcAft>
-              <a:buNone/>
-            </a:pPr>
             <a:fld id="{00000000-1234-1234-1234-123412341234}" type="slidenum">
-              <a:rPr lang="en-US"/>
+              <a:rPr lang="en-US" smtClean="0"/>
+              <a:pPr/>
               <a:t>‹#›</a:t>
             </a:fld>
-            <a:endParaRPr/>
+            <a:endParaRPr lang="en-US"/>
           </a:p>
         </p:txBody>
       </p:sp>
@@ -7580,8 +7516,8 @@
         </p:nvSpPr>
         <p:spPr>
           <a:xfrm>
-            <a:off x="2194560" y="1318262"/>
-            <a:ext cx="39502080" cy="5486400"/>
+            <a:off x="1828800" y="1098552"/>
+            <a:ext cx="32918400" cy="4572000"/>
           </a:xfrm>
           <a:prstGeom prst="rect">
             <a:avLst/>
@@ -7716,8 +7652,8 @@
         </p:nvSpPr>
         <p:spPr>
           <a:xfrm>
-            <a:off x="2194560" y="30510482"/>
-            <a:ext cx="10241280" cy="1752600"/>
+            <a:off x="1828800" y="25425402"/>
+            <a:ext cx="8534400" cy="1460500"/>
           </a:xfrm>
           <a:prstGeom prst="rect">
             <a:avLst/>
@@ -7849,8 +7785,8 @@
         </p:nvSpPr>
         <p:spPr>
           <a:xfrm>
-            <a:off x="14996160" y="30510482"/>
-            <a:ext cx="13898880" cy="1752600"/>
+            <a:off x="12496800" y="25425402"/>
+            <a:ext cx="11582400" cy="1460500"/>
           </a:xfrm>
           <a:prstGeom prst="rect">
             <a:avLst/>
@@ -7982,8 +7918,8 @@
         </p:nvSpPr>
         <p:spPr>
           <a:xfrm>
-            <a:off x="31455360" y="30510482"/>
-            <a:ext cx="10241280" cy="1752600"/>
+            <a:off x="26212800" y="25425402"/>
+            <a:ext cx="8534400" cy="1460500"/>
           </a:xfrm>
           <a:prstGeom prst="rect">
             <a:avLst/>
@@ -8063,20 +7999,12 @@
             </a:lvl9pPr>
           </a:lstStyle>
           <a:p>
-            <a:pPr marL="0" lvl="0" indent="0" algn="r" rtl="0">
-              <a:spcBef>
-                <a:spcPts val="0"/>
-              </a:spcBef>
-              <a:spcAft>
-                <a:spcPts val="0"/>
-              </a:spcAft>
-              <a:buNone/>
-            </a:pPr>
             <a:fld id="{00000000-1234-1234-1234-123412341234}" type="slidenum">
-              <a:rPr lang="en-US"/>
+              <a:rPr lang="en-US" smtClean="0"/>
+              <a:pPr/>
               <a:t>‹#›</a:t>
             </a:fld>
-            <a:endParaRPr/>
+            <a:endParaRPr lang="en-US"/>
           </a:p>
         </p:txBody>
       </p:sp>
@@ -8117,8 +8045,8 @@
         </p:nvSpPr>
         <p:spPr>
           <a:xfrm>
-            <a:off x="2194563" y="1310640"/>
-            <a:ext cx="14439902" cy="5577840"/>
+            <a:off x="1828802" y="1092200"/>
+            <a:ext cx="12033252" cy="4648200"/>
           </a:xfrm>
           <a:prstGeom prst="rect">
             <a:avLst/>
@@ -8146,7 +8074,7 @@
               <a:buSzPts val="9600"/>
               <a:buFont typeface="Calibri"/>
               <a:buNone/>
-              <a:defRPr sz="9600" b="1"/>
+              <a:defRPr sz="8000" b="1"/>
             </a:lvl1pPr>
             <a:lvl2pPr lvl="1">
               <a:spcBef>
@@ -8254,8 +8182,8 @@
         </p:nvSpPr>
         <p:spPr>
           <a:xfrm>
-            <a:off x="17160240" y="1310643"/>
-            <a:ext cx="24536400" cy="28094942"/>
+            <a:off x="14300200" y="1092202"/>
+            <a:ext cx="20447000" cy="23412452"/>
           </a:xfrm>
           <a:prstGeom prst="rect">
             <a:avLst/>
@@ -8270,9 +8198,9 @@
             <a:normAutofit/>
           </a:bodyPr>
           <a:lstStyle>
-            <a:lvl1pPr marL="457200" lvl="0" indent="-1206500" algn="l">
-              <a:spcBef>
-                <a:spcPts val="3080"/>
+            <a:lvl1pPr marL="380985" lvl="0" indent="-1005376" algn="l">
+              <a:spcBef>
+                <a:spcPts val="2567"/>
               </a:spcBef>
               <a:spcAft>
                 <a:spcPts val="0"/>
@@ -8282,11 +8210,11 @@
               </a:buClr>
               <a:buSzPts val="15400"/>
               <a:buChar char="•"/>
-              <a:defRPr sz="15400"/>
+              <a:defRPr sz="12833"/>
             </a:lvl1pPr>
-            <a:lvl2pPr marL="914400" lvl="1" indent="-1079500" algn="l">
-              <a:spcBef>
-                <a:spcPts val="2680"/>
+            <a:lvl2pPr marL="761970" lvl="1" indent="-899547" algn="l">
+              <a:spcBef>
+                <a:spcPts val="2233"/>
               </a:spcBef>
               <a:spcAft>
                 <a:spcPts val="0"/>
@@ -8296,11 +8224,11 @@
               </a:buClr>
               <a:buSzPts val="13400"/>
               <a:buChar char="–"/>
-              <a:defRPr sz="13400"/>
+              <a:defRPr sz="11166"/>
             </a:lvl2pPr>
-            <a:lvl3pPr marL="1371600" lvl="2" indent="-958850" algn="l">
-              <a:spcBef>
-                <a:spcPts val="2300"/>
+            <a:lvl3pPr marL="1142954" lvl="2" indent="-799010" algn="l">
+              <a:spcBef>
+                <a:spcPts val="1917"/>
               </a:spcBef>
               <a:spcAft>
                 <a:spcPts val="0"/>
@@ -8310,11 +8238,11 @@
               </a:buClr>
               <a:buSzPts val="11500"/>
               <a:buChar char="•"/>
-              <a:defRPr sz="11500"/>
+              <a:defRPr sz="9583"/>
             </a:lvl3pPr>
-            <a:lvl4pPr marL="1828800" lvl="3" indent="-838200" algn="l">
-              <a:spcBef>
-                <a:spcPts val="1920"/>
+            <a:lvl4pPr marL="1523939" lvl="3" indent="-698472" algn="l">
+              <a:spcBef>
+                <a:spcPts val="1600"/>
               </a:spcBef>
               <a:spcAft>
                 <a:spcPts val="0"/>
@@ -8324,11 +8252,11 @@
               </a:buClr>
               <a:buSzPts val="9600"/>
               <a:buChar char="–"/>
-              <a:defRPr sz="9600"/>
+              <a:defRPr sz="8000"/>
             </a:lvl4pPr>
-            <a:lvl5pPr marL="2286000" lvl="4" indent="-838200" algn="l">
-              <a:spcBef>
-                <a:spcPts val="1920"/>
+            <a:lvl5pPr marL="1904924" lvl="4" indent="-698472" algn="l">
+              <a:spcBef>
+                <a:spcPts val="1600"/>
               </a:spcBef>
               <a:spcAft>
                 <a:spcPts val="0"/>
@@ -8338,11 +8266,11 @@
               </a:buClr>
               <a:buSzPts val="9600"/>
               <a:buChar char="»"/>
-              <a:defRPr sz="9600"/>
+              <a:defRPr sz="8000"/>
             </a:lvl5pPr>
-            <a:lvl6pPr marL="2743200" lvl="5" indent="-838200" algn="l">
-              <a:spcBef>
-                <a:spcPts val="1920"/>
+            <a:lvl6pPr marL="2285909" lvl="5" indent="-698472" algn="l">
+              <a:spcBef>
+                <a:spcPts val="1600"/>
               </a:spcBef>
               <a:spcAft>
                 <a:spcPts val="0"/>
@@ -8352,11 +8280,11 @@
               </a:buClr>
               <a:buSzPts val="9600"/>
               <a:buChar char="•"/>
-              <a:defRPr sz="9600"/>
+              <a:defRPr sz="8000"/>
             </a:lvl6pPr>
-            <a:lvl7pPr marL="3200400" lvl="6" indent="-838200" algn="l">
-              <a:spcBef>
-                <a:spcPts val="1920"/>
+            <a:lvl7pPr marL="2666893" lvl="6" indent="-698472" algn="l">
+              <a:spcBef>
+                <a:spcPts val="1600"/>
               </a:spcBef>
               <a:spcAft>
                 <a:spcPts val="0"/>
@@ -8366,11 +8294,11 @@
               </a:buClr>
               <a:buSzPts val="9600"/>
               <a:buChar char="•"/>
-              <a:defRPr sz="9600"/>
+              <a:defRPr sz="8000"/>
             </a:lvl7pPr>
-            <a:lvl8pPr marL="3657600" lvl="7" indent="-838200" algn="l">
-              <a:spcBef>
-                <a:spcPts val="1920"/>
+            <a:lvl8pPr marL="3047878" lvl="7" indent="-698472" algn="l">
+              <a:spcBef>
+                <a:spcPts val="1600"/>
               </a:spcBef>
               <a:spcAft>
                 <a:spcPts val="0"/>
@@ -8380,11 +8308,11 @@
               </a:buClr>
               <a:buSzPts val="9600"/>
               <a:buChar char="•"/>
-              <a:defRPr sz="9600"/>
+              <a:defRPr sz="8000"/>
             </a:lvl8pPr>
-            <a:lvl9pPr marL="4114800" lvl="8" indent="-838200" algn="l">
-              <a:spcBef>
-                <a:spcPts val="1920"/>
+            <a:lvl9pPr marL="3428863" lvl="8" indent="-698472" algn="l">
+              <a:spcBef>
+                <a:spcPts val="1600"/>
               </a:spcBef>
               <a:spcAft>
                 <a:spcPts val="0"/>
@@ -8394,7 +8322,7 @@
               </a:buClr>
               <a:buSzPts val="9600"/>
               <a:buChar char="•"/>
-              <a:defRPr sz="9600"/>
+              <a:defRPr sz="8000"/>
             </a:lvl9pPr>
           </a:lstStyle>
           <a:p>
@@ -8414,8 +8342,8 @@
         </p:nvSpPr>
         <p:spPr>
           <a:xfrm>
-            <a:off x="2194563" y="6888483"/>
-            <a:ext cx="14439902" cy="22517102"/>
+            <a:off x="1828802" y="5740402"/>
+            <a:ext cx="12033252" cy="18764252"/>
           </a:xfrm>
           <a:prstGeom prst="rect">
             <a:avLst/>
@@ -8430,9 +8358,9 @@
             <a:normAutofit/>
           </a:bodyPr>
           <a:lstStyle>
-            <a:lvl1pPr marL="457200" lvl="0" indent="-228600" algn="l">
-              <a:spcBef>
-                <a:spcPts val="1340"/>
+            <a:lvl1pPr marL="380985" lvl="0" indent="-190492" algn="l">
+              <a:spcBef>
+                <a:spcPts val="1117"/>
               </a:spcBef>
               <a:spcAft>
                 <a:spcPts val="0"/>
@@ -8442,11 +8370,11 @@
               </a:buClr>
               <a:buSzPts val="6700"/>
               <a:buNone/>
-              <a:defRPr sz="6700"/>
+              <a:defRPr sz="5583"/>
             </a:lvl1pPr>
-            <a:lvl2pPr marL="914400" lvl="1" indent="-228600" algn="l">
-              <a:spcBef>
-                <a:spcPts val="1160"/>
+            <a:lvl2pPr marL="761970" lvl="1" indent="-190492" algn="l">
+              <a:spcBef>
+                <a:spcPts val="967"/>
               </a:spcBef>
               <a:spcAft>
                 <a:spcPts val="0"/>
@@ -8456,11 +8384,11 @@
               </a:buClr>
               <a:buSzPts val="5800"/>
               <a:buNone/>
-              <a:defRPr sz="5800"/>
+              <a:defRPr sz="4833"/>
             </a:lvl2pPr>
-            <a:lvl3pPr marL="1371600" lvl="2" indent="-228600" algn="l">
-              <a:spcBef>
-                <a:spcPts val="960"/>
+            <a:lvl3pPr marL="1142954" lvl="2" indent="-190492" algn="l">
+              <a:spcBef>
+                <a:spcPts val="800"/>
               </a:spcBef>
               <a:spcAft>
                 <a:spcPts val="0"/>
@@ -8470,11 +8398,11 @@
               </a:buClr>
               <a:buSzPts val="4800"/>
               <a:buNone/>
-              <a:defRPr sz="4800"/>
+              <a:defRPr sz="4000"/>
             </a:lvl3pPr>
-            <a:lvl4pPr marL="1828800" lvl="3" indent="-228600" algn="l">
-              <a:spcBef>
-                <a:spcPts val="860"/>
+            <a:lvl4pPr marL="1523939" lvl="3" indent="-190492" algn="l">
+              <a:spcBef>
+                <a:spcPts val="717"/>
               </a:spcBef>
               <a:spcAft>
                 <a:spcPts val="0"/>
@@ -8484,11 +8412,11 @@
               </a:buClr>
               <a:buSzPts val="4300"/>
               <a:buNone/>
-              <a:defRPr sz="4300"/>
+              <a:defRPr sz="3583"/>
             </a:lvl4pPr>
-            <a:lvl5pPr marL="2286000" lvl="4" indent="-228600" algn="l">
-              <a:spcBef>
-                <a:spcPts val="860"/>
+            <a:lvl5pPr marL="1904924" lvl="4" indent="-190492" algn="l">
+              <a:spcBef>
+                <a:spcPts val="717"/>
               </a:spcBef>
               <a:spcAft>
                 <a:spcPts val="0"/>
@@ -8498,11 +8426,11 @@
               </a:buClr>
               <a:buSzPts val="4300"/>
               <a:buNone/>
-              <a:defRPr sz="4300"/>
+              <a:defRPr sz="3583"/>
             </a:lvl5pPr>
-            <a:lvl6pPr marL="2743200" lvl="5" indent="-228600" algn="l">
-              <a:spcBef>
-                <a:spcPts val="860"/>
+            <a:lvl6pPr marL="2285909" lvl="5" indent="-190492" algn="l">
+              <a:spcBef>
+                <a:spcPts val="717"/>
               </a:spcBef>
               <a:spcAft>
                 <a:spcPts val="0"/>
@@ -8512,11 +8440,11 @@
               </a:buClr>
               <a:buSzPts val="4300"/>
               <a:buNone/>
-              <a:defRPr sz="4300"/>
+              <a:defRPr sz="3583"/>
             </a:lvl6pPr>
-            <a:lvl7pPr marL="3200400" lvl="6" indent="-228600" algn="l">
-              <a:spcBef>
-                <a:spcPts val="860"/>
+            <a:lvl7pPr marL="2666893" lvl="6" indent="-190492" algn="l">
+              <a:spcBef>
+                <a:spcPts val="717"/>
               </a:spcBef>
               <a:spcAft>
                 <a:spcPts val="0"/>
@@ -8526,11 +8454,11 @@
               </a:buClr>
               <a:buSzPts val="4300"/>
               <a:buNone/>
-              <a:defRPr sz="4300"/>
+              <a:defRPr sz="3583"/>
             </a:lvl7pPr>
-            <a:lvl8pPr marL="3657600" lvl="7" indent="-228600" algn="l">
-              <a:spcBef>
-                <a:spcPts val="860"/>
+            <a:lvl8pPr marL="3047878" lvl="7" indent="-190492" algn="l">
+              <a:spcBef>
+                <a:spcPts val="717"/>
               </a:spcBef>
               <a:spcAft>
                 <a:spcPts val="0"/>
@@ -8540,11 +8468,11 @@
               </a:buClr>
               <a:buSzPts val="4300"/>
               <a:buNone/>
-              <a:defRPr sz="4300"/>
+              <a:defRPr sz="3583"/>
             </a:lvl8pPr>
-            <a:lvl9pPr marL="4114800" lvl="8" indent="-228600" algn="l">
-              <a:spcBef>
-                <a:spcPts val="860"/>
+            <a:lvl9pPr marL="3428863" lvl="8" indent="-190492" algn="l">
+              <a:spcBef>
+                <a:spcPts val="717"/>
               </a:spcBef>
               <a:spcAft>
                 <a:spcPts val="0"/>
@@ -8554,7 +8482,7 @@
               </a:buClr>
               <a:buSzPts val="4300"/>
               <a:buNone/>
-              <a:defRPr sz="4300"/>
+              <a:defRPr sz="3583"/>
             </a:lvl9pPr>
           </a:lstStyle>
           <a:p>
@@ -8574,8 +8502,8 @@
         </p:nvSpPr>
         <p:spPr>
           <a:xfrm>
-            <a:off x="2194560" y="30510482"/>
-            <a:ext cx="10241280" cy="1752600"/>
+            <a:off x="1828800" y="25425402"/>
+            <a:ext cx="8534400" cy="1460500"/>
           </a:xfrm>
           <a:prstGeom prst="rect">
             <a:avLst/>
@@ -8707,8 +8635,8 @@
         </p:nvSpPr>
         <p:spPr>
           <a:xfrm>
-            <a:off x="14996160" y="30510482"/>
-            <a:ext cx="13898880" cy="1752600"/>
+            <a:off x="12496800" y="25425402"/>
+            <a:ext cx="11582400" cy="1460500"/>
           </a:xfrm>
           <a:prstGeom prst="rect">
             <a:avLst/>
@@ -8840,8 +8768,8 @@
         </p:nvSpPr>
         <p:spPr>
           <a:xfrm>
-            <a:off x="31455360" y="30510482"/>
-            <a:ext cx="10241280" cy="1752600"/>
+            <a:off x="26212800" y="25425402"/>
+            <a:ext cx="8534400" cy="1460500"/>
           </a:xfrm>
           <a:prstGeom prst="rect">
             <a:avLst/>
@@ -8921,20 +8849,12 @@
             </a:lvl9pPr>
           </a:lstStyle>
           <a:p>
-            <a:pPr marL="0" lvl="0" indent="0" algn="r" rtl="0">
-              <a:spcBef>
-                <a:spcPts val="0"/>
-              </a:spcBef>
-              <a:spcAft>
-                <a:spcPts val="0"/>
-              </a:spcAft>
-              <a:buNone/>
-            </a:pPr>
             <a:fld id="{00000000-1234-1234-1234-123412341234}" type="slidenum">
-              <a:rPr lang="en-US"/>
+              <a:rPr lang="en-US" smtClean="0"/>
+              <a:pPr/>
               <a:t>‹#›</a:t>
             </a:fld>
-            <a:endParaRPr/>
+            <a:endParaRPr lang="en-US"/>
           </a:p>
         </p:txBody>
       </p:sp>
@@ -8975,8 +8895,8 @@
         </p:nvSpPr>
         <p:spPr>
           <a:xfrm>
-            <a:off x="8602982" y="23042880"/>
-            <a:ext cx="26334720" cy="2720342"/>
+            <a:off x="7169152" y="19202400"/>
+            <a:ext cx="21945600" cy="2266952"/>
           </a:xfrm>
           <a:prstGeom prst="rect">
             <a:avLst/>
@@ -9004,7 +8924,7 @@
               <a:buSzPts val="9600"/>
               <a:buFont typeface="Calibri"/>
               <a:buNone/>
-              <a:defRPr sz="9600" b="1"/>
+              <a:defRPr sz="8000" b="1"/>
             </a:lvl1pPr>
             <a:lvl2pPr lvl="1">
               <a:spcBef>
@@ -9112,8 +9032,8 @@
         </p:nvSpPr>
         <p:spPr>
           <a:xfrm>
-            <a:off x="8602982" y="2941320"/>
-            <a:ext cx="26334720" cy="19751040"/>
+            <a:off x="7169152" y="2451100"/>
+            <a:ext cx="21945600" cy="16459200"/>
           </a:xfrm>
           <a:prstGeom prst="rect">
             <a:avLst/>
@@ -9136,8 +9056,8 @@
         </p:nvSpPr>
         <p:spPr>
           <a:xfrm>
-            <a:off x="8602982" y="25763222"/>
-            <a:ext cx="26334720" cy="3863338"/>
+            <a:off x="7169152" y="21469352"/>
+            <a:ext cx="21945600" cy="3219448"/>
           </a:xfrm>
           <a:prstGeom prst="rect">
             <a:avLst/>
@@ -9152,9 +9072,9 @@
             <a:normAutofit/>
           </a:bodyPr>
           <a:lstStyle>
-            <a:lvl1pPr marL="457200" lvl="0" indent="-228600" algn="l">
-              <a:spcBef>
-                <a:spcPts val="1340"/>
+            <a:lvl1pPr marL="380985" lvl="0" indent="-190492" algn="l">
+              <a:spcBef>
+                <a:spcPts val="1117"/>
               </a:spcBef>
               <a:spcAft>
                 <a:spcPts val="0"/>
@@ -9164,11 +9084,11 @@
               </a:buClr>
               <a:buSzPts val="6700"/>
               <a:buNone/>
-              <a:defRPr sz="6700"/>
+              <a:defRPr sz="5583"/>
             </a:lvl1pPr>
-            <a:lvl2pPr marL="914400" lvl="1" indent="-228600" algn="l">
-              <a:spcBef>
-                <a:spcPts val="1160"/>
+            <a:lvl2pPr marL="761970" lvl="1" indent="-190492" algn="l">
+              <a:spcBef>
+                <a:spcPts val="967"/>
               </a:spcBef>
               <a:spcAft>
                 <a:spcPts val="0"/>
@@ -9178,11 +9098,11 @@
               </a:buClr>
               <a:buSzPts val="5800"/>
               <a:buNone/>
-              <a:defRPr sz="5800"/>
+              <a:defRPr sz="4833"/>
             </a:lvl2pPr>
-            <a:lvl3pPr marL="1371600" lvl="2" indent="-228600" algn="l">
-              <a:spcBef>
-                <a:spcPts val="960"/>
+            <a:lvl3pPr marL="1142954" lvl="2" indent="-190492" algn="l">
+              <a:spcBef>
+                <a:spcPts val="800"/>
               </a:spcBef>
               <a:spcAft>
                 <a:spcPts val="0"/>
@@ -9192,11 +9112,11 @@
               </a:buClr>
               <a:buSzPts val="4800"/>
               <a:buNone/>
-              <a:defRPr sz="4800"/>
+              <a:defRPr sz="4000"/>
             </a:lvl3pPr>
-            <a:lvl4pPr marL="1828800" lvl="3" indent="-228600" algn="l">
-              <a:spcBef>
-                <a:spcPts val="860"/>
+            <a:lvl4pPr marL="1523939" lvl="3" indent="-190492" algn="l">
+              <a:spcBef>
+                <a:spcPts val="717"/>
               </a:spcBef>
               <a:spcAft>
                 <a:spcPts val="0"/>
@@ -9206,11 +9126,11 @@
               </a:buClr>
               <a:buSzPts val="4300"/>
               <a:buNone/>
-              <a:defRPr sz="4300"/>
+              <a:defRPr sz="3583"/>
             </a:lvl4pPr>
-            <a:lvl5pPr marL="2286000" lvl="4" indent="-228600" algn="l">
-              <a:spcBef>
-                <a:spcPts val="860"/>
+            <a:lvl5pPr marL="1904924" lvl="4" indent="-190492" algn="l">
+              <a:spcBef>
+                <a:spcPts val="717"/>
               </a:spcBef>
               <a:spcAft>
                 <a:spcPts val="0"/>
@@ -9220,11 +9140,11 @@
               </a:buClr>
               <a:buSzPts val="4300"/>
               <a:buNone/>
-              <a:defRPr sz="4300"/>
+              <a:defRPr sz="3583"/>
             </a:lvl5pPr>
-            <a:lvl6pPr marL="2743200" lvl="5" indent="-228600" algn="l">
-              <a:spcBef>
-                <a:spcPts val="860"/>
+            <a:lvl6pPr marL="2285909" lvl="5" indent="-190492" algn="l">
+              <a:spcBef>
+                <a:spcPts val="717"/>
               </a:spcBef>
               <a:spcAft>
                 <a:spcPts val="0"/>
@@ -9234,11 +9154,11 @@
               </a:buClr>
               <a:buSzPts val="4300"/>
               <a:buNone/>
-              <a:defRPr sz="4300"/>
+              <a:defRPr sz="3583"/>
             </a:lvl6pPr>
-            <a:lvl7pPr marL="3200400" lvl="6" indent="-228600" algn="l">
-              <a:spcBef>
-                <a:spcPts val="860"/>
+            <a:lvl7pPr marL="2666893" lvl="6" indent="-190492" algn="l">
+              <a:spcBef>
+                <a:spcPts val="717"/>
               </a:spcBef>
               <a:spcAft>
                 <a:spcPts val="0"/>
@@ -9248,11 +9168,11 @@
               </a:buClr>
               <a:buSzPts val="4300"/>
               <a:buNone/>
-              <a:defRPr sz="4300"/>
+              <a:defRPr sz="3583"/>
             </a:lvl7pPr>
-            <a:lvl8pPr marL="3657600" lvl="7" indent="-228600" algn="l">
-              <a:spcBef>
-                <a:spcPts val="860"/>
+            <a:lvl8pPr marL="3047878" lvl="7" indent="-190492" algn="l">
+              <a:spcBef>
+                <a:spcPts val="717"/>
               </a:spcBef>
               <a:spcAft>
                 <a:spcPts val="0"/>
@@ -9262,11 +9182,11 @@
               </a:buClr>
               <a:buSzPts val="4300"/>
               <a:buNone/>
-              <a:defRPr sz="4300"/>
+              <a:defRPr sz="3583"/>
             </a:lvl8pPr>
-            <a:lvl9pPr marL="4114800" lvl="8" indent="-228600" algn="l">
-              <a:spcBef>
-                <a:spcPts val="860"/>
+            <a:lvl9pPr marL="3428863" lvl="8" indent="-190492" algn="l">
+              <a:spcBef>
+                <a:spcPts val="717"/>
               </a:spcBef>
               <a:spcAft>
                 <a:spcPts val="0"/>
@@ -9276,7 +9196,7 @@
               </a:buClr>
               <a:buSzPts val="4300"/>
               <a:buNone/>
-              <a:defRPr sz="4300"/>
+              <a:defRPr sz="3583"/>
             </a:lvl9pPr>
           </a:lstStyle>
           <a:p>
@@ -9296,8 +9216,8 @@
         </p:nvSpPr>
         <p:spPr>
           <a:xfrm>
-            <a:off x="2194560" y="30510482"/>
-            <a:ext cx="10241280" cy="1752600"/>
+            <a:off x="1828800" y="25425402"/>
+            <a:ext cx="8534400" cy="1460500"/>
           </a:xfrm>
           <a:prstGeom prst="rect">
             <a:avLst/>
@@ -9429,8 +9349,8 @@
         </p:nvSpPr>
         <p:spPr>
           <a:xfrm>
-            <a:off x="14996160" y="30510482"/>
-            <a:ext cx="13898880" cy="1752600"/>
+            <a:off x="12496800" y="25425402"/>
+            <a:ext cx="11582400" cy="1460500"/>
           </a:xfrm>
           <a:prstGeom prst="rect">
             <a:avLst/>
@@ -9562,8 +9482,8 @@
         </p:nvSpPr>
         <p:spPr>
           <a:xfrm>
-            <a:off x="31455360" y="30510482"/>
-            <a:ext cx="10241280" cy="1752600"/>
+            <a:off x="26212800" y="25425402"/>
+            <a:ext cx="8534400" cy="1460500"/>
           </a:xfrm>
           <a:prstGeom prst="rect">
             <a:avLst/>
@@ -9643,20 +9563,12 @@
             </a:lvl9pPr>
           </a:lstStyle>
           <a:p>
-            <a:pPr marL="0" lvl="0" indent="0" algn="r" rtl="0">
-              <a:spcBef>
-                <a:spcPts val="0"/>
-              </a:spcBef>
-              <a:spcAft>
-                <a:spcPts val="0"/>
-              </a:spcAft>
-              <a:buNone/>
-            </a:pPr>
             <a:fld id="{00000000-1234-1234-1234-123412341234}" type="slidenum">
-              <a:rPr lang="en-US"/>
+              <a:rPr lang="en-US" smtClean="0"/>
+              <a:pPr/>
               <a:t>‹#›</a:t>
             </a:fld>
-            <a:endParaRPr/>
+            <a:endParaRPr lang="en-US"/>
           </a:p>
         </p:txBody>
       </p:sp>
@@ -9705,8 +9617,8 @@
         </p:nvSpPr>
         <p:spPr>
           <a:xfrm>
-            <a:off x="2194560" y="1318262"/>
-            <a:ext cx="39502080" cy="5486400"/>
+            <a:off x="1828800" y="1098552"/>
+            <a:ext cx="32918400" cy="4572000"/>
           </a:xfrm>
           <a:prstGeom prst="rect">
             <a:avLst/>
@@ -9850,8 +9762,8 @@
         </p:nvSpPr>
         <p:spPr>
           <a:xfrm>
-            <a:off x="2194560" y="7680963"/>
-            <a:ext cx="39502080" cy="21724622"/>
+            <a:off x="1828800" y="6400802"/>
+            <a:ext cx="32918400" cy="18103852"/>
           </a:xfrm>
           <a:prstGeom prst="rect">
             <a:avLst/>
@@ -10091,8 +10003,8 @@
         </p:nvSpPr>
         <p:spPr>
           <a:xfrm>
-            <a:off x="2194560" y="30510482"/>
-            <a:ext cx="10241280" cy="1752600"/>
+            <a:off x="1828800" y="25425402"/>
+            <a:ext cx="8534400" cy="1460500"/>
           </a:xfrm>
           <a:prstGeom prst="rect">
             <a:avLst/>
@@ -10116,7 +10028,7 @@
               </a:spcAft>
               <a:buSzPts val="1400"/>
               <a:buNone/>
-              <a:defRPr sz="5800" b="0" i="0" u="none" strike="noStrike" cap="none">
+              <a:defRPr sz="4833" b="0" i="0" u="none" strike="noStrike" cap="none">
                 <a:solidFill>
                   <a:srgbClr val="888888"/>
                 </a:solidFill>
@@ -10135,7 +10047,7 @@
               </a:spcAft>
               <a:buSzPts val="1400"/>
               <a:buNone/>
-              <a:defRPr sz="8600" b="0" i="0" u="none" strike="noStrike" cap="none">
+              <a:defRPr sz="7166" b="0" i="0" u="none" strike="noStrike" cap="none">
                 <a:solidFill>
                   <a:schemeClr val="dk1"/>
                 </a:solidFill>
@@ -10154,7 +10066,7 @@
               </a:spcAft>
               <a:buSzPts val="1400"/>
               <a:buNone/>
-              <a:defRPr sz="8600" b="0" i="0" u="none" strike="noStrike" cap="none">
+              <a:defRPr sz="7166" b="0" i="0" u="none" strike="noStrike" cap="none">
                 <a:solidFill>
                   <a:schemeClr val="dk1"/>
                 </a:solidFill>
@@ -10173,7 +10085,7 @@
               </a:spcAft>
               <a:buSzPts val="1400"/>
               <a:buNone/>
-              <a:defRPr sz="8600" b="0" i="0" u="none" strike="noStrike" cap="none">
+              <a:defRPr sz="7166" b="0" i="0" u="none" strike="noStrike" cap="none">
                 <a:solidFill>
                   <a:schemeClr val="dk1"/>
                 </a:solidFill>
@@ -10192,7 +10104,7 @@
               </a:spcAft>
               <a:buSzPts val="1400"/>
               <a:buNone/>
-              <a:defRPr sz="8600" b="0" i="0" u="none" strike="noStrike" cap="none">
+              <a:defRPr sz="7166" b="0" i="0" u="none" strike="noStrike" cap="none">
                 <a:solidFill>
                   <a:schemeClr val="dk1"/>
                 </a:solidFill>
@@ -10211,7 +10123,7 @@
               </a:spcAft>
               <a:buSzPts val="1400"/>
               <a:buNone/>
-              <a:defRPr sz="8600" b="0" i="0" u="none" strike="noStrike" cap="none">
+              <a:defRPr sz="7166" b="0" i="0" u="none" strike="noStrike" cap="none">
                 <a:solidFill>
                   <a:schemeClr val="dk1"/>
                 </a:solidFill>
@@ -10230,7 +10142,7 @@
               </a:spcAft>
               <a:buSzPts val="1400"/>
               <a:buNone/>
-              <a:defRPr sz="8600" b="0" i="0" u="none" strike="noStrike" cap="none">
+              <a:defRPr sz="7166" b="0" i="0" u="none" strike="noStrike" cap="none">
                 <a:solidFill>
                   <a:schemeClr val="dk1"/>
                 </a:solidFill>
@@ -10249,7 +10161,7 @@
               </a:spcAft>
               <a:buSzPts val="1400"/>
               <a:buNone/>
-              <a:defRPr sz="8600" b="0" i="0" u="none" strike="noStrike" cap="none">
+              <a:defRPr sz="7166" b="0" i="0" u="none" strike="noStrike" cap="none">
                 <a:solidFill>
                   <a:schemeClr val="dk1"/>
                 </a:solidFill>
@@ -10268,7 +10180,7 @@
               </a:spcAft>
               <a:buSzPts val="1400"/>
               <a:buNone/>
-              <a:defRPr sz="8600" b="0" i="0" u="none" strike="noStrike" cap="none">
+              <a:defRPr sz="7166" b="0" i="0" u="none" strike="noStrike" cap="none">
                 <a:solidFill>
                   <a:schemeClr val="dk1"/>
                 </a:solidFill>
@@ -10296,8 +10208,8 @@
         </p:nvSpPr>
         <p:spPr>
           <a:xfrm>
-            <a:off x="14996160" y="30510482"/>
-            <a:ext cx="13898880" cy="1752600"/>
+            <a:off x="12496800" y="25425402"/>
+            <a:ext cx="11582400" cy="1460500"/>
           </a:xfrm>
           <a:prstGeom prst="rect">
             <a:avLst/>
@@ -10321,7 +10233,7 @@
               </a:spcAft>
               <a:buSzPts val="1400"/>
               <a:buNone/>
-              <a:defRPr sz="5800" b="0" i="0" u="none" strike="noStrike" cap="none">
+              <a:defRPr sz="4833" b="0" i="0" u="none" strike="noStrike" cap="none">
                 <a:solidFill>
                   <a:srgbClr val="888888"/>
                 </a:solidFill>
@@ -10340,7 +10252,7 @@
               </a:spcAft>
               <a:buSzPts val="1400"/>
               <a:buNone/>
-              <a:defRPr sz="8600" b="0" i="0" u="none" strike="noStrike" cap="none">
+              <a:defRPr sz="7166" b="0" i="0" u="none" strike="noStrike" cap="none">
                 <a:solidFill>
                   <a:schemeClr val="dk1"/>
                 </a:solidFill>
@@ -10359,7 +10271,7 @@
               </a:spcAft>
               <a:buSzPts val="1400"/>
               <a:buNone/>
-              <a:defRPr sz="8600" b="0" i="0" u="none" strike="noStrike" cap="none">
+              <a:defRPr sz="7166" b="0" i="0" u="none" strike="noStrike" cap="none">
                 <a:solidFill>
                   <a:schemeClr val="dk1"/>
                 </a:solidFill>
@@ -10378,7 +10290,7 @@
               </a:spcAft>
               <a:buSzPts val="1400"/>
               <a:buNone/>
-              <a:defRPr sz="8600" b="0" i="0" u="none" strike="noStrike" cap="none">
+              <a:defRPr sz="7166" b="0" i="0" u="none" strike="noStrike" cap="none">
                 <a:solidFill>
                   <a:schemeClr val="dk1"/>
                 </a:solidFill>
@@ -10397,7 +10309,7 @@
               </a:spcAft>
               <a:buSzPts val="1400"/>
               <a:buNone/>
-              <a:defRPr sz="8600" b="0" i="0" u="none" strike="noStrike" cap="none">
+              <a:defRPr sz="7166" b="0" i="0" u="none" strike="noStrike" cap="none">
                 <a:solidFill>
                   <a:schemeClr val="dk1"/>
                 </a:solidFill>
@@ -10416,7 +10328,7 @@
               </a:spcAft>
               <a:buSzPts val="1400"/>
               <a:buNone/>
-              <a:defRPr sz="8600" b="0" i="0" u="none" strike="noStrike" cap="none">
+              <a:defRPr sz="7166" b="0" i="0" u="none" strike="noStrike" cap="none">
                 <a:solidFill>
                   <a:schemeClr val="dk1"/>
                 </a:solidFill>
@@ -10435,7 +10347,7 @@
               </a:spcAft>
               <a:buSzPts val="1400"/>
               <a:buNone/>
-              <a:defRPr sz="8600" b="0" i="0" u="none" strike="noStrike" cap="none">
+              <a:defRPr sz="7166" b="0" i="0" u="none" strike="noStrike" cap="none">
                 <a:solidFill>
                   <a:schemeClr val="dk1"/>
                 </a:solidFill>
@@ -10454,7 +10366,7 @@
               </a:spcAft>
               <a:buSzPts val="1400"/>
               <a:buNone/>
-              <a:defRPr sz="8600" b="0" i="0" u="none" strike="noStrike" cap="none">
+              <a:defRPr sz="7166" b="0" i="0" u="none" strike="noStrike" cap="none">
                 <a:solidFill>
                   <a:schemeClr val="dk1"/>
                 </a:solidFill>
@@ -10473,7 +10385,7 @@
               </a:spcAft>
               <a:buSzPts val="1400"/>
               <a:buNone/>
-              <a:defRPr sz="8600" b="0" i="0" u="none" strike="noStrike" cap="none">
+              <a:defRPr sz="7166" b="0" i="0" u="none" strike="noStrike" cap="none">
                 <a:solidFill>
                   <a:schemeClr val="dk1"/>
                 </a:solidFill>
@@ -10501,8 +10413,8 @@
         </p:nvSpPr>
         <p:spPr>
           <a:xfrm>
-            <a:off x="31455360" y="30510482"/>
-            <a:ext cx="10241280" cy="1752600"/>
+            <a:off x="26212800" y="25425402"/>
+            <a:ext cx="8534400" cy="1460500"/>
           </a:xfrm>
           <a:prstGeom prst="rect">
             <a:avLst/>
@@ -10522,7 +10434,7 @@
                 <a:spcPts val="0"/>
               </a:spcBef>
               <a:buNone/>
-              <a:defRPr sz="5800" b="0" i="0" u="none" strike="noStrike" cap="none">
+              <a:defRPr sz="4833" b="0" i="0" u="none" strike="noStrike" cap="none">
                 <a:solidFill>
                   <a:srgbClr val="888888"/>
                 </a:solidFill>
@@ -10537,7 +10449,7 @@
                 <a:spcPts val="0"/>
               </a:spcBef>
               <a:buNone/>
-              <a:defRPr sz="5800" b="0" i="0" u="none" strike="noStrike" cap="none">
+              <a:defRPr sz="4833" b="0" i="0" u="none" strike="noStrike" cap="none">
                 <a:solidFill>
                   <a:srgbClr val="888888"/>
                 </a:solidFill>
@@ -10552,7 +10464,7 @@
                 <a:spcPts val="0"/>
               </a:spcBef>
               <a:buNone/>
-              <a:defRPr sz="5800" b="0" i="0" u="none" strike="noStrike" cap="none">
+              <a:defRPr sz="4833" b="0" i="0" u="none" strike="noStrike" cap="none">
                 <a:solidFill>
                   <a:srgbClr val="888888"/>
                 </a:solidFill>
@@ -10567,7 +10479,7 @@
                 <a:spcPts val="0"/>
               </a:spcBef>
               <a:buNone/>
-              <a:defRPr sz="5800" b="0" i="0" u="none" strike="noStrike" cap="none">
+              <a:defRPr sz="4833" b="0" i="0" u="none" strike="noStrike" cap="none">
                 <a:solidFill>
                   <a:srgbClr val="888888"/>
                 </a:solidFill>
@@ -10582,7 +10494,7 @@
                 <a:spcPts val="0"/>
               </a:spcBef>
               <a:buNone/>
-              <a:defRPr sz="5800" b="0" i="0" u="none" strike="noStrike" cap="none">
+              <a:defRPr sz="4833" b="0" i="0" u="none" strike="noStrike" cap="none">
                 <a:solidFill>
                   <a:srgbClr val="888888"/>
                 </a:solidFill>
@@ -10597,7 +10509,7 @@
                 <a:spcPts val="0"/>
               </a:spcBef>
               <a:buNone/>
-              <a:defRPr sz="5800" b="0" i="0" u="none" strike="noStrike" cap="none">
+              <a:defRPr sz="4833" b="0" i="0" u="none" strike="noStrike" cap="none">
                 <a:solidFill>
                   <a:srgbClr val="888888"/>
                 </a:solidFill>
@@ -10612,7 +10524,7 @@
                 <a:spcPts val="0"/>
               </a:spcBef>
               <a:buNone/>
-              <a:defRPr sz="5800" b="0" i="0" u="none" strike="noStrike" cap="none">
+              <a:defRPr sz="4833" b="0" i="0" u="none" strike="noStrike" cap="none">
                 <a:solidFill>
                   <a:srgbClr val="888888"/>
                 </a:solidFill>
@@ -10627,7 +10539,7 @@
                 <a:spcPts val="0"/>
               </a:spcBef>
               <a:buNone/>
-              <a:defRPr sz="5800" b="0" i="0" u="none" strike="noStrike" cap="none">
+              <a:defRPr sz="4833" b="0" i="0" u="none" strike="noStrike" cap="none">
                 <a:solidFill>
                   <a:srgbClr val="888888"/>
                 </a:solidFill>
@@ -10642,7 +10554,7 @@
                 <a:spcPts val="0"/>
               </a:spcBef>
               <a:buNone/>
-              <a:defRPr sz="5800" b="0" i="0" u="none" strike="noStrike" cap="none">
+              <a:defRPr sz="4833" b="0" i="0" u="none" strike="noStrike" cap="none">
                 <a:solidFill>
                   <a:srgbClr val="888888"/>
                 </a:solidFill>
@@ -10654,20 +10566,12 @@
             </a:lvl9pPr>
           </a:lstStyle>
           <a:p>
-            <a:pPr marL="0" lvl="0" indent="0" algn="r" rtl="0">
-              <a:spcBef>
-                <a:spcPts val="0"/>
-              </a:spcBef>
-              <a:spcAft>
-                <a:spcPts val="0"/>
-              </a:spcAft>
-              <a:buNone/>
-            </a:pPr>
             <a:fld id="{00000000-1234-1234-1234-123412341234}" type="slidenum">
-              <a:rPr lang="en-US"/>
+              <a:rPr lang="en-US" smtClean="0"/>
+              <a:pPr/>
               <a:t>‹#›</a:t>
             </a:fld>
-            <a:endParaRPr/>
+            <a:endParaRPr lang="en-US"/>
           </a:p>
         </p:txBody>
       </p:sp>
@@ -10715,7 +10619,7 @@
           <a:srgbClr val="000000"/>
         </a:buClr>
         <a:buFont typeface="Arial"/>
-        <a:defRPr sz="1400" b="0" i="0" u="none" strike="noStrike" cap="none">
+        <a:defRPr sz="1167" b="0" i="0" u="none" strike="noStrike" cap="none">
           <a:solidFill>
             <a:srgbClr val="000000"/>
           </a:solidFill>
@@ -10739,7 +10643,7 @@
           <a:srgbClr val="000000"/>
         </a:buClr>
         <a:buFont typeface="Arial"/>
-        <a:defRPr sz="1400" b="0" i="0" u="none" strike="noStrike" cap="none">
+        <a:defRPr sz="1167" b="0" i="0" u="none" strike="noStrike" cap="none">
           <a:solidFill>
             <a:srgbClr val="000000"/>
           </a:solidFill>
@@ -10763,7 +10667,7 @@
           <a:srgbClr val="000000"/>
         </a:buClr>
         <a:buFont typeface="Arial"/>
-        <a:defRPr sz="1400" b="0" i="0" u="none" strike="noStrike" cap="none">
+        <a:defRPr sz="1167" b="0" i="0" u="none" strike="noStrike" cap="none">
           <a:solidFill>
             <a:srgbClr val="000000"/>
           </a:solidFill>
@@ -10787,7 +10691,7 @@
           <a:srgbClr val="000000"/>
         </a:buClr>
         <a:buFont typeface="Arial"/>
-        <a:defRPr sz="1400" b="0" i="0" u="none" strike="noStrike" cap="none">
+        <a:defRPr sz="1167" b="0" i="0" u="none" strike="noStrike" cap="none">
           <a:solidFill>
             <a:srgbClr val="000000"/>
           </a:solidFill>
@@ -10811,7 +10715,7 @@
           <a:srgbClr val="000000"/>
         </a:buClr>
         <a:buFont typeface="Arial"/>
-        <a:defRPr sz="1400" b="0" i="0" u="none" strike="noStrike" cap="none">
+        <a:defRPr sz="1167" b="0" i="0" u="none" strike="noStrike" cap="none">
           <a:solidFill>
             <a:srgbClr val="000000"/>
           </a:solidFill>
@@ -10835,7 +10739,7 @@
           <a:srgbClr val="000000"/>
         </a:buClr>
         <a:buFont typeface="Arial"/>
-        <a:defRPr sz="1400" b="0" i="0" u="none" strike="noStrike" cap="none">
+        <a:defRPr sz="1167" b="0" i="0" u="none" strike="noStrike" cap="none">
           <a:solidFill>
             <a:srgbClr val="000000"/>
           </a:solidFill>
@@ -10859,7 +10763,7 @@
           <a:srgbClr val="000000"/>
         </a:buClr>
         <a:buFont typeface="Arial"/>
-        <a:defRPr sz="1400" b="0" i="0" u="none" strike="noStrike" cap="none">
+        <a:defRPr sz="1167" b="0" i="0" u="none" strike="noStrike" cap="none">
           <a:solidFill>
             <a:srgbClr val="000000"/>
           </a:solidFill>
@@ -10883,7 +10787,7 @@
           <a:srgbClr val="000000"/>
         </a:buClr>
         <a:buFont typeface="Arial"/>
-        <a:defRPr sz="1400" b="0" i="0" u="none" strike="noStrike" cap="none">
+        <a:defRPr sz="1167" b="0" i="0" u="none" strike="noStrike" cap="none">
           <a:solidFill>
             <a:srgbClr val="000000"/>
           </a:solidFill>
@@ -10907,7 +10811,7 @@
           <a:srgbClr val="000000"/>
         </a:buClr>
         <a:buFont typeface="Arial"/>
-        <a:defRPr sz="1400" b="0" i="0" u="none" strike="noStrike" cap="none">
+        <a:defRPr sz="1167" b="0" i="0" u="none" strike="noStrike" cap="none">
           <a:solidFill>
             <a:srgbClr val="000000"/>
           </a:solidFill>
@@ -10944,7 +10848,7 @@
           <a:srgbClr val="000000"/>
         </a:buClr>
         <a:buFont typeface="Arial"/>
-        <a:defRPr sz="1400" b="0" i="0" u="none" strike="noStrike" cap="none">
+        <a:defRPr sz="1167" b="0" i="0" u="none" strike="noStrike" cap="none">
           <a:solidFill>
             <a:srgbClr val="000000"/>
           </a:solidFill>
@@ -10968,7 +10872,7 @@
           <a:srgbClr val="000000"/>
         </a:buClr>
         <a:buFont typeface="Arial"/>
-        <a:defRPr sz="1400" b="0" i="0" u="none" strike="noStrike" cap="none">
+        <a:defRPr sz="1167" b="0" i="0" u="none" strike="noStrike" cap="none">
           <a:solidFill>
             <a:srgbClr val="000000"/>
           </a:solidFill>
@@ -10992,7 +10896,7 @@
           <a:srgbClr val="000000"/>
         </a:buClr>
         <a:buFont typeface="Arial"/>
-        <a:defRPr sz="1400" b="0" i="0" u="none" strike="noStrike" cap="none">
+        <a:defRPr sz="1167" b="0" i="0" u="none" strike="noStrike" cap="none">
           <a:solidFill>
             <a:srgbClr val="000000"/>
           </a:solidFill>
@@ -11016,7 +10920,7 @@
           <a:srgbClr val="000000"/>
         </a:buClr>
         <a:buFont typeface="Arial"/>
-        <a:defRPr sz="1400" b="0" i="0" u="none" strike="noStrike" cap="none">
+        <a:defRPr sz="1167" b="0" i="0" u="none" strike="noStrike" cap="none">
           <a:solidFill>
             <a:srgbClr val="000000"/>
           </a:solidFill>
@@ -11040,7 +10944,7 @@
           <a:srgbClr val="000000"/>
         </a:buClr>
         <a:buFont typeface="Arial"/>
-        <a:defRPr sz="1400" b="0" i="0" u="none" strike="noStrike" cap="none">
+        <a:defRPr sz="1167" b="0" i="0" u="none" strike="noStrike" cap="none">
           <a:solidFill>
             <a:srgbClr val="000000"/>
           </a:solidFill>
@@ -11064,7 +10968,7 @@
           <a:srgbClr val="000000"/>
         </a:buClr>
         <a:buFont typeface="Arial"/>
-        <a:defRPr sz="1400" b="0" i="0" u="none" strike="noStrike" cap="none">
+        <a:defRPr sz="1167" b="0" i="0" u="none" strike="noStrike" cap="none">
           <a:solidFill>
             <a:srgbClr val="000000"/>
           </a:solidFill>
@@ -11088,7 +10992,7 @@
           <a:srgbClr val="000000"/>
         </a:buClr>
         <a:buFont typeface="Arial"/>
-        <a:defRPr sz="1400" b="0" i="0" u="none" strike="noStrike" cap="none">
+        <a:defRPr sz="1167" b="0" i="0" u="none" strike="noStrike" cap="none">
           <a:solidFill>
             <a:srgbClr val="000000"/>
           </a:solidFill>
@@ -11112,7 +11016,7 @@
           <a:srgbClr val="000000"/>
         </a:buClr>
         <a:buFont typeface="Arial"/>
-        <a:defRPr sz="1400" b="0" i="0" u="none" strike="noStrike" cap="none">
+        <a:defRPr sz="1167" b="0" i="0" u="none" strike="noStrike" cap="none">
           <a:solidFill>
             <a:srgbClr val="000000"/>
           </a:solidFill>
@@ -11136,7 +11040,7 @@
           <a:srgbClr val="000000"/>
         </a:buClr>
         <a:buFont typeface="Arial"/>
-        <a:defRPr sz="1400" b="0" i="0" u="none" strike="noStrike" cap="none">
+        <a:defRPr sz="1167" b="0" i="0" u="none" strike="noStrike" cap="none">
           <a:solidFill>
             <a:srgbClr val="000000"/>
           </a:solidFill>
@@ -11173,7 +11077,7 @@
           <a:srgbClr val="000000"/>
         </a:buClr>
         <a:buFont typeface="Arial"/>
-        <a:defRPr sz="1400" b="0" i="0" u="none" strike="noStrike" cap="none">
+        <a:defRPr sz="1167" b="0" i="0" u="none" strike="noStrike" cap="none">
           <a:solidFill>
             <a:srgbClr val="000000"/>
           </a:solidFill>
@@ -11197,7 +11101,7 @@
           <a:srgbClr val="000000"/>
         </a:buClr>
         <a:buFont typeface="Arial"/>
-        <a:defRPr sz="1400" b="0" i="0" u="none" strike="noStrike" cap="none">
+        <a:defRPr sz="1167" b="0" i="0" u="none" strike="noStrike" cap="none">
           <a:solidFill>
             <a:srgbClr val="000000"/>
           </a:solidFill>
@@ -11221,7 +11125,7 @@
           <a:srgbClr val="000000"/>
         </a:buClr>
         <a:buFont typeface="Arial"/>
-        <a:defRPr sz="1400" b="0" i="0" u="none" strike="noStrike" cap="none">
+        <a:defRPr sz="1167" b="0" i="0" u="none" strike="noStrike" cap="none">
           <a:solidFill>
             <a:srgbClr val="000000"/>
           </a:solidFill>
@@ -11245,7 +11149,7 @@
           <a:srgbClr val="000000"/>
         </a:buClr>
         <a:buFont typeface="Arial"/>
-        <a:defRPr sz="1400" b="0" i="0" u="none" strike="noStrike" cap="none">
+        <a:defRPr sz="1167" b="0" i="0" u="none" strike="noStrike" cap="none">
           <a:solidFill>
             <a:srgbClr val="000000"/>
           </a:solidFill>
@@ -11269,7 +11173,7 @@
           <a:srgbClr val="000000"/>
         </a:buClr>
         <a:buFont typeface="Arial"/>
-        <a:defRPr sz="1400" b="0" i="0" u="none" strike="noStrike" cap="none">
+        <a:defRPr sz="1167" b="0" i="0" u="none" strike="noStrike" cap="none">
           <a:solidFill>
             <a:srgbClr val="000000"/>
           </a:solidFill>
@@ -11293,7 +11197,7 @@
           <a:srgbClr val="000000"/>
         </a:buClr>
         <a:buFont typeface="Arial"/>
-        <a:defRPr sz="1400" b="0" i="0" u="none" strike="noStrike" cap="none">
+        <a:defRPr sz="1167" b="0" i="0" u="none" strike="noStrike" cap="none">
           <a:solidFill>
             <a:srgbClr val="000000"/>
           </a:solidFill>
@@ -11317,7 +11221,7 @@
           <a:srgbClr val="000000"/>
         </a:buClr>
         <a:buFont typeface="Arial"/>
-        <a:defRPr sz="1400" b="0" i="0" u="none" strike="noStrike" cap="none">
+        <a:defRPr sz="1167" b="0" i="0" u="none" strike="noStrike" cap="none">
           <a:solidFill>
             <a:srgbClr val="000000"/>
           </a:solidFill>
@@ -11341,7 +11245,7 @@
           <a:srgbClr val="000000"/>
         </a:buClr>
         <a:buFont typeface="Arial"/>
-        <a:defRPr sz="1400" b="0" i="0" u="none" strike="noStrike" cap="none">
+        <a:defRPr sz="1167" b="0" i="0" u="none" strike="noStrike" cap="none">
           <a:solidFill>
             <a:srgbClr val="000000"/>
           </a:solidFill>
@@ -11365,7 +11269,7 @@
           <a:srgbClr val="000000"/>
         </a:buClr>
         <a:buFont typeface="Arial"/>
-        <a:defRPr sz="1400" b="0" i="0" u="none" strike="noStrike" cap="none">
+        <a:defRPr sz="1167" b="0" i="0" u="none" strike="noStrike" cap="none">
           <a:solidFill>
             <a:srgbClr val="000000"/>
           </a:solidFill>
@@ -11415,8 +11319,8 @@
         </p:nvSpPr>
         <p:spPr>
           <a:xfrm>
-            <a:off x="15062225" y="5693700"/>
-            <a:ext cx="13738800" cy="26291400"/>
+            <a:off x="12551854" y="4744750"/>
+            <a:ext cx="11449000" cy="21909500"/>
           </a:xfrm>
           <a:prstGeom prst="rect">
             <a:avLst/>
@@ -11435,21 +11339,12 @@
           </a:ln>
         </p:spPr>
         <p:txBody>
-          <a:bodyPr spcFirstLastPara="1" wrap="square" lIns="91425" tIns="91425" rIns="91425" bIns="91425" anchor="ctr" anchorCtr="0">
+          <a:bodyPr spcFirstLastPara="1" wrap="square" lIns="76188" tIns="76188" rIns="76188" bIns="76188" anchor="ctr" anchorCtr="0">
             <a:noAutofit/>
           </a:bodyPr>
           <a:lstStyle/>
           <a:p>
-            <a:pPr marL="0" lvl="0" indent="0" algn="l" rtl="0">
-              <a:spcBef>
-                <a:spcPts val="0"/>
-              </a:spcBef>
-              <a:spcAft>
-                <a:spcPts val="0"/>
-              </a:spcAft>
-              <a:buNone/>
-            </a:pPr>
-            <a:endParaRPr/>
+            <a:endParaRPr sz="972"/>
           </a:p>
         </p:txBody>
       </p:sp>
@@ -11461,8 +11356,8 @@
         </p:nvSpPr>
         <p:spPr>
           <a:xfrm>
-            <a:off x="914400" y="5486400"/>
-            <a:ext cx="13716000" cy="914400"/>
+            <a:off x="762000" y="4572000"/>
+            <a:ext cx="11430000" cy="762000"/>
           </a:xfrm>
           <a:prstGeom prst="rect">
             <a:avLst/>
@@ -11473,22 +11368,13 @@
           </a:ln>
         </p:spPr>
         <p:txBody>
-          <a:bodyPr spcFirstLastPara="1" wrap="square" lIns="91425" tIns="91440" rIns="91425" bIns="91440" anchor="t" anchorCtr="0">
+          <a:bodyPr spcFirstLastPara="1" wrap="square" lIns="76188" tIns="76200" rIns="76188" bIns="76200" anchor="t" anchorCtr="0">
             <a:noAutofit/>
           </a:bodyPr>
           <a:lstStyle/>
           <a:p>
-            <a:pPr marL="0" marR="0" lvl="0" indent="0" algn="l" rtl="0">
-              <a:spcBef>
-                <a:spcPts val="0"/>
-              </a:spcBef>
-              <a:spcAft>
-                <a:spcPts val="0"/>
-              </a:spcAft>
-              <a:buNone/>
-            </a:pPr>
             <a:r>
-              <a:rPr lang="en-US" sz="5200" b="1" dirty="0">
+              <a:rPr lang="en-US" sz="4333" b="1" dirty="0">
                 <a:solidFill>
                   <a:srgbClr val="595959"/>
                 </a:solidFill>
@@ -11499,7 +11385,7 @@
               </a:rPr>
               <a:t>ABSTRACT</a:t>
             </a:r>
-            <a:endParaRPr sz="5200" dirty="0">
+            <a:endParaRPr sz="4333" dirty="0">
               <a:solidFill>
                 <a:srgbClr val="595959"/>
               </a:solidFill>
@@ -11519,8 +11405,8 @@
         </p:nvSpPr>
         <p:spPr>
           <a:xfrm>
-            <a:off x="29307459" y="5932750"/>
-            <a:ext cx="12937500" cy="914400"/>
+            <a:off x="24422883" y="4943958"/>
+            <a:ext cx="10781250" cy="762000"/>
           </a:xfrm>
           <a:prstGeom prst="rect">
             <a:avLst/>
@@ -11531,22 +11417,13 @@
           </a:ln>
         </p:spPr>
         <p:txBody>
-          <a:bodyPr spcFirstLastPara="1" wrap="square" lIns="91425" tIns="45700" rIns="91425" bIns="45700" anchor="t" anchorCtr="0">
+          <a:bodyPr spcFirstLastPara="1" wrap="square" lIns="76188" tIns="38083" rIns="76188" bIns="38083" anchor="t" anchorCtr="0">
             <a:noAutofit/>
           </a:bodyPr>
           <a:lstStyle/>
           <a:p>
-            <a:pPr marL="0" marR="0" lvl="0" indent="0" algn="l" rtl="0">
-              <a:spcBef>
-                <a:spcPts val="0"/>
-              </a:spcBef>
-              <a:spcAft>
-                <a:spcPts val="0"/>
-              </a:spcAft>
-              <a:buNone/>
-            </a:pPr>
             <a:r>
-              <a:rPr lang="en-US" sz="5200" b="1" dirty="0">
+              <a:rPr lang="en-US" sz="4333" b="1" dirty="0">
                 <a:solidFill>
                   <a:srgbClr val="595959"/>
                 </a:solidFill>
@@ -11557,7 +11434,7 @@
               </a:rPr>
               <a:t>RESULTS AND DISCUSSION</a:t>
             </a:r>
-            <a:endParaRPr sz="5200" b="1" dirty="0">
+            <a:endParaRPr sz="4333" b="1" dirty="0">
               <a:solidFill>
                 <a:srgbClr val="595959"/>
               </a:solidFill>
@@ -11568,16 +11445,7 @@
             </a:endParaRPr>
           </a:p>
           <a:p>
-            <a:pPr marL="0" marR="0" lvl="0" indent="0" algn="l" rtl="0">
-              <a:spcBef>
-                <a:spcPts val="0"/>
-              </a:spcBef>
-              <a:spcAft>
-                <a:spcPts val="0"/>
-              </a:spcAft>
-              <a:buNone/>
-            </a:pPr>
-            <a:endParaRPr sz="5200" b="1" dirty="0">
+            <a:endParaRPr sz="4333" b="1" dirty="0">
               <a:solidFill>
                 <a:srgbClr val="595959"/>
               </a:solidFill>
@@ -11593,8 +11461,8 @@
         </p:nvSpPr>
         <p:spPr>
           <a:xfrm>
-            <a:off x="29307459" y="25628043"/>
-            <a:ext cx="12937500" cy="914400"/>
+            <a:off x="24422883" y="19850647"/>
+            <a:ext cx="5496869" cy="2202687"/>
           </a:xfrm>
           <a:prstGeom prst="rect">
             <a:avLst/>
@@ -11605,22 +11473,13 @@
           </a:ln>
         </p:spPr>
         <p:txBody>
-          <a:bodyPr spcFirstLastPara="1" wrap="square" lIns="91425" tIns="45700" rIns="91425" bIns="45700" anchor="t" anchorCtr="0">
+          <a:bodyPr spcFirstLastPara="1" wrap="square" lIns="76188" tIns="38083" rIns="76188" bIns="38083" anchor="t" anchorCtr="0">
             <a:noAutofit/>
           </a:bodyPr>
           <a:lstStyle/>
           <a:p>
-            <a:pPr marL="0" marR="0" lvl="0" indent="0" algn="l" rtl="0">
-              <a:spcBef>
-                <a:spcPts val="0"/>
-              </a:spcBef>
-              <a:spcAft>
-                <a:spcPts val="0"/>
-              </a:spcAft>
-              <a:buNone/>
-            </a:pPr>
             <a:r>
-              <a:rPr lang="en-US" sz="5200" b="1" dirty="0">
+              <a:rPr lang="en-US" sz="4333" b="1" dirty="0">
                 <a:solidFill>
                   <a:srgbClr val="595959"/>
                 </a:solidFill>
@@ -11629,9 +11488,55 @@
                 <a:cs typeface="Calibri"/>
                 <a:sym typeface="Calibri"/>
               </a:rPr>
-              <a:t>CONCLUSIONS AND FURTHER RESEARCH</a:t>
+              <a:t>CONCLUSIONS </a:t>
             </a:r>
-            <a:endParaRPr sz="5200" dirty="0">
+            <a:br>
+              <a:rPr lang="en-US" sz="4333" b="1" dirty="0">
+                <a:solidFill>
+                  <a:srgbClr val="595959"/>
+                </a:solidFill>
+                <a:latin typeface="Calibri"/>
+                <a:ea typeface="Calibri"/>
+                <a:cs typeface="Calibri"/>
+                <a:sym typeface="Calibri"/>
+              </a:rPr>
+            </a:br>
+            <a:r>
+              <a:rPr lang="en-US" sz="4333" b="1" dirty="0">
+                <a:solidFill>
+                  <a:srgbClr val="595959"/>
+                </a:solidFill>
+                <a:latin typeface="Calibri"/>
+                <a:ea typeface="Calibri"/>
+                <a:cs typeface="Calibri"/>
+                <a:sym typeface="Calibri"/>
+              </a:rPr>
+              <a:t>AND FURTHER </a:t>
+            </a:r>
+            <a:br>
+              <a:rPr lang="en-US" sz="4333" b="1" dirty="0">
+                <a:solidFill>
+                  <a:srgbClr val="595959"/>
+                </a:solidFill>
+                <a:latin typeface="Calibri"/>
+                <a:ea typeface="Calibri"/>
+                <a:cs typeface="Calibri"/>
+                <a:sym typeface="Calibri"/>
+              </a:rPr>
+            </a:br>
+            <a:r>
+              <a:rPr lang="en-US" sz="4333" b="1" dirty="0">
+                <a:solidFill>
+                  <a:srgbClr val="595959"/>
+                </a:solidFill>
+                <a:latin typeface="Calibri"/>
+                <a:ea typeface="Calibri"/>
+                <a:cs typeface="Calibri"/>
+                <a:sym typeface="Calibri"/>
+              </a:rPr>
+              <a:t>RESEARCH</a:t>
+            </a:r>
+            <a:endParaRPr sz="4333" dirty="0">
               <a:solidFill>
                 <a:srgbClr val="595959"/>
               </a:solidFill>
@@ -11651,8 +11556,8 @@
         </p:nvSpPr>
         <p:spPr>
           <a:xfrm>
-            <a:off x="28962825" y="26464000"/>
-            <a:ext cx="13738800" cy="1154132"/>
+            <a:off x="24135688" y="22053334"/>
+            <a:ext cx="11449000" cy="961777"/>
           </a:xfrm>
           <a:prstGeom prst="rect">
             <a:avLst/>
@@ -11663,22 +11568,14 @@
           </a:ln>
         </p:spPr>
         <p:txBody>
-          <a:bodyPr spcFirstLastPara="1" wrap="square" lIns="457200" tIns="274300" rIns="457200" bIns="365750" anchor="t" anchorCtr="0">
+          <a:bodyPr spcFirstLastPara="1" wrap="square" lIns="381000" tIns="228583" rIns="381000" bIns="304792" anchor="t" anchorCtr="0">
             <a:spAutoFit/>
           </a:bodyPr>
           <a:lstStyle/>
           <a:p>
-            <a:pPr marL="0" marR="0" lvl="0" indent="0" algn="just" rtl="0">
-              <a:spcBef>
-                <a:spcPts val="0"/>
-              </a:spcBef>
-              <a:spcAft>
-                <a:spcPts val="0"/>
-              </a:spcAft>
-              <a:buNone/>
-            </a:pPr>
+            <a:pPr algn="just"/>
             <a:r>
-              <a:rPr lang="en-US" sz="3300" dirty="0">
+              <a:rPr lang="en-US" sz="2750" dirty="0">
                 <a:solidFill>
                   <a:schemeClr val="dk1"/>
                 </a:solidFill>
@@ -11689,7 +11586,7 @@
               </a:rPr>
               <a:t>[TEXT HERE]</a:t>
             </a:r>
-            <a:endParaRPr sz="3300" dirty="0">
+            <a:endParaRPr sz="2750" dirty="0">
               <a:solidFill>
                 <a:schemeClr val="dk1"/>
               </a:solidFill>
@@ -11709,8 +11606,8 @@
         </p:nvSpPr>
         <p:spPr>
           <a:xfrm>
-            <a:off x="28917200" y="28913500"/>
-            <a:ext cx="9638400" cy="1708130"/>
+            <a:off x="24058472" y="24280243"/>
+            <a:ext cx="8032000" cy="1423441"/>
           </a:xfrm>
           <a:prstGeom prst="rect">
             <a:avLst/>
@@ -11721,22 +11618,13 @@
           </a:ln>
         </p:spPr>
         <p:txBody>
-          <a:bodyPr spcFirstLastPara="1" wrap="square" lIns="457200" tIns="274300" rIns="457200" bIns="365750" anchor="t" anchorCtr="0">
+          <a:bodyPr spcFirstLastPara="1" wrap="square" lIns="381000" tIns="228583" rIns="381000" bIns="304792" anchor="t" anchorCtr="0">
             <a:spAutoFit/>
           </a:bodyPr>
           <a:lstStyle/>
           <a:p>
-            <a:pPr marL="0" marR="0" lvl="0" indent="0" algn="l" rtl="0">
-              <a:spcBef>
-                <a:spcPts val="0"/>
-              </a:spcBef>
-              <a:spcAft>
-                <a:spcPts val="0"/>
-              </a:spcAft>
-              <a:buNone/>
-            </a:pPr>
             <a:r>
-              <a:rPr lang="en-US" sz="4100" b="1" i="1" u="none" strike="noStrike" cap="none" dirty="0">
+              <a:rPr lang="en-US" sz="3417" b="1" i="1" dirty="0">
                 <a:solidFill>
                   <a:srgbClr val="A0B7C1"/>
                 </a:solidFill>
@@ -11745,21 +11633,9 @@
                 <a:cs typeface="Calibri"/>
                 <a:sym typeface="Calibri"/>
               </a:rPr>
-              <a:t>A</a:t>
+              <a:t>ACKNOWLEDGMENTS</a:t>
             </a:r>
-            <a:r>
-              <a:rPr lang="en-US" sz="4100" b="1" i="1" dirty="0">
-                <a:solidFill>
-                  <a:srgbClr val="A0B7C1"/>
-                </a:solidFill>
-                <a:latin typeface="Calibri"/>
-                <a:ea typeface="Calibri"/>
-                <a:cs typeface="Calibri"/>
-                <a:sym typeface="Calibri"/>
-              </a:rPr>
-              <a:t>CKNOWLEDGMENTS</a:t>
-            </a:r>
-            <a:endParaRPr sz="1700" dirty="0">
+            <a:endParaRPr sz="1417" dirty="0">
               <a:solidFill>
                 <a:srgbClr val="A0B7C1"/>
               </a:solidFill>
@@ -11770,17 +11646,9 @@
             </a:endParaRPr>
           </a:p>
           <a:p>
-            <a:pPr marL="0" marR="0" lvl="0" indent="0" algn="just" rtl="0">
-              <a:spcBef>
-                <a:spcPts val="0"/>
-              </a:spcBef>
-              <a:spcAft>
-                <a:spcPts val="0"/>
-              </a:spcAft>
-              <a:buNone/>
-            </a:pPr>
+            <a:pPr algn="just"/>
             <a:r>
-              <a:rPr lang="en-US" sz="2800" i="1" dirty="0">
+              <a:rPr lang="en-US" sz="2333" i="1" dirty="0">
                 <a:solidFill>
                   <a:schemeClr val="dk1"/>
                 </a:solidFill>
@@ -11791,7 +11659,7 @@
               </a:rPr>
               <a:t>[TEXT HERE]</a:t>
             </a:r>
-            <a:endParaRPr sz="2900" b="1" i="1" dirty="0">
+            <a:endParaRPr sz="2417" b="1" i="1" dirty="0">
               <a:solidFill>
                 <a:schemeClr val="dk1"/>
               </a:solidFill>
@@ -11813,8 +11681,8 @@
         </p:nvSpPr>
         <p:spPr>
           <a:xfrm>
-            <a:off x="914400" y="914400"/>
-            <a:ext cx="42062400" cy="4062610"/>
+            <a:off x="762000" y="762000"/>
+            <a:ext cx="35052000" cy="3385251"/>
           </a:xfrm>
           <a:prstGeom prst="rect">
             <a:avLst/>
@@ -11827,21 +11695,13 @@
           </a:ln>
         </p:spPr>
         <p:txBody>
-          <a:bodyPr spcFirstLastPara="1" wrap="square" lIns="91425" tIns="45700" rIns="91425" bIns="45700" anchor="t" anchorCtr="0">
+          <a:bodyPr spcFirstLastPara="1" wrap="square" lIns="76188" tIns="38083" rIns="76188" bIns="38083" anchor="t" anchorCtr="0">
             <a:spAutoFit/>
           </a:bodyPr>
           <a:lstStyle/>
           <a:p>
-            <a:pPr marL="0" marR="0" lvl="0" indent="0" algn="ctr" rtl="0">
-              <a:spcBef>
-                <a:spcPts val="0"/>
-              </a:spcBef>
-              <a:spcAft>
-                <a:spcPts val="0"/>
-              </a:spcAft>
-              <a:buNone/>
-            </a:pPr>
-            <a:endParaRPr sz="2400" b="1" dirty="0">
+            <a:pPr algn="ctr"/>
+            <a:endParaRPr sz="2000" b="1" dirty="0">
               <a:solidFill>
                 <a:schemeClr val="dk1"/>
               </a:solidFill>
@@ -11852,17 +11712,9 @@
             </a:endParaRPr>
           </a:p>
           <a:p>
-            <a:pPr marL="0" marR="0" lvl="0" indent="0" algn="ctr" rtl="0">
-              <a:spcBef>
-                <a:spcPts val="0"/>
-              </a:spcBef>
-              <a:spcAft>
-                <a:spcPts val="0"/>
-              </a:spcAft>
-              <a:buNone/>
-            </a:pPr>
+            <a:pPr algn="ctr"/>
             <a:r>
-              <a:rPr lang="en-US" sz="7000" b="1" i="1" dirty="0">
+              <a:rPr lang="en-US" sz="5833" b="1" i="1" dirty="0">
                 <a:solidFill>
                   <a:schemeClr val="dk1"/>
                 </a:solidFill>
@@ -11874,7 +11726,7 @@
               <a:t>Breathe Providence</a:t>
             </a:r>
             <a:r>
-              <a:rPr lang="en-US" sz="7000" b="1" dirty="0">
+              <a:rPr lang="en-US" sz="5833" b="1" dirty="0">
                 <a:solidFill>
                   <a:schemeClr val="dk1"/>
                 </a:solidFill>
@@ -11886,7 +11738,7 @@
               <a:t>: Towards a Distributed Method for </a:t>
             </a:r>
             <a:br>
-              <a:rPr lang="en-US" sz="7000" b="1" dirty="0">
+              <a:rPr lang="en-US" sz="5833" b="1" dirty="0">
                 <a:solidFill>
                   <a:schemeClr val="dk1"/>
                 </a:solidFill>
@@ -11897,7 +11749,7 @@
               </a:rPr>
             </a:br>
             <a:r>
-              <a:rPr lang="en-US" sz="7000" b="1" dirty="0">
+              <a:rPr lang="en-US" sz="5833" b="1" dirty="0">
                 <a:solidFill>
                   <a:schemeClr val="dk1"/>
                 </a:solidFill>
@@ -11908,7 +11760,7 @@
               </a:rPr>
               <a:t>Quantifying the Reliability of Low-Cost Air Quality Sensors</a:t>
             </a:r>
-            <a:endParaRPr sz="7000" dirty="0">
+            <a:endParaRPr sz="5833" dirty="0">
               <a:solidFill>
                 <a:schemeClr val="dk1"/>
               </a:solidFill>
@@ -11919,17 +11771,13 @@
             </a:endParaRPr>
           </a:p>
           <a:p>
-            <a:pPr marL="0" marR="0" lvl="0" indent="0" algn="ctr" rtl="0">
-              <a:spcBef>
-                <a:spcPts val="1200"/>
-              </a:spcBef>
-              <a:spcAft>
-                <a:spcPts val="0"/>
-              </a:spcAft>
-              <a:buNone/>
+            <a:pPr algn="ctr">
+              <a:spcBef>
+                <a:spcPts val="1000"/>
+              </a:spcBef>
             </a:pPr>
             <a:r>
-              <a:rPr lang="en-US" sz="5900" b="1" dirty="0">
+              <a:rPr lang="en-US" sz="4916" b="1" dirty="0">
                 <a:solidFill>
                   <a:srgbClr val="595959"/>
                 </a:solidFill>
@@ -11940,7 +11788,7 @@
               </a:rPr>
               <a:t>Mike Woodilla — Advisor: Professor Meredith Hastings</a:t>
             </a:r>
-            <a:endParaRPr sz="3000" dirty="0">
+            <a:endParaRPr sz="2500" dirty="0">
               <a:solidFill>
                 <a:schemeClr val="dk1"/>
               </a:solidFill>
@@ -11951,16 +11799,12 @@
             </a:endParaRPr>
           </a:p>
           <a:p>
-            <a:pPr marL="0" marR="0" lvl="0" indent="0" algn="ctr" rtl="0">
-              <a:spcBef>
-                <a:spcPts val="1200"/>
-              </a:spcBef>
-              <a:spcAft>
-                <a:spcPts val="0"/>
-              </a:spcAft>
-              <a:buNone/>
+            <a:pPr algn="ctr">
+              <a:spcBef>
+                <a:spcPts val="1000"/>
+              </a:spcBef>
             </a:pPr>
-            <a:endParaRPr sz="1500" dirty="0">
+            <a:endParaRPr sz="1250" dirty="0">
               <a:solidFill>
                 <a:schemeClr val="dk1"/>
               </a:solidFill>
@@ -11989,8 +11833,8 @@
         </p:blipFill>
         <p:spPr>
           <a:xfrm>
-            <a:off x="1828800" y="1554480"/>
-            <a:ext cx="7132320" cy="2743200"/>
+            <a:off x="1524000" y="1295400"/>
+            <a:ext cx="5943600" cy="2286000"/>
           </a:xfrm>
           <a:prstGeom prst="rect">
             <a:avLst/>
@@ -12009,8 +11853,8 @@
         </p:nvSpPr>
         <p:spPr>
           <a:xfrm>
-            <a:off x="914400" y="6309360"/>
-            <a:ext cx="13716000" cy="15727382"/>
+            <a:off x="762000" y="5257800"/>
+            <a:ext cx="11430000" cy="13106152"/>
           </a:xfrm>
           <a:prstGeom prst="rect">
             <a:avLst/>
@@ -12021,24 +11865,22 @@
           </a:ln>
         </p:spPr>
         <p:txBody>
-          <a:bodyPr spcFirstLastPara="1" wrap="square" lIns="91440" tIns="91440" rIns="91440" bIns="91440" anchor="t" anchorCtr="0">
+          <a:bodyPr spcFirstLastPara="1" wrap="square" lIns="76200" tIns="76200" rIns="76200" bIns="76200" anchor="t" anchorCtr="0">
             <a:spAutoFit/>
           </a:bodyPr>
           <a:lstStyle/>
           <a:p>
-            <a:pPr marL="0" lvl="0" indent="0" algn="just" rtl="0">
-              <a:spcAft>
-                <a:spcPts val="1200"/>
+            <a:pPr algn="just">
+              <a:spcAft>
+                <a:spcPts val="1000"/>
               </a:spcAft>
               <a:buClr>
                 <a:schemeClr val="dk1"/>
               </a:buClr>
               <a:buSzPts val="1100"/>
-              <a:buFont typeface="Arial"/>
-              <a:buNone/>
             </a:pPr>
             <a:r>
-              <a:rPr lang="en-US" sz="3300" dirty="0">
+              <a:rPr lang="en-US" sz="2750" dirty="0">
                 <a:latin typeface="Calibri"/>
                 <a:ea typeface="Calibri"/>
                 <a:cs typeface="Calibri"/>
@@ -12047,7 +11889,7 @@
               <a:t>Low-cost sensors for measuring common air pollutants have made urban air quality research possible at high spatial and temporal resolution. This high-resolution data can be used to identify air quality events and trends at scales that are impractical for expensive reference-grade instruments to measure, however calibration of low-cost sensors remains challenging. Sensor applications in large distributed air quality monitoring networks further complicate calibration needs – laboratory calibration has been shown to translate poorly after sensor deployment and requires downtime for every sensor in the network, and in situ gas calibration requires frequent site visits to account for seasonal interferences to sensor measurements. </a:t>
             </a:r>
             <a:r>
-              <a:rPr lang="en-US" sz="3300" dirty="0" err="1">
+              <a:rPr lang="en-US" sz="2750" dirty="0" err="1">
                 <a:latin typeface="Calibri"/>
                 <a:ea typeface="Calibri"/>
                 <a:cs typeface="Calibri"/>
@@ -12056,7 +11898,7 @@
               <a:t>Alphasense</a:t>
             </a:r>
             <a:r>
-              <a:rPr lang="en-US" sz="3300" dirty="0">
+              <a:rPr lang="en-US" sz="2750" dirty="0">
                 <a:latin typeface="Calibri"/>
                 <a:ea typeface="Calibri"/>
                 <a:cs typeface="Calibri"/>
@@ -12066,19 +11908,17 @@
             </a:r>
           </a:p>
           <a:p>
-            <a:pPr marL="0" lvl="0" indent="0" algn="just" rtl="0">
-              <a:spcAft>
-                <a:spcPts val="1200"/>
+            <a:pPr algn="just">
+              <a:spcAft>
+                <a:spcPts val="1000"/>
               </a:spcAft>
               <a:buClr>
                 <a:schemeClr val="dk1"/>
               </a:buClr>
               <a:buSzPts val="1100"/>
-              <a:buFont typeface="Arial"/>
-              <a:buNone/>
             </a:pPr>
             <a:r>
-              <a:rPr lang="en-US" sz="3300" dirty="0">
+              <a:rPr lang="en-US" sz="2750" dirty="0">
                 <a:latin typeface="Calibri"/>
                 <a:ea typeface="Calibri"/>
                 <a:cs typeface="Calibri"/>
@@ -12087,7 +11927,7 @@
               <a:t>This project seeks to characterize the reliability of carbon monoxide sensors in the Breathe Providence air quality monitoring network using distributed methods. Existing methods rely extensively on simultaneous reference observations and residual statistics, however availability of reference data from Environmental Protection Agency monitoring stations is limited in the City of Providence. Therefore, in addition to calculating residual statistics, the probability density function (PDF) of measurement and reference observations is approximated for each month since sensor deployment. When reference‑grade observations are not available, the first operating year of sensor data is treated as reference. </a:t>
             </a:r>
             <a:r>
-              <a:rPr lang="en-US" sz="3300" i="1" dirty="0">
+              <a:rPr lang="en-US" sz="2750" i="1" dirty="0">
                 <a:latin typeface="Calibri"/>
                 <a:ea typeface="Calibri"/>
                 <a:cs typeface="Calibri"/>
@@ -12096,7 +11936,7 @@
               <a:t>F</a:t>
             </a:r>
             <a:r>
-              <a:rPr lang="en-US" sz="3300" dirty="0">
+              <a:rPr lang="en-US" sz="2750" dirty="0">
                 <a:latin typeface="Calibri"/>
                 <a:ea typeface="Calibri"/>
                 <a:cs typeface="Calibri"/>
@@ -12115,8 +11955,8 @@
         </p:nvSpPr>
         <p:spPr>
           <a:xfrm>
-            <a:off x="914400" y="27066240"/>
-            <a:ext cx="13716000" cy="4139564"/>
+            <a:off x="784925" y="23015111"/>
+            <a:ext cx="11430000" cy="3450087"/>
           </a:xfrm>
           <a:prstGeom prst="rect">
             <a:avLst/>
@@ -12127,23 +11967,17 @@
           </a:ln>
         </p:spPr>
         <p:txBody>
-          <a:bodyPr spcFirstLastPara="1" wrap="square" lIns="91425" tIns="91425" rIns="91425" bIns="91425" anchor="t" anchorCtr="0">
+          <a:bodyPr spcFirstLastPara="1" wrap="square" lIns="76188" tIns="76188" rIns="76188" bIns="76188" anchor="t" anchorCtr="0">
             <a:spAutoFit/>
           </a:bodyPr>
           <a:lstStyle/>
           <a:p>
-            <a:pPr marL="457200" lvl="0" indent="-457200" algn="just" rtl="0">
-              <a:spcBef>
-                <a:spcPts val="0"/>
-              </a:spcBef>
-              <a:spcAft>
-                <a:spcPts val="0"/>
-              </a:spcAft>
+            <a:pPr marL="380985" indent="-380985" algn="just">
               <a:buFont typeface="Arial" panose="020B0604020202020204" pitchFamily="34" charset="0"/>
               <a:buChar char="•"/>
             </a:pPr>
             <a:r>
-              <a:rPr lang="en-US" sz="3200" dirty="0">
+              <a:rPr lang="en-US" sz="2667" dirty="0">
                 <a:solidFill>
                   <a:schemeClr val="dk1"/>
                 </a:solidFill>
@@ -12156,18 +11990,12 @@
             </a:r>
           </a:p>
           <a:p>
-            <a:pPr marL="457200" lvl="0" indent="-457200" algn="just" rtl="0">
-              <a:spcBef>
-                <a:spcPts val="0"/>
-              </a:spcBef>
-              <a:spcAft>
-                <a:spcPts val="0"/>
-              </a:spcAft>
+            <a:pPr marL="380985" indent="-380985" algn="just">
               <a:buFont typeface="Arial" panose="020B0604020202020204" pitchFamily="34" charset="0"/>
               <a:buChar char="•"/>
             </a:pPr>
             <a:r>
-              <a:rPr lang="en-US" sz="3200" dirty="0">
+              <a:rPr lang="en-US" sz="2667" dirty="0">
                 <a:solidFill>
                   <a:schemeClr val="dk1"/>
                 </a:solidFill>
@@ -12180,18 +12008,12 @@
             </a:r>
           </a:p>
           <a:p>
-            <a:pPr marL="457200" lvl="0" indent="-457200" algn="just" rtl="0">
-              <a:spcBef>
-                <a:spcPts val="0"/>
-              </a:spcBef>
-              <a:spcAft>
-                <a:spcPts val="0"/>
-              </a:spcAft>
+            <a:pPr marL="380985" indent="-380985" algn="just">
               <a:buFont typeface="Arial" panose="020B0604020202020204" pitchFamily="34" charset="0"/>
               <a:buChar char="•"/>
             </a:pPr>
             <a:r>
-              <a:rPr lang="en-US" sz="3200" dirty="0">
+              <a:rPr lang="en-US" sz="2667" dirty="0">
                 <a:solidFill>
                   <a:schemeClr val="dk1"/>
                 </a:solidFill>
@@ -12204,18 +12026,12 @@
             </a:r>
           </a:p>
           <a:p>
-            <a:pPr marL="457200" lvl="0" indent="-457200" algn="just" rtl="0">
-              <a:spcBef>
-                <a:spcPts val="0"/>
-              </a:spcBef>
-              <a:spcAft>
-                <a:spcPts val="0"/>
-              </a:spcAft>
+            <a:pPr marL="380985" indent="-380985" algn="just">
               <a:buFont typeface="Arial" panose="020B0604020202020204" pitchFamily="34" charset="0"/>
               <a:buChar char="•"/>
             </a:pPr>
             <a:r>
-              <a:rPr lang="en-US" sz="3200" dirty="0">
+              <a:rPr lang="en-US" sz="2667" dirty="0">
                 <a:solidFill>
                   <a:schemeClr val="dk1"/>
                 </a:solidFill>
@@ -12228,17 +12044,11 @@
             </a:r>
           </a:p>
           <a:p>
-            <a:pPr marL="457200" lvl="0" indent="-457200" algn="just" rtl="0">
-              <a:spcBef>
-                <a:spcPts val="0"/>
-              </a:spcBef>
-              <a:spcAft>
-                <a:spcPts val="0"/>
-              </a:spcAft>
+            <a:pPr marL="380985" indent="-380985" algn="just">
               <a:buFont typeface="Arial" panose="020B0604020202020204" pitchFamily="34" charset="0"/>
               <a:buChar char="•"/>
             </a:pPr>
-            <a:endParaRPr sz="3300" dirty="0">
+            <a:endParaRPr sz="2750" dirty="0">
               <a:solidFill>
                 <a:schemeClr val="dk1"/>
               </a:solidFill>
@@ -12258,8 +12068,8 @@
         </p:nvSpPr>
         <p:spPr>
           <a:xfrm>
-            <a:off x="15359419" y="20799761"/>
-            <a:ext cx="12937500" cy="10679816"/>
+            <a:off x="12799516" y="17333134"/>
+            <a:ext cx="10781250" cy="8898437"/>
           </a:xfrm>
           <a:prstGeom prst="rect">
             <a:avLst/>
@@ -12270,27 +12080,19 @@
           </a:ln>
         </p:spPr>
         <p:txBody>
-          <a:bodyPr spcFirstLastPara="1" wrap="square" lIns="91425" tIns="91425" rIns="91425" bIns="91425" anchor="t" anchorCtr="0">
+          <a:bodyPr spcFirstLastPara="1" wrap="square" lIns="76188" tIns="76188" rIns="76188" bIns="76188" anchor="t" anchorCtr="0">
             <a:spAutoFit/>
           </a:bodyPr>
           <a:lstStyle/>
           <a:p>
-            <a:pPr marL="0" lvl="0" indent="0" algn="l" rtl="0">
-              <a:spcBef>
-                <a:spcPts val="0"/>
-              </a:spcBef>
-              <a:spcAft>
-                <a:spcPts val="0"/>
-              </a:spcAft>
+            <a:pPr>
               <a:buClr>
                 <a:schemeClr val="dk1"/>
               </a:buClr>
               <a:buSzPts val="1100"/>
-              <a:buFont typeface="Arial"/>
-              <a:buNone/>
             </a:pPr>
             <a:r>
-              <a:rPr lang="en-US" sz="3100" dirty="0">
+              <a:rPr lang="en-US" sz="2583" dirty="0">
                 <a:solidFill>
                   <a:schemeClr val="dk1"/>
                 </a:solidFill>
@@ -12302,7 +12104,7 @@
               <a:t>As an experimental control, we first examine reliability statistics for BEACO2N @ Richmond Field Station (RFS), Berkeley CA; existing reliability statistics for this sensor are published by Winter et. al. (June 2025) which allows us to be confident in the true reliability state of the sensor. Time series correlation statistics are plotted over duration of deployment for the sensor. We find strong residual correlation with reference for this particular sensor over time, however we seek a reliability characterization method that relies minimally on simultaneous reference observations. We therefore estimate the probability density function (PDF) of sensor observations for each month of deployment and characterize the divergence between reference and measurement distributions using </a:t>
             </a:r>
             <a:r>
-              <a:rPr lang="en-US" sz="3100" dirty="0" err="1">
+              <a:rPr lang="en-US" sz="2583" dirty="0" err="1">
                 <a:solidFill>
                   <a:schemeClr val="dk1"/>
                 </a:solidFill>
@@ -12314,7 +12116,7 @@
               <a:t>Kullback</a:t>
             </a:r>
             <a:r>
-              <a:rPr lang="en-US" sz="3100" dirty="0">
+              <a:rPr lang="en-US" sz="2583" dirty="0">
                 <a:solidFill>
                   <a:schemeClr val="dk1"/>
                 </a:solidFill>
@@ -12328,47 +12130,16 @@
           </a:p>
         </p:txBody>
       </p:sp>
-      <p:pic>
-        <p:nvPicPr>
-          <p:cNvPr id="101" name="Google Shape;101;p13" descr="User with solid fill"/>
-          <p:cNvPicPr preferRelativeResize="0"/>
-          <p:nvPr/>
-        </p:nvPicPr>
-        <p:blipFill>
-          <a:blip r:embed="rId4">
-            <a:extLst>
-              <a:ext uri="{96DAC541-7B7A-43D3-8B79-37D633B846F1}">
-                <asvg:svgBlip xmlns:asvg="http://schemas.microsoft.com/office/drawing/2016/SVG/main" r:embed="rId5"/>
-              </a:ext>
-            </a:extLst>
-          </a:blip>
-          <a:srcRect l="1765" r="1765"/>
-          <a:stretch/>
-        </p:blipFill>
-        <p:spPr>
-          <a:xfrm>
-            <a:off x="39170900" y="1280160"/>
-            <a:ext cx="3385500" cy="3509400"/>
-          </a:xfrm>
-          <a:prstGeom prst="ellipse">
-            <a:avLst/>
-          </a:prstGeom>
-          <a:noFill/>
-          <a:ln>
-            <a:noFill/>
-          </a:ln>
-        </p:spPr>
-      </p:pic>
       <p:sp>
         <p:nvSpPr>
-          <p:cNvPr id="102" name="Google Shape;102;p13"/>
+          <p:cNvPr id="104" name="Google Shape;104;p13"/>
           <p:cNvSpPr txBox="1"/>
           <p:nvPr/>
         </p:nvSpPr>
         <p:spPr>
           <a:xfrm>
-            <a:off x="33284160" y="2468880"/>
-            <a:ext cx="5750700" cy="1892785"/>
+            <a:off x="762000" y="22194461"/>
+            <a:ext cx="3129064" cy="820650"/>
           </a:xfrm>
           <a:prstGeom prst="rect">
             <a:avLst/>
@@ -12379,123 +12150,13 @@
           </a:ln>
         </p:spPr>
         <p:txBody>
-          <a:bodyPr spcFirstLastPara="1" wrap="square" lIns="91425" tIns="45700" rIns="91425" bIns="45700" anchor="t" anchorCtr="0">
+          <a:bodyPr spcFirstLastPara="1" wrap="square" lIns="76188" tIns="76188" rIns="76188" bIns="76188" anchor="t" anchorCtr="0">
             <a:spAutoFit/>
           </a:bodyPr>
           <a:lstStyle/>
           <a:p>
-            <a:pPr marL="0" marR="0" lvl="0" indent="0" algn="r" rtl="0">
-              <a:lnSpc>
-                <a:spcPct val="100000"/>
-              </a:lnSpc>
-              <a:spcBef>
-                <a:spcPts val="0"/>
-              </a:spcBef>
-              <a:spcAft>
-                <a:spcPts val="0"/>
-              </a:spcAft>
-              <a:buNone/>
-            </a:pPr>
             <a:r>
-              <a:rPr lang="en-US" sz="3900" dirty="0">
-                <a:latin typeface="Calibri"/>
-                <a:ea typeface="Calibri"/>
-                <a:cs typeface="Calibri"/>
-                <a:sym typeface="Calibri"/>
-              </a:rPr>
-              <a:t>Junior studying </a:t>
-            </a:r>
-          </a:p>
-          <a:p>
-            <a:pPr marL="0" marR="0" lvl="0" indent="0" algn="r" rtl="0">
-              <a:lnSpc>
-                <a:spcPct val="100000"/>
-              </a:lnSpc>
-              <a:spcBef>
-                <a:spcPts val="0"/>
-              </a:spcBef>
-              <a:spcAft>
-                <a:spcPts val="0"/>
-              </a:spcAft>
-              <a:buNone/>
-            </a:pPr>
-            <a:r>
-              <a:rPr lang="en-US" sz="3900" dirty="0">
-                <a:latin typeface="Calibri"/>
-                <a:ea typeface="Calibri"/>
-                <a:cs typeface="Calibri"/>
-                <a:sym typeface="Calibri"/>
-              </a:rPr>
-              <a:t>Mathematics and </a:t>
-            </a:r>
-          </a:p>
-          <a:p>
-            <a:pPr marL="0" marR="0" lvl="0" indent="0" algn="r" rtl="0">
-              <a:lnSpc>
-                <a:spcPct val="100000"/>
-              </a:lnSpc>
-              <a:spcBef>
-                <a:spcPts val="0"/>
-              </a:spcBef>
-              <a:spcAft>
-                <a:spcPts val="0"/>
-              </a:spcAft>
-              <a:buNone/>
-            </a:pPr>
-            <a:r>
-              <a:rPr lang="en-US" sz="3900" dirty="0">
-                <a:latin typeface="Calibri"/>
-                <a:ea typeface="Calibri"/>
-                <a:cs typeface="Calibri"/>
-                <a:sym typeface="Calibri"/>
-              </a:rPr>
-              <a:t>Computer Science</a:t>
-            </a:r>
-            <a:endParaRPr sz="900" dirty="0">
-              <a:latin typeface="Calibri"/>
-              <a:ea typeface="Calibri"/>
-              <a:cs typeface="Calibri"/>
-              <a:sym typeface="Calibri"/>
-            </a:endParaRPr>
-          </a:p>
-        </p:txBody>
-      </p:sp>
-      <p:sp>
-        <p:nvSpPr>
-          <p:cNvPr id="104" name="Google Shape;104;p13"/>
-          <p:cNvSpPr txBox="1"/>
-          <p:nvPr/>
-        </p:nvSpPr>
-        <p:spPr>
-          <a:xfrm>
-            <a:off x="914400" y="26151840"/>
-            <a:ext cx="3754877" cy="985200"/>
-          </a:xfrm>
-          <a:prstGeom prst="rect">
-            <a:avLst/>
-          </a:prstGeom>
-          <a:noFill/>
-          <a:ln>
-            <a:noFill/>
-          </a:ln>
-        </p:spPr>
-        <p:txBody>
-          <a:bodyPr spcFirstLastPara="1" wrap="square" lIns="91425" tIns="91425" rIns="91425" bIns="91425" anchor="t" anchorCtr="0">
-            <a:spAutoFit/>
-          </a:bodyPr>
-          <a:lstStyle/>
-          <a:p>
-            <a:pPr marL="0" lvl="0" indent="0" algn="l" rtl="0">
-              <a:spcBef>
-                <a:spcPts val="0"/>
-              </a:spcBef>
-              <a:spcAft>
-                <a:spcPts val="0"/>
-              </a:spcAft>
-              <a:buNone/>
-            </a:pPr>
-            <a:r>
-              <a:rPr lang="en-US" sz="5200" b="1" dirty="0">
+              <a:rPr lang="en-US" sz="4333" b="1" dirty="0">
                 <a:solidFill>
                   <a:srgbClr val="595959"/>
                 </a:solidFill>
@@ -12506,7 +12167,7 @@
               </a:rPr>
               <a:t>OBJECTIVES</a:t>
             </a:r>
-            <a:endParaRPr sz="5200" dirty="0">
+            <a:endParaRPr sz="4333" dirty="0">
               <a:solidFill>
                 <a:srgbClr val="595959"/>
               </a:solidFill>
@@ -12525,7 +12186,7 @@
           <p:nvPr/>
         </p:nvPicPr>
         <p:blipFill rotWithShape="1">
-          <a:blip r:embed="rId6">
+          <a:blip r:embed="rId4">
             <a:alphaModFix/>
           </a:blip>
           <a:srcRect l="31778" t="6009" r="31090" b="19284"/>
@@ -12533,8 +12194,8 @@
         </p:blipFill>
         <p:spPr>
           <a:xfrm>
-            <a:off x="38926100" y="28956675"/>
-            <a:ext cx="3255790" cy="3315530"/>
+            <a:off x="32490974" y="1073283"/>
+            <a:ext cx="2713158" cy="2762942"/>
           </a:xfrm>
           <a:prstGeom prst="rect">
             <a:avLst/>
@@ -12557,8 +12218,8 @@
         </p:nvSpPr>
         <p:spPr>
           <a:xfrm>
-            <a:off x="32432350" y="19220588"/>
-            <a:ext cx="1111200" cy="507900"/>
+            <a:off x="27026958" y="16017157"/>
+            <a:ext cx="926000" cy="423250"/>
           </a:xfrm>
           <a:prstGeom prst="roundRect">
             <a:avLst>
@@ -12573,21 +12234,12 @@
           </a:ln>
         </p:spPr>
         <p:txBody>
-          <a:bodyPr spcFirstLastPara="1" wrap="square" lIns="91425" tIns="91425" rIns="91425" bIns="91425" anchor="ctr" anchorCtr="0">
+          <a:bodyPr spcFirstLastPara="1" wrap="square" lIns="76188" tIns="76188" rIns="76188" bIns="76188" anchor="ctr" anchorCtr="0">
             <a:noAutofit/>
           </a:bodyPr>
           <a:lstStyle/>
           <a:p>
-            <a:pPr marL="0" lvl="0" indent="0" algn="l" rtl="0">
-              <a:spcBef>
-                <a:spcPts val="0"/>
-              </a:spcBef>
-              <a:spcAft>
-                <a:spcPts val="0"/>
-              </a:spcAft>
-              <a:buNone/>
-            </a:pPr>
-            <a:endParaRPr/>
+            <a:endParaRPr sz="972"/>
           </a:p>
         </p:txBody>
       </p:sp>
@@ -12599,8 +12251,8 @@
         </p:nvSpPr>
         <p:spPr>
           <a:xfrm>
-            <a:off x="15290278" y="17922080"/>
-            <a:ext cx="12843900" cy="2893069"/>
+            <a:off x="12741898" y="14935067"/>
+            <a:ext cx="10703250" cy="2410379"/>
           </a:xfrm>
           <a:prstGeom prst="rect">
             <a:avLst/>
@@ -12611,24 +12263,19 @@
           </a:ln>
         </p:spPr>
         <p:txBody>
-          <a:bodyPr spcFirstLastPara="1" wrap="square" lIns="91425" tIns="91425" rIns="91425" bIns="91425" anchor="t" anchorCtr="0">
+          <a:bodyPr spcFirstLastPara="1" wrap="square" lIns="76188" tIns="76188" rIns="76188" bIns="76188" anchor="t" anchorCtr="0">
             <a:spAutoFit/>
           </a:bodyPr>
           <a:lstStyle/>
           <a:p>
-            <a:pPr marL="0" lvl="0" indent="0" algn="just" rtl="0">
-              <a:spcBef>
-                <a:spcPts val="0"/>
-              </a:spcBef>
+            <a:pPr algn="just">
               <a:buClr>
                 <a:schemeClr val="dk1"/>
               </a:buClr>
               <a:buSzPts val="1100"/>
-              <a:buFont typeface="Arial"/>
-              <a:buNone/>
             </a:pPr>
             <a:r>
-              <a:rPr lang="en-US" sz="2200" i="1" dirty="0">
+              <a:rPr lang="en-US" sz="1833" i="1" dirty="0">
                 <a:solidFill>
                   <a:schemeClr val="dk1"/>
                 </a:solidFill>
@@ -12641,19 +12288,14 @@
             </a:r>
           </a:p>
           <a:p>
-            <a:pPr marL="0" lvl="0" indent="0" algn="just" rtl="0">
-              <a:spcBef>
-                <a:spcPts val="0"/>
-              </a:spcBef>
+            <a:pPr algn="just">
               <a:buClr>
                 <a:schemeClr val="dk1"/>
               </a:buClr>
               <a:buSzPts val="1100"/>
-              <a:buFont typeface="Arial"/>
-              <a:buNone/>
             </a:pPr>
             <a:r>
-              <a:rPr lang="en-US" sz="2200" i="1" u="sng" dirty="0">
+              <a:rPr lang="en-US" sz="1833" i="1" u="sng" dirty="0">
                 <a:solidFill>
                   <a:schemeClr val="dk1"/>
                 </a:solidFill>
@@ -12665,7 +12307,7 @@
               <a:t>Row 1:</a:t>
             </a:r>
             <a:r>
-              <a:rPr lang="en-US" sz="2200" i="1" dirty="0">
+              <a:rPr lang="en-US" sz="1833" i="1" dirty="0">
                 <a:solidFill>
                   <a:schemeClr val="dk1"/>
                 </a:solidFill>
@@ -12678,19 +12320,14 @@
             </a:r>
           </a:p>
           <a:p>
-            <a:pPr marL="0" lvl="0" indent="0" algn="just" rtl="0">
-              <a:spcBef>
-                <a:spcPts val="0"/>
-              </a:spcBef>
+            <a:pPr algn="just">
               <a:buClr>
                 <a:schemeClr val="dk1"/>
               </a:buClr>
               <a:buSzPts val="1100"/>
-              <a:buFont typeface="Arial"/>
-              <a:buNone/>
             </a:pPr>
             <a:r>
-              <a:rPr lang="en-US" sz="2200" i="1" u="sng" dirty="0">
+              <a:rPr lang="en-US" sz="1833" i="1" u="sng" dirty="0">
                 <a:solidFill>
                   <a:schemeClr val="dk1"/>
                 </a:solidFill>
@@ -12702,7 +12339,7 @@
               <a:t>Row 2:</a:t>
             </a:r>
             <a:r>
-              <a:rPr lang="en-US" sz="2200" i="1" dirty="0">
+              <a:rPr lang="en-US" sz="1833" i="1" dirty="0">
                 <a:solidFill>
                   <a:schemeClr val="dk1"/>
                 </a:solidFill>
@@ -12714,7 +12351,7 @@
               <a:t> f‑Divergences with meteorological filtering; f‑Divergences without meteorological filtering; f‑Divergence change after meteorological filtering. Reference is external RFS </a:t>
             </a:r>
             <a:r>
-              <a:rPr lang="en-US" sz="2200" i="1" dirty="0" err="1">
+              <a:rPr lang="en-US" sz="1833" i="1" dirty="0" err="1">
                 <a:solidFill>
                   <a:schemeClr val="dk1"/>
                 </a:solidFill>
@@ -12726,7 +12363,7 @@
               <a:t>Picarro</a:t>
             </a:r>
             <a:r>
-              <a:rPr lang="en-US" sz="2200" i="1" dirty="0">
+              <a:rPr lang="en-US" sz="1833" i="1" dirty="0">
                 <a:solidFill>
                   <a:schemeClr val="dk1"/>
                 </a:solidFill>
@@ -12739,19 +12376,14 @@
             </a:r>
           </a:p>
           <a:p>
-            <a:pPr marL="0" lvl="0" indent="0" algn="just" rtl="0">
-              <a:spcBef>
-                <a:spcPts val="0"/>
-              </a:spcBef>
+            <a:pPr algn="just">
               <a:buClr>
                 <a:schemeClr val="dk1"/>
               </a:buClr>
               <a:buSzPts val="1100"/>
-              <a:buFont typeface="Arial"/>
-              <a:buNone/>
             </a:pPr>
             <a:r>
-              <a:rPr lang="en-US" sz="2200" i="1" u="sng" dirty="0">
+              <a:rPr lang="en-US" sz="1833" i="1" u="sng" dirty="0">
                 <a:solidFill>
                   <a:schemeClr val="dk1"/>
                 </a:solidFill>
@@ -12763,7 +12395,7 @@
               <a:t>Row 3:</a:t>
             </a:r>
             <a:r>
-              <a:rPr lang="en-US" sz="2200" i="1" dirty="0">
+              <a:rPr lang="en-US" sz="1833" i="1" dirty="0">
                 <a:solidFill>
                   <a:schemeClr val="dk1"/>
                 </a:solidFill>
@@ -12774,7 +12406,7 @@
               </a:rPr>
               <a:t> Same as Row 2 but with distributions from first 12 operating months of BEACO2N sensor used as reference.</a:t>
             </a:r>
-            <a:endParaRPr lang="en-US" sz="2200" i="1" u="sng" dirty="0">
+            <a:endParaRPr lang="en-US" sz="1833" i="1" u="sng" dirty="0">
               <a:solidFill>
                 <a:schemeClr val="dk1"/>
               </a:solidFill>
@@ -12794,8 +12426,8 @@
         </p:nvSpPr>
         <p:spPr>
           <a:xfrm>
-            <a:off x="34472675" y="19498625"/>
-            <a:ext cx="1176600" cy="420300"/>
+            <a:off x="28727229" y="16248854"/>
+            <a:ext cx="980500" cy="350250"/>
           </a:xfrm>
           <a:prstGeom prst="roundRect">
             <a:avLst>
@@ -12810,21 +12442,12 @@
           </a:ln>
         </p:spPr>
         <p:txBody>
-          <a:bodyPr spcFirstLastPara="1" wrap="square" lIns="91425" tIns="91425" rIns="91425" bIns="91425" anchor="ctr" anchorCtr="0">
+          <a:bodyPr spcFirstLastPara="1" wrap="square" lIns="76188" tIns="76188" rIns="76188" bIns="76188" anchor="ctr" anchorCtr="0">
             <a:noAutofit/>
           </a:bodyPr>
           <a:lstStyle/>
           <a:p>
-            <a:pPr marL="0" lvl="0" indent="0" algn="l" rtl="0">
-              <a:spcBef>
-                <a:spcPts val="0"/>
-              </a:spcBef>
-              <a:spcAft>
-                <a:spcPts val="0"/>
-              </a:spcAft>
-              <a:buNone/>
-            </a:pPr>
-            <a:endParaRPr/>
+            <a:endParaRPr sz="972"/>
           </a:p>
         </p:txBody>
       </p:sp>
@@ -12836,8 +12459,8 @@
         </p:nvSpPr>
         <p:spPr>
           <a:xfrm>
-            <a:off x="31146750" y="19202400"/>
-            <a:ext cx="438300" cy="372300"/>
+            <a:off x="25955625" y="16002000"/>
+            <a:ext cx="365250" cy="310250"/>
           </a:xfrm>
           <a:prstGeom prst="ellipse">
             <a:avLst/>
@@ -12850,21 +12473,12 @@
           </a:ln>
         </p:spPr>
         <p:txBody>
-          <a:bodyPr spcFirstLastPara="1" wrap="square" lIns="91425" tIns="91425" rIns="91425" bIns="91425" anchor="ctr" anchorCtr="0">
+          <a:bodyPr spcFirstLastPara="1" wrap="square" lIns="76188" tIns="76188" rIns="76188" bIns="76188" anchor="ctr" anchorCtr="0">
             <a:noAutofit/>
           </a:bodyPr>
           <a:lstStyle/>
           <a:p>
-            <a:pPr marL="0" lvl="0" indent="0" algn="l" rtl="0">
-              <a:spcBef>
-                <a:spcPts val="0"/>
-              </a:spcBef>
-              <a:spcAft>
-                <a:spcPts val="0"/>
-              </a:spcAft>
-              <a:buNone/>
-            </a:pPr>
-            <a:endParaRPr/>
+            <a:endParaRPr sz="972"/>
           </a:p>
         </p:txBody>
       </p:sp>
@@ -12882,8 +12496,8 @@
         </p:nvSpPr>
         <p:spPr>
           <a:xfrm>
-            <a:off x="15482825" y="5983196"/>
-            <a:ext cx="12937500" cy="914400"/>
+            <a:off x="12902354" y="4985997"/>
+            <a:ext cx="10781250" cy="762000"/>
           </a:xfrm>
           <a:prstGeom prst="rect">
             <a:avLst/>
@@ -12894,22 +12508,13 @@
           </a:ln>
         </p:spPr>
         <p:txBody>
-          <a:bodyPr spcFirstLastPara="1" wrap="square" lIns="91425" tIns="45700" rIns="91425" bIns="45700" anchor="t" anchorCtr="0">
+          <a:bodyPr spcFirstLastPara="1" wrap="square" lIns="76188" tIns="38083" rIns="76188" bIns="38083" anchor="t" anchorCtr="0">
             <a:noAutofit/>
           </a:bodyPr>
           <a:lstStyle/>
           <a:p>
-            <a:pPr marL="0" marR="0" lvl="0" indent="0" algn="l" rtl="0">
-              <a:spcBef>
-                <a:spcPts val="0"/>
-              </a:spcBef>
-              <a:spcAft>
-                <a:spcPts val="0"/>
-              </a:spcAft>
-              <a:buNone/>
-            </a:pPr>
             <a:r>
-              <a:rPr lang="en-US" sz="5200" b="1" dirty="0">
+              <a:rPr lang="en-US" sz="4333" b="1" dirty="0">
                 <a:solidFill>
                   <a:srgbClr val="595959"/>
                 </a:solidFill>
@@ -12920,7 +12525,7 @@
               </a:rPr>
               <a:t>METHODS</a:t>
             </a:r>
-            <a:endParaRPr sz="5200" b="1" dirty="0">
+            <a:endParaRPr sz="4333" b="1" dirty="0">
               <a:solidFill>
                 <a:srgbClr val="595959"/>
               </a:solidFill>
@@ -12931,16 +12536,7 @@
             </a:endParaRPr>
           </a:p>
           <a:p>
-            <a:pPr marL="0" marR="0" lvl="0" indent="0" algn="l" rtl="0">
-              <a:spcBef>
-                <a:spcPts val="0"/>
-              </a:spcBef>
-              <a:spcAft>
-                <a:spcPts val="0"/>
-              </a:spcAft>
-              <a:buNone/>
-            </a:pPr>
-            <a:endParaRPr sz="5200" b="1" dirty="0">
+            <a:endParaRPr sz="4333" b="1" dirty="0">
               <a:solidFill>
                 <a:srgbClr val="595959"/>
               </a:solidFill>
@@ -12948,276 +12544,6 @@
           </a:p>
         </p:txBody>
       </p:sp>
-      <p:pic>
-        <p:nvPicPr>
-          <p:cNvPr id="11" name="Picture 10">
-            <a:extLst>
-              <a:ext uri="{FF2B5EF4-FFF2-40B4-BE49-F238E27FC236}">
-                <a16:creationId xmlns:a16="http://schemas.microsoft.com/office/drawing/2014/main" id="{B795B368-0981-C071-13DA-04903BB73FD8}"/>
-              </a:ext>
-            </a:extLst>
-          </p:cNvPr>
-          <p:cNvPicPr>
-            <a:picLocks noChangeAspect="1"/>
-          </p:cNvPicPr>
-          <p:nvPr/>
-        </p:nvPicPr>
-        <p:blipFill>
-          <a:blip r:embed="rId7"/>
-          <a:stretch>
-            <a:fillRect/>
-          </a:stretch>
-        </p:blipFill>
-        <p:spPr>
-          <a:xfrm>
-            <a:off x="15359419" y="6923645"/>
-            <a:ext cx="3862656" cy="4998733"/>
-          </a:xfrm>
-          <a:prstGeom prst="rect">
-            <a:avLst/>
-          </a:prstGeom>
-        </p:spPr>
-      </p:pic>
-      <p:pic>
-        <p:nvPicPr>
-          <p:cNvPr id="13" name="Picture 12">
-            <a:extLst>
-              <a:ext uri="{FF2B5EF4-FFF2-40B4-BE49-F238E27FC236}">
-                <a16:creationId xmlns:a16="http://schemas.microsoft.com/office/drawing/2014/main" id="{1C98311F-0C74-8F77-6E0C-306EF67A9760}"/>
-              </a:ext>
-            </a:extLst>
-          </p:cNvPr>
-          <p:cNvPicPr>
-            <a:picLocks noChangeAspect="1"/>
-          </p:cNvPicPr>
-          <p:nvPr/>
-        </p:nvPicPr>
-        <p:blipFill>
-          <a:blip r:embed="rId8"/>
-          <a:stretch>
-            <a:fillRect/>
-          </a:stretch>
-        </p:blipFill>
-        <p:spPr>
-          <a:xfrm>
-            <a:off x="19827700" y="6923646"/>
-            <a:ext cx="3862656" cy="4998732"/>
-          </a:xfrm>
-          <a:prstGeom prst="rect">
-            <a:avLst/>
-          </a:prstGeom>
-        </p:spPr>
-      </p:pic>
-      <p:pic>
-        <p:nvPicPr>
-          <p:cNvPr id="15" name="Picture 14">
-            <a:extLst>
-              <a:ext uri="{FF2B5EF4-FFF2-40B4-BE49-F238E27FC236}">
-                <a16:creationId xmlns:a16="http://schemas.microsoft.com/office/drawing/2014/main" id="{A11ACDC1-2221-165E-C3F0-DC48640B4FD2}"/>
-              </a:ext>
-            </a:extLst>
-          </p:cNvPr>
-          <p:cNvPicPr>
-            <a:picLocks noChangeAspect="1"/>
-          </p:cNvPicPr>
-          <p:nvPr/>
-        </p:nvPicPr>
-        <p:blipFill>
-          <a:blip r:embed="rId9"/>
-          <a:stretch>
-            <a:fillRect/>
-          </a:stretch>
-        </p:blipFill>
-        <p:spPr>
-          <a:xfrm>
-            <a:off x="24295981" y="6897596"/>
-            <a:ext cx="3862656" cy="4998732"/>
-          </a:xfrm>
-          <a:prstGeom prst="rect">
-            <a:avLst/>
-          </a:prstGeom>
-        </p:spPr>
-      </p:pic>
-      <p:pic>
-        <p:nvPicPr>
-          <p:cNvPr id="17" name="Picture 16">
-            <a:extLst>
-              <a:ext uri="{FF2B5EF4-FFF2-40B4-BE49-F238E27FC236}">
-                <a16:creationId xmlns:a16="http://schemas.microsoft.com/office/drawing/2014/main" id="{97E68A8B-3D3C-2F30-B2B7-F189549F5401}"/>
-              </a:ext>
-            </a:extLst>
-          </p:cNvPr>
-          <p:cNvPicPr>
-            <a:picLocks noChangeAspect="1"/>
-          </p:cNvPicPr>
-          <p:nvPr/>
-        </p:nvPicPr>
-        <p:blipFill>
-          <a:blip r:embed="rId10"/>
-          <a:stretch>
-            <a:fillRect/>
-          </a:stretch>
-        </p:blipFill>
-        <p:spPr>
-          <a:xfrm>
-            <a:off x="15359419" y="12084295"/>
-            <a:ext cx="3864446" cy="2760319"/>
-          </a:xfrm>
-          <a:prstGeom prst="rect">
-            <a:avLst/>
-          </a:prstGeom>
-        </p:spPr>
-      </p:pic>
-      <p:pic>
-        <p:nvPicPr>
-          <p:cNvPr id="19" name="Picture 18">
-            <a:extLst>
-              <a:ext uri="{FF2B5EF4-FFF2-40B4-BE49-F238E27FC236}">
-                <a16:creationId xmlns:a16="http://schemas.microsoft.com/office/drawing/2014/main" id="{D4288210-1772-449E-BDD6-A71E53FA4910}"/>
-              </a:ext>
-            </a:extLst>
-          </p:cNvPr>
-          <p:cNvPicPr>
-            <a:picLocks noChangeAspect="1"/>
-          </p:cNvPicPr>
-          <p:nvPr/>
-        </p:nvPicPr>
-        <p:blipFill>
-          <a:blip r:embed="rId11"/>
-          <a:stretch>
-            <a:fillRect/>
-          </a:stretch>
-        </p:blipFill>
-        <p:spPr>
-          <a:xfrm>
-            <a:off x="19827700" y="12084292"/>
-            <a:ext cx="3864449" cy="2760322"/>
-          </a:xfrm>
-          <a:prstGeom prst="rect">
-            <a:avLst/>
-          </a:prstGeom>
-        </p:spPr>
-      </p:pic>
-      <p:pic>
-        <p:nvPicPr>
-          <p:cNvPr id="21" name="Picture 20">
-            <a:extLst>
-              <a:ext uri="{FF2B5EF4-FFF2-40B4-BE49-F238E27FC236}">
-                <a16:creationId xmlns:a16="http://schemas.microsoft.com/office/drawing/2014/main" id="{694D7E76-AAD1-0B72-1377-9B556C2FF856}"/>
-              </a:ext>
-            </a:extLst>
-          </p:cNvPr>
-          <p:cNvPicPr>
-            <a:picLocks noChangeAspect="1"/>
-          </p:cNvPicPr>
-          <p:nvPr/>
-        </p:nvPicPr>
-        <p:blipFill>
-          <a:blip r:embed="rId12"/>
-          <a:stretch>
-            <a:fillRect/>
-          </a:stretch>
-        </p:blipFill>
-        <p:spPr>
-          <a:xfrm>
-            <a:off x="24316631" y="12089580"/>
-            <a:ext cx="3859911" cy="2757079"/>
-          </a:xfrm>
-          <a:prstGeom prst="rect">
-            <a:avLst/>
-          </a:prstGeom>
-        </p:spPr>
-      </p:pic>
-      <p:pic>
-        <p:nvPicPr>
-          <p:cNvPr id="23" name="Picture 22">
-            <a:extLst>
-              <a:ext uri="{FF2B5EF4-FFF2-40B4-BE49-F238E27FC236}">
-                <a16:creationId xmlns:a16="http://schemas.microsoft.com/office/drawing/2014/main" id="{FDF71582-95C7-83B6-7A67-1FAF473A2826}"/>
-              </a:ext>
-            </a:extLst>
-          </p:cNvPr>
-          <p:cNvPicPr>
-            <a:picLocks noChangeAspect="1"/>
-          </p:cNvPicPr>
-          <p:nvPr/>
-        </p:nvPicPr>
-        <p:blipFill>
-          <a:blip r:embed="rId13"/>
-          <a:stretch>
-            <a:fillRect/>
-          </a:stretch>
-        </p:blipFill>
-        <p:spPr>
-          <a:xfrm>
-            <a:off x="15359419" y="14985382"/>
-            <a:ext cx="3864446" cy="2760319"/>
-          </a:xfrm>
-          <a:prstGeom prst="rect">
-            <a:avLst/>
-          </a:prstGeom>
-        </p:spPr>
-      </p:pic>
-      <p:pic>
-        <p:nvPicPr>
-          <p:cNvPr id="25" name="Picture 24">
-            <a:extLst>
-              <a:ext uri="{FF2B5EF4-FFF2-40B4-BE49-F238E27FC236}">
-                <a16:creationId xmlns:a16="http://schemas.microsoft.com/office/drawing/2014/main" id="{15F1ECCD-9523-A022-FAD1-A0FA289D1832}"/>
-              </a:ext>
-            </a:extLst>
-          </p:cNvPr>
-          <p:cNvPicPr>
-            <a:picLocks noChangeAspect="1"/>
-          </p:cNvPicPr>
-          <p:nvPr/>
-        </p:nvPicPr>
-        <p:blipFill>
-          <a:blip r:embed="rId14"/>
-          <a:stretch>
-            <a:fillRect/>
-          </a:stretch>
-        </p:blipFill>
-        <p:spPr>
-          <a:xfrm>
-            <a:off x="19827700" y="14986660"/>
-            <a:ext cx="3862656" cy="2759041"/>
-          </a:xfrm>
-          <a:prstGeom prst="rect">
-            <a:avLst/>
-          </a:prstGeom>
-        </p:spPr>
-      </p:pic>
-      <p:pic>
-        <p:nvPicPr>
-          <p:cNvPr id="27" name="Picture 26">
-            <a:extLst>
-              <a:ext uri="{FF2B5EF4-FFF2-40B4-BE49-F238E27FC236}">
-                <a16:creationId xmlns:a16="http://schemas.microsoft.com/office/drawing/2014/main" id="{DC5DA7AA-AD6B-9B97-DE5A-C0F3CF5B4F20}"/>
-              </a:ext>
-            </a:extLst>
-          </p:cNvPr>
-          <p:cNvPicPr>
-            <a:picLocks noChangeAspect="1"/>
-          </p:cNvPicPr>
-          <p:nvPr/>
-        </p:nvPicPr>
-        <p:blipFill>
-          <a:blip r:embed="rId15"/>
-          <a:stretch>
-            <a:fillRect/>
-          </a:stretch>
-        </p:blipFill>
-        <p:spPr>
-          <a:xfrm>
-            <a:off x="24316631" y="14996320"/>
-            <a:ext cx="3859911" cy="2757079"/>
-          </a:xfrm>
-          <a:prstGeom prst="rect">
-            <a:avLst/>
-          </a:prstGeom>
-        </p:spPr>
-      </p:pic>
       <p:sp>
         <p:nvSpPr>
           <p:cNvPr id="29" name="Google Shape;98;p13">
@@ -13232,8 +12558,8 @@
         </p:nvSpPr>
         <p:spPr>
           <a:xfrm>
-            <a:off x="29406650" y="6934486"/>
-            <a:ext cx="13570150" cy="16435268"/>
+            <a:off x="24422881" y="5989243"/>
+            <a:ext cx="11308458" cy="13942278"/>
           </a:xfrm>
           <a:prstGeom prst="rect">
             <a:avLst/>
@@ -13244,27 +12570,19 @@
           </a:ln>
         </p:spPr>
         <p:txBody>
-          <a:bodyPr spcFirstLastPara="1" wrap="square" lIns="91440" tIns="91440" rIns="91440" bIns="91440" anchor="t" anchorCtr="0">
+          <a:bodyPr spcFirstLastPara="1" wrap="square" lIns="76200" tIns="76200" rIns="76200" bIns="76200" anchor="t" anchorCtr="0">
             <a:spAutoFit/>
           </a:bodyPr>
           <a:lstStyle/>
           <a:p>
-            <a:pPr marL="0" lvl="0" indent="0" algn="just" rtl="0">
-              <a:spcBef>
-                <a:spcPts val="0"/>
-              </a:spcBef>
-              <a:spcAft>
-                <a:spcPts val="0"/>
-              </a:spcAft>
+            <a:pPr algn="just">
               <a:buClr>
                 <a:schemeClr val="dk1"/>
               </a:buClr>
               <a:buSzPts val="1100"/>
-              <a:buFont typeface="Arial"/>
-              <a:buNone/>
             </a:pPr>
             <a:r>
-              <a:rPr lang="en-US" sz="3300" dirty="0">
+              <a:rPr lang="en-US" sz="2750" dirty="0">
                 <a:latin typeface="Calibri"/>
                 <a:ea typeface="Calibri"/>
                 <a:cs typeface="Calibri"/>
@@ -13274,21 +12592,13 @@
             </a:r>
           </a:p>
           <a:p>
-            <a:pPr marL="0" lvl="0" indent="0" algn="just" rtl="0">
-              <a:spcBef>
-                <a:spcPts val="0"/>
-              </a:spcBef>
-              <a:spcAft>
-                <a:spcPts val="0"/>
-              </a:spcAft>
+            <a:pPr algn="just">
               <a:buClr>
                 <a:schemeClr val="dk1"/>
               </a:buClr>
               <a:buSzPts val="1100"/>
-              <a:buFont typeface="Arial"/>
-              <a:buNone/>
             </a:pPr>
-            <a:endParaRPr lang="en-US" sz="3300" dirty="0">
+            <a:endParaRPr lang="en-US" sz="2750" dirty="0">
               <a:latin typeface="Calibri"/>
               <a:ea typeface="Calibri"/>
               <a:cs typeface="Calibri"/>
@@ -13303,7 +12613,7 @@
               <a:buSzPts val="1100"/>
             </a:pPr>
             <a:r>
-              <a:rPr lang="en-US" sz="3300" dirty="0">
+              <a:rPr lang="en-US" sz="2750" dirty="0">
                 <a:latin typeface="Calibri"/>
                 <a:ea typeface="Calibri"/>
                 <a:cs typeface="Calibri"/>
@@ -13319,7 +12629,7 @@
               </a:buClr>
               <a:buSzPts val="1100"/>
             </a:pPr>
-            <a:endParaRPr lang="en-US" sz="3300" dirty="0">
+            <a:endParaRPr lang="en-US" sz="2750" dirty="0">
               <a:latin typeface="Calibri"/>
               <a:ea typeface="Calibri"/>
               <a:cs typeface="Calibri"/>
@@ -13334,7 +12644,7 @@
               <a:buSzPts val="1100"/>
             </a:pPr>
             <a:r>
-              <a:rPr lang="en-US" sz="3300" dirty="0">
+              <a:rPr lang="en-US" sz="2750" dirty="0">
                 <a:latin typeface="Calibri"/>
                 <a:ea typeface="Calibri"/>
                 <a:cs typeface="Calibri"/>
@@ -13360,7 +12670,7 @@
           <p:nvPr/>
         </p:nvPicPr>
         <p:blipFill>
-          <a:blip r:embed="rId16">
+          <a:blip r:embed="rId5">
             <a:extLst>
               <a:ext uri="{28A0092B-C50C-407E-A947-70E740481C1C}">
                 <a14:useLocalDpi xmlns:a14="http://schemas.microsoft.com/office/drawing/2010/main" val="0"/>
@@ -13374,8 +12684,8 @@
         </p:blipFill>
         <p:spPr bwMode="auto">
           <a:xfrm>
-            <a:off x="914400" y="21835937"/>
-            <a:ext cx="3186980" cy="4249306"/>
+            <a:off x="761998" y="18508662"/>
+            <a:ext cx="2655817" cy="3541088"/>
           </a:xfrm>
           <a:prstGeom prst="rect">
             <a:avLst/>
@@ -13407,7 +12717,7 @@
           <p:nvPr/>
         </p:nvPicPr>
         <p:blipFill>
-          <a:blip r:embed="rId17">
+          <a:blip r:embed="rId6">
             <a:extLst>
               <a:ext uri="{28A0092B-C50C-407E-A947-70E740481C1C}">
                 <a14:useLocalDpi xmlns:a14="http://schemas.microsoft.com/office/drawing/2010/main" val="0"/>
@@ -13421,8 +12731,8 @@
         </p:blipFill>
         <p:spPr bwMode="auto">
           <a:xfrm>
-            <a:off x="4398574" y="21835937"/>
-            <a:ext cx="6373960" cy="4249306"/>
+            <a:off x="3665477" y="18508662"/>
+            <a:ext cx="5311633" cy="3541088"/>
           </a:xfrm>
           <a:prstGeom prst="rect">
             <a:avLst/>
@@ -13456,8 +12766,8 @@
         </p:nvCxnSpPr>
         <p:spPr>
           <a:xfrm flipH="1">
-            <a:off x="5974387" y="22737482"/>
-            <a:ext cx="137513" cy="632272"/>
+            <a:off x="4837080" y="18963291"/>
+            <a:ext cx="256170" cy="820650"/>
           </a:xfrm>
           <a:prstGeom prst="straightConnector1">
             <a:avLst/>
@@ -13498,8 +12808,8 @@
         </p:nvSpPr>
         <p:spPr>
           <a:xfrm>
-            <a:off x="4937150" y="22368150"/>
-            <a:ext cx="2349500" cy="369332"/>
+            <a:off x="4114291" y="18640126"/>
+            <a:ext cx="1957917" cy="323165"/>
           </a:xfrm>
           <a:prstGeom prst="rect">
             <a:avLst/>
@@ -13514,7 +12824,7 @@
           <a:p>
             <a:pPr algn="ctr"/>
             <a:r>
-              <a:rPr lang="en-US" sz="1800" b="1" dirty="0" err="1">
+              <a:rPr lang="en-US" sz="1500" b="1" dirty="0" err="1">
                 <a:solidFill>
                   <a:srgbClr val="FF0000"/>
                 </a:solidFill>
@@ -13522,7 +12832,7 @@
               <a:t>Alphasense</a:t>
             </a:r>
             <a:r>
-              <a:rPr lang="en-US" sz="1800" b="1" dirty="0">
+              <a:rPr lang="en-US" sz="1500" b="1" dirty="0">
                 <a:solidFill>
                   <a:srgbClr val="FF0000"/>
                 </a:solidFill>
@@ -13548,8 +12858,8 @@
             </p:nvSpPr>
             <p:spPr>
               <a:xfrm>
-                <a:off x="11069728" y="21835937"/>
-                <a:ext cx="3486063" cy="3570178"/>
+                <a:off x="9224772" y="18571789"/>
+                <a:ext cx="2905053" cy="3256573"/>
               </a:xfrm>
               <a:prstGeom prst="rect">
                 <a:avLst/>
@@ -13560,24 +12870,19 @@
               </a:ln>
             </p:spPr>
             <p:txBody>
-              <a:bodyPr spcFirstLastPara="1" wrap="square" lIns="91425" tIns="91425" rIns="91425" bIns="91425" anchor="t" anchorCtr="0">
+              <a:bodyPr spcFirstLastPara="1" wrap="square" lIns="76188" tIns="76188" rIns="76188" bIns="76188" anchor="t" anchorCtr="0">
                 <a:spAutoFit/>
               </a:bodyPr>
               <a:lstStyle/>
               <a:p>
-                <a:pPr marL="0" lvl="0" indent="0" rtl="0">
-                  <a:spcBef>
-                    <a:spcPts val="0"/>
-                  </a:spcBef>
+                <a:pPr>
                   <a:buClr>
                     <a:schemeClr val="dk1"/>
                   </a:buClr>
                   <a:buSzPts val="1100"/>
-                  <a:buFont typeface="Arial"/>
-                  <a:buNone/>
                 </a:pPr>
                 <a:r>
-                  <a:rPr lang="en-US" sz="2200" i="1" u="sng" dirty="0">
+                  <a:rPr lang="en-US" sz="1833" i="1" u="sng" dirty="0">
                     <a:solidFill>
                       <a:schemeClr val="dk1"/>
                     </a:solidFill>
@@ -13589,7 +12894,7 @@
                   <a:t>Left:</a:t>
                 </a:r>
                 <a:r>
-                  <a:rPr lang="en-US" sz="2200" i="1" dirty="0">
+                  <a:rPr lang="en-US" sz="1833" i="1" dirty="0">
                     <a:solidFill>
                       <a:schemeClr val="dk1"/>
                     </a:solidFill>
@@ -13605,7 +12910,7 @@
                     <m:sSub>
                       <m:sSubPr>
                         <m:ctrlPr>
-                          <a:rPr lang="en-US" sz="2200" b="0" i="1" smtClean="0">
+                          <a:rPr lang="en-US" sz="1833" i="1">
                             <a:solidFill>
                               <a:schemeClr val="dk1"/>
                             </a:solidFill>
@@ -13621,7 +12926,7 @@
                           <m:rPr>
                             <m:nor/>
                           </m:rPr>
-                          <a:rPr lang="en-US" sz="2200" b="0" i="0" smtClean="0">
+                          <a:rPr lang="en-US" sz="1833">
                             <a:solidFill>
                               <a:schemeClr val="dk1"/>
                             </a:solidFill>
@@ -13635,7 +12940,7 @@
                       </m:e>
                       <m:sub>
                         <m:r>
-                          <a:rPr lang="en-US" sz="2200" b="0" i="1" smtClean="0">
+                          <a:rPr lang="en-US" sz="1833" i="1">
                             <a:solidFill>
                               <a:schemeClr val="dk1"/>
                             </a:solidFill>
@@ -13651,7 +12956,7 @@
                   </m:oMath>
                 </a14:m>
                 <a:r>
-                  <a:rPr lang="en-US" sz="2200" i="1" dirty="0">
+                  <a:rPr lang="en-US" sz="1833" i="1" dirty="0">
                     <a:solidFill>
                       <a:schemeClr val="dk1"/>
                     </a:solidFill>
@@ -13664,18 +12969,13 @@
                 </a:r>
               </a:p>
               <a:p>
-                <a:pPr marL="0" lvl="0" indent="0" rtl="0">
-                  <a:spcBef>
-                    <a:spcPts val="0"/>
-                  </a:spcBef>
+                <a:pPr>
                   <a:buClr>
                     <a:schemeClr val="dk1"/>
                   </a:buClr>
                   <a:buSzPts val="1100"/>
-                  <a:buFont typeface="Arial"/>
-                  <a:buNone/>
                 </a:pPr>
-                <a:endParaRPr lang="en-US" sz="2200" i="1" dirty="0">
+                <a:endParaRPr lang="en-US" sz="1833" i="1" dirty="0">
                   <a:solidFill>
                     <a:schemeClr val="dk1"/>
                   </a:solidFill>
@@ -13686,19 +12986,14 @@
                 </a:endParaRPr>
               </a:p>
               <a:p>
-                <a:pPr marL="0" lvl="0" indent="0" rtl="0">
-                  <a:spcBef>
-                    <a:spcPts val="0"/>
-                  </a:spcBef>
+                <a:pPr>
                   <a:buClr>
                     <a:schemeClr val="dk1"/>
                   </a:buClr>
                   <a:buSzPts val="1100"/>
-                  <a:buFont typeface="Arial"/>
-                  <a:buNone/>
                 </a:pPr>
                 <a:r>
-                  <a:rPr lang="en-US" sz="2200" i="1" u="sng" dirty="0">
+                  <a:rPr lang="en-US" sz="1833" i="1" u="sng" dirty="0">
                     <a:solidFill>
                       <a:schemeClr val="dk1"/>
                     </a:solidFill>
@@ -13710,7 +13005,7 @@
                   <a:t>Right:</a:t>
                 </a:r>
                 <a:r>
-                  <a:rPr lang="en-US" sz="2200" i="1" dirty="0">
+                  <a:rPr lang="en-US" sz="1833" i="1" dirty="0">
                     <a:solidFill>
                       <a:schemeClr val="dk1"/>
                     </a:solidFill>
@@ -13722,7 +13017,7 @@
                   <a:t> Internal components of a BEACO2N sensor, with the </a:t>
                 </a:r>
                 <a:r>
-                  <a:rPr lang="en-US" sz="2200" i="1" dirty="0" err="1">
+                  <a:rPr lang="en-US" sz="1833" i="1" dirty="0" err="1">
                     <a:solidFill>
                       <a:schemeClr val="dk1"/>
                     </a:solidFill>
@@ -13734,7 +13029,7 @@
                   <a:t>Alphasense</a:t>
                 </a:r>
                 <a:r>
-                  <a:rPr lang="en-US" sz="2200" i="1" dirty="0">
+                  <a:rPr lang="en-US" sz="1833" i="1" dirty="0">
                     <a:solidFill>
                       <a:schemeClr val="dk1"/>
                     </a:solidFill>
@@ -13745,7 +13040,7 @@
                   </a:rPr>
                   <a:t> CO-B4 sensor emphasized.</a:t>
                 </a:r>
-                <a:endParaRPr lang="en-US" sz="2200" i="1" u="sng" dirty="0">
+                <a:endParaRPr lang="en-US" sz="1833" i="1" u="sng" dirty="0">
                   <a:solidFill>
                     <a:schemeClr val="dk1"/>
                   </a:solidFill>
@@ -13775,16 +13070,16 @@
             </p:nvSpPr>
             <p:spPr>
               <a:xfrm>
-                <a:off x="11069728" y="21835937"/>
-                <a:ext cx="3486063" cy="3570178"/>
+                <a:off x="9224772" y="18571789"/>
+                <a:ext cx="2905053" cy="3256573"/>
               </a:xfrm>
               <a:prstGeom prst="rect">
                 <a:avLst/>
               </a:prstGeom>
               <a:blipFill>
-                <a:blip r:embed="rId18"/>
+                <a:blip r:embed="rId7"/>
                 <a:stretch>
-                  <a:fillRect l="-2273" r="-3322" b="-1195"/>
+                  <a:fillRect l="-2609" r="-3043" b="-1167"/>
                 </a:stretch>
               </a:blipFill>
               <a:ln>
@@ -13806,6 +13101,156 @@
           </p:sp>
         </mc:Fallback>
       </mc:AlternateContent>
+      <p:pic>
+        <p:nvPicPr>
+          <p:cNvPr id="3" name="Picture 2">
+            <a:extLst>
+              <a:ext uri="{FF2B5EF4-FFF2-40B4-BE49-F238E27FC236}">
+                <a16:creationId xmlns:a16="http://schemas.microsoft.com/office/drawing/2014/main" id="{5F1A3734-7B76-DF7C-A51F-D941E769D17C}"/>
+              </a:ext>
+            </a:extLst>
+          </p:cNvPr>
+          <p:cNvPicPr>
+            <a:picLocks noChangeAspect="1"/>
+          </p:cNvPicPr>
+          <p:nvPr/>
+        </p:nvPicPr>
+        <p:blipFill>
+          <a:blip r:embed="rId8"/>
+          <a:stretch>
+            <a:fillRect/>
+          </a:stretch>
+        </p:blipFill>
+        <p:spPr>
+          <a:xfrm>
+            <a:off x="13746599" y="5990396"/>
+            <a:ext cx="3940965" cy="5097765"/>
+          </a:xfrm>
+          <a:prstGeom prst="rect">
+            <a:avLst/>
+          </a:prstGeom>
+        </p:spPr>
+      </p:pic>
+      <p:pic>
+        <p:nvPicPr>
+          <p:cNvPr id="6" name="Picture 5">
+            <a:extLst>
+              <a:ext uri="{FF2B5EF4-FFF2-40B4-BE49-F238E27FC236}">
+                <a16:creationId xmlns:a16="http://schemas.microsoft.com/office/drawing/2014/main" id="{DACE48DF-A28B-B6B8-0A28-5E129C4B7516}"/>
+              </a:ext>
+            </a:extLst>
+          </p:cNvPr>
+          <p:cNvPicPr>
+            <a:picLocks noChangeAspect="1"/>
+          </p:cNvPicPr>
+          <p:nvPr/>
+        </p:nvPicPr>
+        <p:blipFill>
+          <a:blip r:embed="rId9"/>
+          <a:stretch>
+            <a:fillRect/>
+          </a:stretch>
+        </p:blipFill>
+        <p:spPr>
+          <a:xfrm>
+            <a:off x="18882309" y="5989243"/>
+            <a:ext cx="3940963" cy="5100072"/>
+          </a:xfrm>
+          <a:prstGeom prst="rect">
+            <a:avLst/>
+          </a:prstGeom>
+        </p:spPr>
+      </p:pic>
+      <p:pic>
+        <p:nvPicPr>
+          <p:cNvPr id="9" name="Picture 8">
+            <a:extLst>
+              <a:ext uri="{FF2B5EF4-FFF2-40B4-BE49-F238E27FC236}">
+                <a16:creationId xmlns:a16="http://schemas.microsoft.com/office/drawing/2014/main" id="{8A4DE4E6-5449-8A6A-2AD3-CDF683E2A72C}"/>
+              </a:ext>
+            </a:extLst>
+          </p:cNvPr>
+          <p:cNvPicPr>
+            <a:picLocks noChangeAspect="1"/>
+          </p:cNvPicPr>
+          <p:nvPr/>
+        </p:nvPicPr>
+        <p:blipFill>
+          <a:blip r:embed="rId10"/>
+          <a:stretch>
+            <a:fillRect/>
+          </a:stretch>
+        </p:blipFill>
+        <p:spPr>
+          <a:xfrm>
+            <a:off x="30256681" y="19474796"/>
+            <a:ext cx="5137729" cy="3669806"/>
+          </a:xfrm>
+          <a:prstGeom prst="rect">
+            <a:avLst/>
+          </a:prstGeom>
+        </p:spPr>
+      </p:pic>
+      <p:pic>
+        <p:nvPicPr>
+          <p:cNvPr id="10" name="Picture 9">
+            <a:extLst>
+              <a:ext uri="{FF2B5EF4-FFF2-40B4-BE49-F238E27FC236}">
+                <a16:creationId xmlns:a16="http://schemas.microsoft.com/office/drawing/2014/main" id="{A3465C22-BC17-BEE3-8D63-AB904E9E2A60}"/>
+              </a:ext>
+            </a:extLst>
+          </p:cNvPr>
+          <p:cNvPicPr>
+            <a:picLocks noChangeAspect="1"/>
+          </p:cNvPicPr>
+          <p:nvPr/>
+        </p:nvPicPr>
+        <p:blipFill>
+          <a:blip r:embed="rId11"/>
+          <a:stretch>
+            <a:fillRect/>
+          </a:stretch>
+        </p:blipFill>
+        <p:spPr>
+          <a:xfrm>
+            <a:off x="13262702" y="11328254"/>
+            <a:ext cx="4535272" cy="3239479"/>
+          </a:xfrm>
+          <a:prstGeom prst="rect">
+            <a:avLst/>
+          </a:prstGeom>
+        </p:spPr>
+      </p:pic>
+      <p:pic>
+        <p:nvPicPr>
+          <p:cNvPr id="14" name="Picture 13">
+            <a:extLst>
+              <a:ext uri="{FF2B5EF4-FFF2-40B4-BE49-F238E27FC236}">
+                <a16:creationId xmlns:a16="http://schemas.microsoft.com/office/drawing/2014/main" id="{394A25AD-E86D-FFD4-A07A-6DEFA2B24203}"/>
+              </a:ext>
+            </a:extLst>
+          </p:cNvPr>
+          <p:cNvPicPr>
+            <a:picLocks noChangeAspect="1"/>
+          </p:cNvPicPr>
+          <p:nvPr/>
+        </p:nvPicPr>
+        <p:blipFill>
+          <a:blip r:embed="rId12"/>
+          <a:stretch>
+            <a:fillRect/>
+          </a:stretch>
+        </p:blipFill>
+        <p:spPr>
+          <a:xfrm>
+            <a:off x="18882309" y="11328254"/>
+            <a:ext cx="4535272" cy="3239479"/>
+          </a:xfrm>
+          <a:prstGeom prst="rect">
+            <a:avLst/>
+          </a:prstGeom>
+        </p:spPr>
+      </p:pic>
     </p:spTree>
   </p:cSld>
   <p:clrMapOvr>

--- a/Poster_draft_7-30-25.pptx
+++ b/Poster_draft_7-30-25.pptx
@@ -11350,55 +11350,6 @@
       </p:sp>
       <p:sp>
         <p:nvSpPr>
-          <p:cNvPr id="89" name="Google Shape;89;p13"/>
-          <p:cNvSpPr txBox="1"/>
-          <p:nvPr/>
-        </p:nvSpPr>
-        <p:spPr>
-          <a:xfrm>
-            <a:off x="762000" y="4572000"/>
-            <a:ext cx="11430000" cy="762000"/>
-          </a:xfrm>
-          <a:prstGeom prst="rect">
-            <a:avLst/>
-          </a:prstGeom>
-          <a:noFill/>
-          <a:ln>
-            <a:noFill/>
-          </a:ln>
-        </p:spPr>
-        <p:txBody>
-          <a:bodyPr spcFirstLastPara="1" wrap="square" lIns="76188" tIns="76200" rIns="76188" bIns="76200" anchor="t" anchorCtr="0">
-            <a:noAutofit/>
-          </a:bodyPr>
-          <a:lstStyle/>
-          <a:p>
-            <a:r>
-              <a:rPr lang="en-US" sz="4333" b="1" dirty="0">
-                <a:solidFill>
-                  <a:srgbClr val="595959"/>
-                </a:solidFill>
-                <a:latin typeface="Calibri"/>
-                <a:ea typeface="Calibri"/>
-                <a:cs typeface="Calibri"/>
-                <a:sym typeface="Calibri"/>
-              </a:rPr>
-              <a:t>ABSTRACT</a:t>
-            </a:r>
-            <a:endParaRPr sz="4333" dirty="0">
-              <a:solidFill>
-                <a:srgbClr val="595959"/>
-              </a:solidFill>
-              <a:latin typeface="Calibri"/>
-              <a:ea typeface="Calibri"/>
-              <a:cs typeface="Calibri"/>
-              <a:sym typeface="Calibri"/>
-            </a:endParaRPr>
-          </a:p>
-        </p:txBody>
-      </p:sp>
-      <p:sp>
-        <p:nvSpPr>
           <p:cNvPr id="90" name="Google Shape;90;p13"/>
           <p:cNvSpPr txBox="1"/>
           <p:nvPr/>
@@ -11455,159 +11406,14 @@
       </p:sp>
       <p:sp>
         <p:nvSpPr>
-          <p:cNvPr id="91" name="Google Shape;91;p13"/>
-          <p:cNvSpPr txBox="1"/>
-          <p:nvPr/>
-        </p:nvSpPr>
-        <p:spPr>
-          <a:xfrm>
-            <a:off x="24422883" y="19850647"/>
-            <a:ext cx="5496869" cy="2202687"/>
-          </a:xfrm>
-          <a:prstGeom prst="rect">
-            <a:avLst/>
-          </a:prstGeom>
-          <a:noFill/>
-          <a:ln>
-            <a:noFill/>
-          </a:ln>
-        </p:spPr>
-        <p:txBody>
-          <a:bodyPr spcFirstLastPara="1" wrap="square" lIns="76188" tIns="38083" rIns="76188" bIns="38083" anchor="t" anchorCtr="0">
-            <a:noAutofit/>
-          </a:bodyPr>
-          <a:lstStyle/>
-          <a:p>
-            <a:r>
-              <a:rPr lang="en-US" sz="4333" b="1" dirty="0">
-                <a:solidFill>
-                  <a:srgbClr val="595959"/>
-                </a:solidFill>
-                <a:latin typeface="Calibri"/>
-                <a:ea typeface="Calibri"/>
-                <a:cs typeface="Calibri"/>
-                <a:sym typeface="Calibri"/>
-              </a:rPr>
-              <a:t>CONCLUSIONS </a:t>
-            </a:r>
-            <a:br>
-              <a:rPr lang="en-US" sz="4333" b="1" dirty="0">
-                <a:solidFill>
-                  <a:srgbClr val="595959"/>
-                </a:solidFill>
-                <a:latin typeface="Calibri"/>
-                <a:ea typeface="Calibri"/>
-                <a:cs typeface="Calibri"/>
-                <a:sym typeface="Calibri"/>
-              </a:rPr>
-            </a:br>
-            <a:r>
-              <a:rPr lang="en-US" sz="4333" b="1" dirty="0">
-                <a:solidFill>
-                  <a:srgbClr val="595959"/>
-                </a:solidFill>
-                <a:latin typeface="Calibri"/>
-                <a:ea typeface="Calibri"/>
-                <a:cs typeface="Calibri"/>
-                <a:sym typeface="Calibri"/>
-              </a:rPr>
-              <a:t>AND FURTHER </a:t>
-            </a:r>
-            <a:br>
-              <a:rPr lang="en-US" sz="4333" b="1" dirty="0">
-                <a:solidFill>
-                  <a:srgbClr val="595959"/>
-                </a:solidFill>
-                <a:latin typeface="Calibri"/>
-                <a:ea typeface="Calibri"/>
-                <a:cs typeface="Calibri"/>
-                <a:sym typeface="Calibri"/>
-              </a:rPr>
-            </a:br>
-            <a:r>
-              <a:rPr lang="en-US" sz="4333" b="1" dirty="0">
-                <a:solidFill>
-                  <a:srgbClr val="595959"/>
-                </a:solidFill>
-                <a:latin typeface="Calibri"/>
-                <a:ea typeface="Calibri"/>
-                <a:cs typeface="Calibri"/>
-                <a:sym typeface="Calibri"/>
-              </a:rPr>
-              <a:t>RESEARCH</a:t>
-            </a:r>
-            <a:endParaRPr sz="4333" dirty="0">
-              <a:solidFill>
-                <a:srgbClr val="595959"/>
-              </a:solidFill>
-              <a:latin typeface="Calibri"/>
-              <a:ea typeface="Calibri"/>
-              <a:cs typeface="Calibri"/>
-              <a:sym typeface="Calibri"/>
-            </a:endParaRPr>
-          </a:p>
-        </p:txBody>
-      </p:sp>
-      <p:sp>
-        <p:nvSpPr>
-          <p:cNvPr id="92" name="Google Shape;92;p13"/>
-          <p:cNvSpPr txBox="1"/>
-          <p:nvPr/>
-        </p:nvSpPr>
-        <p:spPr>
-          <a:xfrm>
-            <a:off x="24135688" y="22053334"/>
-            <a:ext cx="11449000" cy="961777"/>
-          </a:xfrm>
-          <a:prstGeom prst="rect">
-            <a:avLst/>
-          </a:prstGeom>
-          <a:noFill/>
-          <a:ln>
-            <a:noFill/>
-          </a:ln>
-        </p:spPr>
-        <p:txBody>
-          <a:bodyPr spcFirstLastPara="1" wrap="square" lIns="381000" tIns="228583" rIns="381000" bIns="304792" anchor="t" anchorCtr="0">
-            <a:spAutoFit/>
-          </a:bodyPr>
-          <a:lstStyle/>
-          <a:p>
-            <a:pPr algn="just"/>
-            <a:r>
-              <a:rPr lang="en-US" sz="2750" dirty="0">
-                <a:solidFill>
-                  <a:schemeClr val="dk1"/>
-                </a:solidFill>
-                <a:latin typeface="Calibri"/>
-                <a:ea typeface="Calibri"/>
-                <a:cs typeface="Calibri"/>
-                <a:sym typeface="Calibri"/>
-              </a:rPr>
-              <a:t>[TEXT HERE]</a:t>
-            </a:r>
-            <a:endParaRPr sz="2750" dirty="0">
-              <a:solidFill>
-                <a:schemeClr val="dk1"/>
-              </a:solidFill>
-              <a:latin typeface="Calibri"/>
-              <a:ea typeface="Calibri"/>
-              <a:cs typeface="Calibri"/>
-              <a:sym typeface="Calibri"/>
-            </a:endParaRPr>
-          </a:p>
-        </p:txBody>
-      </p:sp>
-      <p:sp>
-        <p:nvSpPr>
           <p:cNvPr id="93" name="Google Shape;93;p13"/>
           <p:cNvSpPr txBox="1"/>
           <p:nvPr/>
         </p:nvSpPr>
         <p:spPr>
           <a:xfrm>
-            <a:off x="24058472" y="24280243"/>
-            <a:ext cx="8032000" cy="1423441"/>
+            <a:off x="12475141" y="23698499"/>
+            <a:ext cx="11430000" cy="3139296"/>
           </a:xfrm>
           <a:prstGeom prst="rect">
             <a:avLst/>
@@ -11624,18 +11430,18 @@
           <a:lstStyle/>
           <a:p>
             <a:r>
-              <a:rPr lang="en-US" sz="3417" b="1" i="1" dirty="0">
+              <a:rPr lang="en-US" sz="2800" b="1" dirty="0">
                 <a:solidFill>
-                  <a:srgbClr val="A0B7C1"/>
+                  <a:srgbClr val="595959"/>
                 </a:solidFill>
                 <a:latin typeface="Calibri"/>
                 <a:ea typeface="Calibri"/>
                 <a:cs typeface="Calibri"/>
                 <a:sym typeface="Calibri"/>
               </a:rPr>
-              <a:t>ACKNOWLEDGMENTS</a:t>
+              <a:t>ACKNOWLEDGEMENTS</a:t>
             </a:r>
-            <a:endParaRPr sz="1417" dirty="0">
+            <a:endParaRPr sz="2800" dirty="0">
               <a:solidFill>
                 <a:srgbClr val="A0B7C1"/>
               </a:solidFill>
@@ -11646,9 +11452,13 @@
             </a:endParaRPr>
           </a:p>
           <a:p>
-            <a:pPr algn="just"/>
+            <a:pPr algn="just">
+              <a:spcAft>
+                <a:spcPts val="600"/>
+              </a:spcAft>
+            </a:pPr>
             <a:r>
-              <a:rPr lang="en-US" sz="2333" i="1" dirty="0">
+              <a:rPr lang="en-US" sz="1800" i="1" dirty="0">
                 <a:solidFill>
                   <a:schemeClr val="dk1"/>
                 </a:solidFill>
@@ -11657,15 +11467,164 @@
                 <a:cs typeface="Calibri"/>
                 <a:sym typeface="Calibri"/>
               </a:rPr>
-              <a:t>[TEXT HERE]</a:t>
+              <a:t>I am sincerely grateful to Professor Meredith Hastings for the opportunity to contribute to the Breathe Providence Project and for her insightful guidance and support. I also acknowledge the BEACO2N team at the University of California Berkeley, whose research on low-cost air quality monitor performance provided inspiration for this work.</a:t>
             </a:r>
-            <a:endParaRPr sz="2417" b="1" i="1" dirty="0">
+          </a:p>
+          <a:p>
+            <a:pPr marL="0" marR="0" lvl="0" indent="0" algn="l" defTabSz="914400" rtl="0" eaLnBrk="1" fontAlgn="auto" latinLnBrk="0" hangingPunct="1">
+              <a:lnSpc>
+                <a:spcPct val="100000"/>
+              </a:lnSpc>
+              <a:spcBef>
+                <a:spcPts val="0"/>
+              </a:spcBef>
+              <a:spcAft>
+                <a:spcPts val="0"/>
+              </a:spcAft>
+              <a:buClr>
+                <a:srgbClr val="000000"/>
+              </a:buClr>
+              <a:buSzTx/>
+              <a:buFont typeface="Arial"/>
+              <a:buNone/>
+              <a:tabLst/>
+              <a:defRPr/>
+            </a:pPr>
+            <a:r>
+              <a:rPr kumimoji="0" lang="en-US" sz="2800" b="1" i="0" u="none" strike="noStrike" kern="0" cap="none" spc="0" normalizeH="0" baseline="0" noProof="0" dirty="0">
+                <a:ln>
+                  <a:noFill/>
+                </a:ln>
+                <a:solidFill>
+                  <a:srgbClr val="595959"/>
+                </a:solidFill>
+                <a:effectLst/>
+                <a:uLnTx/>
+                <a:uFillTx/>
+                <a:latin typeface="Calibri"/>
+                <a:ea typeface="Calibri"/>
+                <a:cs typeface="Calibri"/>
+                <a:sym typeface="Calibri"/>
+              </a:rPr>
+              <a:t>REFERENCES</a:t>
+            </a:r>
+          </a:p>
+          <a:p>
+            <a:r>
+              <a:rPr lang="en-US" sz="1800" dirty="0">
+                <a:solidFill>
+                  <a:schemeClr val="dk1"/>
+                </a:solidFill>
+                <a:latin typeface="Calibri" panose="020F0502020204030204" pitchFamily="34" charset="0"/>
+                <a:ea typeface="Calibri" panose="020F0502020204030204" pitchFamily="34" charset="0"/>
+                <a:cs typeface="Calibri" panose="020F0502020204030204" pitchFamily="34" charset="0"/>
+                <a:sym typeface="Calibri"/>
+              </a:rPr>
+              <a:t>[1] </a:t>
+            </a:r>
+            <a:r>
+              <a:rPr lang="en-US" sz="1800" b="1" dirty="0">
+                <a:latin typeface="Calibri" panose="020F0502020204030204" pitchFamily="34" charset="0"/>
+                <a:ea typeface="Calibri" panose="020F0502020204030204" pitchFamily="34" charset="0"/>
+                <a:cs typeface="Calibri" panose="020F0502020204030204" pitchFamily="34" charset="0"/>
+              </a:rPr>
+              <a:t>Sustained Performance of Low-Cost Air Quality Sensors in Long-Term Deployments. </a:t>
+            </a:r>
+            <a:r>
+              <a:rPr lang="en-US" sz="1800" dirty="0">
+                <a:latin typeface="Calibri" panose="020F0502020204030204" pitchFamily="34" charset="0"/>
+                <a:ea typeface="Calibri" panose="020F0502020204030204" pitchFamily="34" charset="0"/>
+                <a:cs typeface="Calibri" panose="020F0502020204030204" pitchFamily="34" charset="0"/>
+              </a:rPr>
+              <a:t>Anna R. Winter, </a:t>
+            </a:r>
+            <a:r>
+              <a:rPr lang="en-US" sz="1800" dirty="0" err="1">
+                <a:latin typeface="Calibri" panose="020F0502020204030204" pitchFamily="34" charset="0"/>
+                <a:ea typeface="Calibri" panose="020F0502020204030204" pitchFamily="34" charset="0"/>
+                <a:cs typeface="Calibri" panose="020F0502020204030204" pitchFamily="34" charset="0"/>
+              </a:rPr>
+              <a:t>Yishu</a:t>
+            </a:r>
+            <a:r>
+              <a:rPr lang="en-US" sz="1800" dirty="0">
+                <a:latin typeface="Calibri" panose="020F0502020204030204" pitchFamily="34" charset="0"/>
+                <a:ea typeface="Calibri" panose="020F0502020204030204" pitchFamily="34" charset="0"/>
+                <a:cs typeface="Calibri" panose="020F0502020204030204" pitchFamily="34" charset="0"/>
+              </a:rPr>
+              <a:t> Zhu, Naomi G. </a:t>
+            </a:r>
+            <a:r>
+              <a:rPr lang="en-US" sz="1800" dirty="0" err="1">
+                <a:latin typeface="Calibri" panose="020F0502020204030204" pitchFamily="34" charset="0"/>
+                <a:ea typeface="Calibri" panose="020F0502020204030204" pitchFamily="34" charset="0"/>
+                <a:cs typeface="Calibri" panose="020F0502020204030204" pitchFamily="34" charset="0"/>
+              </a:rPr>
+              <a:t>Asimow</a:t>
+            </a:r>
+            <a:r>
+              <a:rPr lang="en-US" sz="1800" dirty="0">
+                <a:latin typeface="Calibri" panose="020F0502020204030204" pitchFamily="34" charset="0"/>
+                <a:ea typeface="Calibri" panose="020F0502020204030204" pitchFamily="34" charset="0"/>
+                <a:cs typeface="Calibri" panose="020F0502020204030204" pitchFamily="34" charset="0"/>
+              </a:rPr>
+              <a:t>, Milan Y. Patel, and Ronald C. Cohen. </a:t>
+            </a:r>
+            <a:r>
+              <a:rPr lang="en-US" sz="1800" i="1" dirty="0">
+                <a:latin typeface="Calibri" panose="020F0502020204030204" pitchFamily="34" charset="0"/>
+                <a:ea typeface="Calibri" panose="020F0502020204030204" pitchFamily="34" charset="0"/>
+                <a:cs typeface="Calibri" panose="020F0502020204030204" pitchFamily="34" charset="0"/>
+              </a:rPr>
+              <a:t>ACS Sensors</a:t>
+            </a:r>
+            <a:r>
+              <a:rPr lang="en-US" sz="1800" dirty="0">
+                <a:latin typeface="Calibri" panose="020F0502020204030204" pitchFamily="34" charset="0"/>
+                <a:ea typeface="Calibri" panose="020F0502020204030204" pitchFamily="34" charset="0"/>
+                <a:cs typeface="Calibri" panose="020F0502020204030204" pitchFamily="34" charset="0"/>
+              </a:rPr>
+              <a:t> </a:t>
+            </a:r>
+            <a:r>
+              <a:rPr lang="en-US" sz="1800" b="1" dirty="0">
+                <a:latin typeface="Calibri" panose="020F0502020204030204" pitchFamily="34" charset="0"/>
+                <a:ea typeface="Calibri" panose="020F0502020204030204" pitchFamily="34" charset="0"/>
+                <a:cs typeface="Calibri" panose="020F0502020204030204" pitchFamily="34" charset="0"/>
+              </a:rPr>
+              <a:t>2025</a:t>
+            </a:r>
+            <a:r>
+              <a:rPr lang="en-US" sz="1800" dirty="0">
+                <a:latin typeface="Calibri" panose="020F0502020204030204" pitchFamily="34" charset="0"/>
+                <a:ea typeface="Calibri" panose="020F0502020204030204" pitchFamily="34" charset="0"/>
+                <a:cs typeface="Calibri" panose="020F0502020204030204" pitchFamily="34" charset="0"/>
+              </a:rPr>
+              <a:t> </a:t>
+            </a:r>
+            <a:r>
+              <a:rPr lang="en-US" sz="1800" i="1" dirty="0">
+                <a:latin typeface="Calibri" panose="020F0502020204030204" pitchFamily="34" charset="0"/>
+                <a:ea typeface="Calibri" panose="020F0502020204030204" pitchFamily="34" charset="0"/>
+                <a:cs typeface="Calibri" panose="020F0502020204030204" pitchFamily="34" charset="0"/>
+              </a:rPr>
+              <a:t>10</a:t>
+            </a:r>
+            <a:r>
+              <a:rPr lang="en-US" sz="1800" dirty="0">
+                <a:latin typeface="Calibri" panose="020F0502020204030204" pitchFamily="34" charset="0"/>
+                <a:ea typeface="Calibri" panose="020F0502020204030204" pitchFamily="34" charset="0"/>
+                <a:cs typeface="Calibri" panose="020F0502020204030204" pitchFamily="34" charset="0"/>
+              </a:rPr>
+              <a:t> (6), 4329-4335. DOI: 10.1021/acssensors.5c00566 </a:t>
+            </a:r>
+            <a:endParaRPr lang="en-US" sz="1800" i="1" dirty="0">
               <a:solidFill>
                 <a:schemeClr val="dk1"/>
               </a:solidFill>
-              <a:latin typeface="Calibri"/>
-              <a:ea typeface="Calibri"/>
-              <a:cs typeface="Calibri"/>
+              <a:latin typeface="Calibri" panose="020F0502020204030204" pitchFamily="34" charset="0"/>
+              <a:ea typeface="Calibri" panose="020F0502020204030204" pitchFamily="34" charset="0"/>
+              <a:cs typeface="Calibri" panose="020F0502020204030204" pitchFamily="34" charset="0"/>
               <a:sym typeface="Calibri"/>
             </a:endParaRPr>
           </a:p>
@@ -11845,108 +11804,289 @@
           </a:ln>
         </p:spPr>
       </p:pic>
-      <p:sp>
-        <p:nvSpPr>
-          <p:cNvPr id="98" name="Google Shape;98;p13"/>
-          <p:cNvSpPr txBox="1"/>
-          <p:nvPr/>
-        </p:nvSpPr>
-        <p:spPr>
-          <a:xfrm>
-            <a:off x="762000" y="5257800"/>
-            <a:ext cx="11430000" cy="13106152"/>
-          </a:xfrm>
-          <a:prstGeom prst="rect">
-            <a:avLst/>
-          </a:prstGeom>
-          <a:noFill/>
-          <a:ln>
-            <a:noFill/>
-          </a:ln>
-        </p:spPr>
-        <p:txBody>
-          <a:bodyPr spcFirstLastPara="1" wrap="square" lIns="76200" tIns="76200" rIns="76200" bIns="76200" anchor="t" anchorCtr="0">
-            <a:spAutoFit/>
-          </a:bodyPr>
-          <a:lstStyle/>
-          <a:p>
-            <a:pPr algn="just">
-              <a:spcAft>
-                <a:spcPts val="1000"/>
-              </a:spcAft>
-              <a:buClr>
-                <a:schemeClr val="dk1"/>
-              </a:buClr>
-              <a:buSzPts val="1100"/>
-            </a:pPr>
-            <a:r>
-              <a:rPr lang="en-US" sz="2750" dirty="0">
-                <a:latin typeface="Calibri"/>
-                <a:ea typeface="Calibri"/>
-                <a:cs typeface="Calibri"/>
-                <a:sym typeface="Calibri"/>
-              </a:rPr>
-              <a:t>Low-cost sensors for measuring common air pollutants have made urban air quality research possible at high spatial and temporal resolution. This high-resolution data can be used to identify air quality events and trends at scales that are impractical for expensive reference-grade instruments to measure, however calibration of low-cost sensors remains challenging. Sensor applications in large distributed air quality monitoring networks further complicate calibration needs – laboratory calibration has been shown to translate poorly after sensor deployment and requires downtime for every sensor in the network, and in situ gas calibration requires frequent site visits to account for seasonal interferences to sensor measurements. </a:t>
-            </a:r>
-            <a:r>
-              <a:rPr lang="en-US" sz="2750" dirty="0" err="1">
-                <a:latin typeface="Calibri"/>
-                <a:ea typeface="Calibri"/>
-                <a:cs typeface="Calibri"/>
-                <a:sym typeface="Calibri"/>
-              </a:rPr>
-              <a:t>Alphasense</a:t>
-            </a:r>
-            <a:r>
-              <a:rPr lang="en-US" sz="2750" dirty="0">
-                <a:latin typeface="Calibri"/>
-                <a:ea typeface="Calibri"/>
-                <a:cs typeface="Calibri"/>
-                <a:sym typeface="Calibri"/>
-              </a:rPr>
-              <a:t> electrochemical gas sensors are also known to be cross-sensitive to temperature and relative humidity, which are seasonally-dependent and can cause poor sensor performance, especially in summer months, and induce drift over time.</a:t>
-            </a:r>
-          </a:p>
-          <a:p>
-            <a:pPr algn="just">
-              <a:spcAft>
-                <a:spcPts val="1000"/>
-              </a:spcAft>
-              <a:buClr>
-                <a:schemeClr val="dk1"/>
-              </a:buClr>
-              <a:buSzPts val="1100"/>
-            </a:pPr>
-            <a:r>
-              <a:rPr lang="en-US" sz="2750" dirty="0">
-                <a:latin typeface="Calibri"/>
-                <a:ea typeface="Calibri"/>
-                <a:cs typeface="Calibri"/>
-                <a:sym typeface="Calibri"/>
-              </a:rPr>
-              <a:t>This project seeks to characterize the reliability of carbon monoxide sensors in the Breathe Providence air quality monitoring network using distributed methods. Existing methods rely extensively on simultaneous reference observations and residual statistics, however availability of reference data from Environmental Protection Agency monitoring stations is limited in the City of Providence. Therefore, in addition to calculating residual statistics, the probability density function (PDF) of measurement and reference observations is approximated for each month since sensor deployment. When reference‑grade observations are not available, the first operating year of sensor data is treated as reference. </a:t>
-            </a:r>
-            <a:r>
-              <a:rPr lang="en-US" sz="2750" i="1" dirty="0">
-                <a:latin typeface="Calibri"/>
-                <a:ea typeface="Calibri"/>
-                <a:cs typeface="Calibri"/>
-                <a:sym typeface="Calibri"/>
-              </a:rPr>
-              <a:t>F</a:t>
-            </a:r>
-            <a:r>
-              <a:rPr lang="en-US" sz="2750" dirty="0">
-                <a:latin typeface="Calibri"/>
-                <a:ea typeface="Calibri"/>
-                <a:cs typeface="Calibri"/>
-                <a:sym typeface="Calibri"/>
-              </a:rPr>
-              <a:t>-Divergences of reference and measurement distributions are then calculated and interpreted as an indication of drift. Since low-cost gas sensors are thought to be unreliable at high temperature or relative humidity values, we compare residual correlation and PDF divergence with and without a meteorological filter which excludes observations at Temp &gt; 30°C and RH &gt; 0.75. This method is applied to a sensor with published reliability statistics as a control experiment.</a:t>
-            </a:r>
-          </a:p>
-        </p:txBody>
-      </p:sp>
+      <mc:AlternateContent xmlns:mc="http://schemas.openxmlformats.org/markup-compatibility/2006">
+        <mc:Choice xmlns:a14="http://schemas.microsoft.com/office/drawing/2010/main" Requires="a14">
+          <p:sp>
+            <p:nvSpPr>
+              <p:cNvPr id="98" name="Google Shape;98;p13"/>
+              <p:cNvSpPr txBox="1"/>
+              <p:nvPr/>
+            </p:nvSpPr>
+            <p:spPr>
+              <a:xfrm>
+                <a:off x="768813" y="4871735"/>
+                <a:ext cx="11430000" cy="13608790"/>
+              </a:xfrm>
+              <a:prstGeom prst="rect">
+                <a:avLst/>
+              </a:prstGeom>
+              <a:noFill/>
+              <a:ln>
+                <a:noFill/>
+              </a:ln>
+            </p:spPr>
+            <p:txBody>
+              <a:bodyPr spcFirstLastPara="1" wrap="square" lIns="76200" tIns="76200" rIns="76200" bIns="76200" anchor="t" anchorCtr="0">
+                <a:spAutoFit/>
+              </a:bodyPr>
+              <a:lstStyle/>
+              <a:p>
+                <a:pPr algn="just">
+                  <a:spcAft>
+                    <a:spcPts val="1000"/>
+                  </a:spcAft>
+                  <a:buClr>
+                    <a:schemeClr val="dk1"/>
+                  </a:buClr>
+                  <a:buSzPts val="1100"/>
+                </a:pPr>
+                <a:r>
+                  <a:rPr kumimoji="0" lang="en-US" sz="4333" b="1" i="0" u="none" strike="noStrike" kern="0" cap="none" spc="0" normalizeH="0" baseline="0" noProof="0" dirty="0">
+                    <a:ln>
+                      <a:noFill/>
+                    </a:ln>
+                    <a:solidFill>
+                      <a:srgbClr val="595959"/>
+                    </a:solidFill>
+                    <a:effectLst/>
+                    <a:uLnTx/>
+                    <a:uFillTx/>
+                    <a:latin typeface="Calibri"/>
+                    <a:ea typeface="Calibri"/>
+                    <a:cs typeface="Calibri"/>
+                    <a:sym typeface="Calibri"/>
+                  </a:rPr>
+                  <a:t>ABSTRACT</a:t>
+                </a:r>
+                <a:endParaRPr lang="en-US" sz="2600" dirty="0">
+                  <a:latin typeface="Calibri"/>
+                  <a:ea typeface="Calibri"/>
+                  <a:cs typeface="Calibri"/>
+                  <a:sym typeface="Calibri"/>
+                </a:endParaRPr>
+              </a:p>
+              <a:p>
+                <a:pPr algn="just">
+                  <a:spcAft>
+                    <a:spcPts val="1000"/>
+                  </a:spcAft>
+                  <a:buClr>
+                    <a:schemeClr val="dk1"/>
+                  </a:buClr>
+                  <a:buSzPts val="1100"/>
+                </a:pPr>
+                <a:r>
+                  <a:rPr lang="en-US" sz="2600" dirty="0">
+                    <a:latin typeface="Calibri"/>
+                    <a:ea typeface="Calibri"/>
+                    <a:cs typeface="Calibri"/>
+                    <a:sym typeface="Calibri"/>
+                  </a:rPr>
+                  <a:t>Low-cost sensors for measuring common air pollutants have made urban air quality research possible at high spatial and temporal resolution. This high-resolution data can be used to identify air quality events and trends at scales that are impractical for expensive reference-grade instruments to measure, however calibration of low-cost sensors remains challenging. Sensor applications in large distributed air quality monitoring networks further complicate calibration needs – laboratory calibration has been shown to translate poorly after sensor deployment and requires downtime for every sensor in the network, and in situ gas calibration requires frequent site visits to account for seasonal interferences to sensor measurements. </a:t>
+                </a:r>
+                <a:r>
+                  <a:rPr lang="en-US" sz="2600" dirty="0" err="1">
+                    <a:latin typeface="Calibri"/>
+                    <a:ea typeface="Calibri"/>
+                    <a:cs typeface="Calibri"/>
+                    <a:sym typeface="Calibri"/>
+                  </a:rPr>
+                  <a:t>Alphasense</a:t>
+                </a:r>
+                <a:r>
+                  <a:rPr lang="en-US" sz="2600" dirty="0">
+                    <a:latin typeface="Calibri"/>
+                    <a:ea typeface="Calibri"/>
+                    <a:cs typeface="Calibri"/>
+                    <a:sym typeface="Calibri"/>
+                  </a:rPr>
+                  <a:t> electrochemical gas sensors are also known to be cross-sensitive to temperature and relative humidity, which are seasonally-dependent and can cause poor sensor performance, especially in summer months, and induce drift over time.</a:t>
+                </a:r>
+              </a:p>
+              <a:p>
+                <a:pPr algn="just">
+                  <a:spcAft>
+                    <a:spcPts val="1000"/>
+                  </a:spcAft>
+                  <a:buClr>
+                    <a:schemeClr val="dk1"/>
+                  </a:buClr>
+                  <a:buSzPts val="1100"/>
+                </a:pPr>
+                <a:r>
+                  <a:rPr lang="en-US" sz="2600" dirty="0">
+                    <a:latin typeface="Calibri"/>
+                    <a:ea typeface="Calibri"/>
+                    <a:cs typeface="Calibri"/>
+                    <a:sym typeface="Calibri"/>
+                  </a:rPr>
+                  <a:t>This project seeks to characterize the reliability of carbon monoxide sensors in the Breathe Providence air quality monitoring network using distributed methods. The Breathe Providence Network contains twenty-five </a:t>
+                </a:r>
+                <a:r>
+                  <a:rPr lang="en-US" sz="2600" dirty="0">
+                    <a:solidFill>
+                      <a:schemeClr val="dk1"/>
+                    </a:solidFill>
+                    <a:latin typeface="Calibri"/>
+                    <a:ea typeface="Calibri"/>
+                    <a:cs typeface="Calibri"/>
+                    <a:sym typeface="Calibri"/>
+                  </a:rPr>
+                  <a:t>Berkeley Environmental Air-quality and </a:t>
+                </a:r>
+                <a14:m>
+                  <m:oMath xmlns:m="http://schemas.openxmlformats.org/officeDocument/2006/math">
+                    <m:sSub>
+                      <m:sSubPr>
+                        <m:ctrlPr>
+                          <a:rPr lang="en-US" sz="2600">
+                            <a:solidFill>
+                              <a:schemeClr val="dk1"/>
+                            </a:solidFill>
+                            <a:latin typeface="Cambria Math" panose="02040503050406030204" pitchFamily="18" charset="0"/>
+                            <a:ea typeface="Calibri"/>
+                            <a:cs typeface="Calibri"/>
+                            <a:sym typeface="Calibri"/>
+                          </a:rPr>
+                        </m:ctrlPr>
+                      </m:sSubPr>
+                      <m:e>
+                        <m:r>
+                          <m:rPr>
+                            <m:nor/>
+                          </m:rPr>
+                          <a:rPr lang="en-US" sz="2600">
+                            <a:solidFill>
+                              <a:schemeClr val="dk1"/>
+                            </a:solidFill>
+                            <a:latin typeface="Cambria Math" panose="02040503050406030204" pitchFamily="18" charset="0"/>
+                            <a:ea typeface="Calibri"/>
+                            <a:cs typeface="Calibri"/>
+                            <a:sym typeface="Calibri"/>
+                          </a:rPr>
+                          <m:t>CO</m:t>
+                        </m:r>
+                      </m:e>
+                      <m:sub>
+                        <m:r>
+                          <a:rPr lang="en-US" sz="2600" i="0">
+                            <a:solidFill>
+                              <a:schemeClr val="dk1"/>
+                            </a:solidFill>
+                            <a:latin typeface="Cambria Math" panose="02040503050406030204" pitchFamily="18" charset="0"/>
+                            <a:ea typeface="Calibri"/>
+                            <a:cs typeface="Calibri"/>
+                            <a:sym typeface="Calibri"/>
+                          </a:rPr>
+                          <m:t>2</m:t>
+                        </m:r>
+                      </m:sub>
+                    </m:sSub>
+                  </m:oMath>
+                </a14:m>
+                <a:r>
+                  <a:rPr lang="en-US" sz="2600" dirty="0">
+                    <a:solidFill>
+                      <a:schemeClr val="dk1"/>
+                    </a:solidFill>
+                    <a:latin typeface="Calibri"/>
+                    <a:ea typeface="Calibri"/>
+                    <a:cs typeface="Calibri"/>
+                    <a:sym typeface="Calibri"/>
+                  </a:rPr>
+                  <a:t> Network (BEACO2N) </a:t>
+                </a:r>
+                <a:r>
+                  <a:rPr lang="en-US" sz="2600" dirty="0">
+                    <a:latin typeface="Calibri"/>
+                    <a:ea typeface="Calibri"/>
+                    <a:cs typeface="Calibri"/>
+                    <a:sym typeface="Calibri"/>
+                  </a:rPr>
+                  <a:t>monitoring stations, which in turn each contain an </a:t>
+                </a:r>
+                <a:r>
+                  <a:rPr lang="en-US" sz="2600" dirty="0" err="1">
+                    <a:latin typeface="Calibri"/>
+                    <a:ea typeface="Calibri"/>
+                    <a:cs typeface="Calibri"/>
+                    <a:sym typeface="Calibri"/>
+                  </a:rPr>
+                  <a:t>Alphasense</a:t>
+                </a:r>
+                <a:r>
+                  <a:rPr lang="en-US" sz="2600" dirty="0">
+                    <a:latin typeface="Calibri"/>
+                    <a:ea typeface="Calibri"/>
+                    <a:cs typeface="Calibri"/>
+                    <a:sym typeface="Calibri"/>
+                  </a:rPr>
+                  <a:t> CO-B4 electrochemical carbon monoxide sensor. Existing methods for characterizing the reliability of these low-cost sensors rely extensively on simultaneous reference observations and residual statistics, however availability of reference data from Environmental Protection Agency monitoring stations is limited in the City of Providence. Therefore, in addition to calculating residual statistics, the probability density function (PDF) of measurement and reference observations is approximated for each month since sensor deployment. When reference‑grade observations are not available, sensor data from the first year of sensor deployment is treated as reference. </a:t>
+                </a:r>
+                <a:r>
+                  <a:rPr lang="en-US" sz="2600" i="1" dirty="0">
+                    <a:latin typeface="Calibri"/>
+                    <a:ea typeface="Calibri"/>
+                    <a:cs typeface="Calibri"/>
+                    <a:sym typeface="Calibri"/>
+                  </a:rPr>
+                  <a:t>F</a:t>
+                </a:r>
+                <a:r>
+                  <a:rPr lang="en-US" sz="2600" dirty="0">
+                    <a:latin typeface="Calibri"/>
+                    <a:ea typeface="Calibri"/>
+                    <a:cs typeface="Calibri"/>
+                    <a:sym typeface="Calibri"/>
+                  </a:rPr>
+                  <a:t>-Divergences of reference and measurement distributions are then calculated and interpreted as an indication of drift. Since low-cost gas sensors are thought to be unreliable at high temperature or relative humidity values, we compare residual correlation and PDF divergence with and without a meteorological filter which excludes observations at Temp &gt; 30°C and RH &gt; 0.75. This method is applied to a BEACO2N sensor with published reliability statistics as a control experiment.</a:t>
+                </a:r>
+              </a:p>
+            </p:txBody>
+          </p:sp>
+        </mc:Choice>
+        <mc:Fallback>
+          <p:sp>
+            <p:nvSpPr>
+              <p:cNvPr id="98" name="Google Shape;98;p13"/>
+              <p:cNvSpPr txBox="1">
+                <a:spLocks noRot="1" noChangeAspect="1" noMove="1" noResize="1" noEditPoints="1" noAdjustHandles="1" noChangeArrowheads="1" noChangeShapeType="1" noTextEdit="1"/>
+              </p:cNvSpPr>
+              <p:nvPr/>
+            </p:nvSpPr>
+            <p:spPr>
+              <a:xfrm>
+                <a:off x="768813" y="4871735"/>
+                <a:ext cx="11430000" cy="13608790"/>
+              </a:xfrm>
+              <a:prstGeom prst="rect">
+                <a:avLst/>
+              </a:prstGeom>
+              <a:blipFill>
+                <a:blip r:embed="rId4"/>
+                <a:stretch>
+                  <a:fillRect l="-2240" t="-672" r="-1120"/>
+                </a:stretch>
+              </a:blipFill>
+              <a:ln>
+                <a:noFill/>
+              </a:ln>
+            </p:spPr>
+            <p:txBody>
+              <a:bodyPr/>
+              <a:lstStyle/>
+              <a:p>
+                <a:r>
+                  <a:rPr lang="en-US">
+                    <a:noFill/>
+                  </a:rPr>
+                  <a:t> </a:t>
+                </a:r>
+              </a:p>
+            </p:txBody>
+          </p:sp>
+        </mc:Fallback>
+      </mc:AlternateContent>
       <p:sp>
         <p:nvSpPr>
           <p:cNvPr id="99" name="Google Shape;99;p13"/>
@@ -11955,8 +12095,8 @@
         </p:nvSpPr>
         <p:spPr>
           <a:xfrm>
-            <a:off x="784925" y="23015111"/>
-            <a:ext cx="11430000" cy="3450087"/>
+            <a:off x="699825" y="22328587"/>
+            <a:ext cx="11430000" cy="3706440"/>
           </a:xfrm>
           <a:prstGeom prst="rect">
             <a:avLst/>
@@ -11972,6 +12112,36 @@
           </a:bodyPr>
           <a:lstStyle/>
           <a:p>
+            <a:pPr algn="just"/>
+            <a:r>
+              <a:rPr kumimoji="0" lang="en-US" sz="4333" b="1" i="0" u="none" strike="noStrike" kern="0" cap="none" spc="0" normalizeH="0" baseline="0" noProof="0" dirty="0">
+                <a:ln>
+                  <a:noFill/>
+                </a:ln>
+                <a:solidFill>
+                  <a:srgbClr val="595959"/>
+                </a:solidFill>
+                <a:effectLst/>
+                <a:uLnTx/>
+                <a:uFillTx/>
+                <a:latin typeface="Calibri"/>
+                <a:ea typeface="Calibri"/>
+                <a:cs typeface="Calibri"/>
+                <a:sym typeface="Calibri"/>
+              </a:rPr>
+              <a:t>OBJECTIVES</a:t>
+            </a:r>
+            <a:endParaRPr lang="en-US" sz="2667" dirty="0">
+              <a:solidFill>
+                <a:schemeClr val="dk1"/>
+              </a:solidFill>
+              <a:latin typeface="Calibri"/>
+              <a:ea typeface="Calibri"/>
+              <a:cs typeface="Calibri"/>
+              <a:sym typeface="Calibri"/>
+            </a:endParaRPr>
+          </a:p>
+          <a:p>
             <a:pPr marL="380985" indent="-380985" algn="just">
               <a:buFont typeface="Arial" panose="020B0604020202020204" pitchFamily="34" charset="0"/>
               <a:buChar char="•"/>
@@ -11986,7 +12156,7 @@
                 <a:cs typeface="Calibri"/>
                 <a:sym typeface="Calibri"/>
               </a:rPr>
-              <a:t>To characterize the long-term deployment reliability of Breathe Providence Network CO and FPM sensors using existing frameworks. </a:t>
+              <a:t>To characterize the long-term deployment reliability of Breathe Providence Network carbon monoxide sensors using existing frameworks. </a:t>
             </a:r>
           </a:p>
           <a:p>
@@ -12022,7 +12192,7 @@
                 <a:cs typeface="Calibri"/>
                 <a:sym typeface="Calibri"/>
               </a:rPr>
-              <a:t>To test this new framework against existing reliability characterizations.</a:t>
+              <a:t>To compare this new framework with existing reliability characterizations.</a:t>
             </a:r>
           </a:p>
           <a:p>
@@ -12040,7 +12210,7 @@
                 <a:cs typeface="Calibri"/>
                 <a:sym typeface="Calibri"/>
               </a:rPr>
-              <a:t>To apply this new framework to the Breathe Providence Network and report findings. </a:t>
+              <a:t>To apply this new framework to the Breathe Providence Network.</a:t>
             </a:r>
           </a:p>
           <a:p>
@@ -12068,8 +12238,8 @@
         </p:nvSpPr>
         <p:spPr>
           <a:xfrm>
-            <a:off x="12799516" y="17333134"/>
-            <a:ext cx="10781250" cy="8898437"/>
+            <a:off x="12799516" y="14611643"/>
+            <a:ext cx="10781250" cy="9356383"/>
           </a:xfrm>
           <a:prstGeom prst="rect">
             <a:avLst/>
@@ -12085,14 +12255,14 @@
           </a:bodyPr>
           <a:lstStyle/>
           <a:p>
-            <a:pPr>
+            <a:pPr algn="just">
               <a:buClr>
                 <a:schemeClr val="dk1"/>
               </a:buClr>
               <a:buSzPts val="1100"/>
             </a:pPr>
             <a:r>
-              <a:rPr lang="en-US" sz="2583" dirty="0">
+              <a:rPr lang="en-US" sz="2600" dirty="0">
                 <a:solidFill>
                   <a:schemeClr val="dk1"/>
                 </a:solidFill>
@@ -12101,10 +12271,10 @@
                 <a:cs typeface="Calibri"/>
                 <a:sym typeface="Calibri"/>
               </a:rPr>
-              <a:t>As an experimental control, we first examine reliability statistics for BEACO2N @ Richmond Field Station (RFS), Berkeley CA; existing reliability statistics for this sensor are published by Winter et. al. (June 2025) which allows us to be confident in the true reliability state of the sensor. Time series correlation statistics are plotted over duration of deployment for the sensor. We find strong residual correlation with reference for this particular sensor over time, however we seek a reliability characterization method that relies minimally on simultaneous reference observations. We therefore estimate the probability density function (PDF) of sensor observations for each month of deployment and characterize the divergence between reference and measurement distributions using </a:t>
+              <a:t>As an experimental control, we first examine reliability statistics for BEACO2N @ Richmond Field Station (RFS), Berkeley CA; existing reliability statistics for this sensor are published by Winter et. al. [1], which allows us to be confident in the true reliability state of the sensor. Time series correlation statistics are plotted over duration of deployment for the sensor. We find strong residual correlation with reference for this particular sensor over time, however we seek a reliability characterization method that relies minimally on simultaneous reference observations. We therefore estimate the probability density function (PDF) of sensor observations for each month of deployment and characterize the divergence between reference and measurement distributions using </a:t>
             </a:r>
             <a:r>
-              <a:rPr lang="en-US" sz="2583" dirty="0" err="1">
+              <a:rPr lang="en-US" sz="2600" dirty="0" err="1">
                 <a:solidFill>
                   <a:schemeClr val="dk1"/>
                 </a:solidFill>
@@ -12116,7 +12286,7 @@
               <a:t>Kullback</a:t>
             </a:r>
             <a:r>
-              <a:rPr lang="en-US" sz="2583" dirty="0">
+              <a:rPr lang="en-US" sz="2600" dirty="0">
                 <a:solidFill>
                   <a:schemeClr val="dk1"/>
                 </a:solidFill>
@@ -12125,57 +12295,8 @@
                 <a:cs typeface="Calibri"/>
                 <a:sym typeface="Calibri"/>
               </a:rPr>
-              <a:t>-Liebler, Hellinger, and Euclidean divergences. PDFs are estimated via a discrete histogram approximation with bin width set to 0.05 ppm; this approximation granularity was found to be necessary to reduce sensor noise uptake in the distribution estimation and to prevent floating-point arithmetic underflow. Since low-cost sensors are likely to be inaccurate at high temperature and relative humidity values, we compare residual correlation and PDF divergence with and without a meteorological filter which excludes observations at Temp &gt; 30°C and RH &gt; 0.75. We also compare trends in divergence when the first 12 months of the sensor’s operation are treated as reference distributions. We find that there is no significant trend in divergence when the source of reference data is either external or internal, nor do we find significant change in divergence before and after meteorological filtering. </a:t>
+              <a:t>-Liebler, Hellinger, and Euclidean divergences. PDFs are estimated via a discrete histogram approximation with bin width set to 0.05 ppm; this approximation granularity was found to be necessary to reduce sensor noise uptake in the distribution estimation and to prevent floating-point arithmetic underflow. Since low-cost sensors are likely to be inaccurate at high temperature and relative humidity values, we compare residual correlation and PDF divergence with and without a meteorological filter which excludes observations at Temp &gt; 30°C and RH &gt; 0.75. We also compare trends in divergence when the first 12 months of the sensor’s operation are treated as reference distributions. We find that there is no significant trend in divergence when the source of reference data is either external or internal, however we find some evidence of information loss after meteorological filtering.</a:t>
             </a:r>
-          </a:p>
-        </p:txBody>
-      </p:sp>
-      <p:sp>
-        <p:nvSpPr>
-          <p:cNvPr id="104" name="Google Shape;104;p13"/>
-          <p:cNvSpPr txBox="1"/>
-          <p:nvPr/>
-        </p:nvSpPr>
-        <p:spPr>
-          <a:xfrm>
-            <a:off x="762000" y="22194461"/>
-            <a:ext cx="3129064" cy="820650"/>
-          </a:xfrm>
-          <a:prstGeom prst="rect">
-            <a:avLst/>
-          </a:prstGeom>
-          <a:noFill/>
-          <a:ln>
-            <a:noFill/>
-          </a:ln>
-        </p:spPr>
-        <p:txBody>
-          <a:bodyPr spcFirstLastPara="1" wrap="square" lIns="76188" tIns="76188" rIns="76188" bIns="76188" anchor="t" anchorCtr="0">
-            <a:spAutoFit/>
-          </a:bodyPr>
-          <a:lstStyle/>
-          <a:p>
-            <a:r>
-              <a:rPr lang="en-US" sz="4333" b="1" dirty="0">
-                <a:solidFill>
-                  <a:srgbClr val="595959"/>
-                </a:solidFill>
-                <a:latin typeface="Calibri"/>
-                <a:ea typeface="Calibri"/>
-                <a:cs typeface="Calibri"/>
-                <a:sym typeface="Calibri"/>
-              </a:rPr>
-              <a:t>OBJECTIVES</a:t>
-            </a:r>
-            <a:endParaRPr sz="4333" dirty="0">
-              <a:solidFill>
-                <a:srgbClr val="595959"/>
-              </a:solidFill>
-              <a:latin typeface="Calibri"/>
-              <a:ea typeface="Calibri"/>
-              <a:cs typeface="Calibri"/>
-              <a:sym typeface="Calibri"/>
-            </a:endParaRPr>
           </a:p>
         </p:txBody>
       </p:sp>
@@ -12186,7 +12307,7 @@
           <p:nvPr/>
         </p:nvPicPr>
         <p:blipFill rotWithShape="1">
-          <a:blip r:embed="rId4">
+          <a:blip r:embed="rId5">
             <a:alphaModFix/>
           </a:blip>
           <a:srcRect l="31778" t="6009" r="31090" b="19284"/>
@@ -12251,8 +12372,8 @@
         </p:nvSpPr>
         <p:spPr>
           <a:xfrm>
-            <a:off x="12741898" y="14935067"/>
-            <a:ext cx="10703250" cy="2410379"/>
+            <a:off x="12799516" y="13289121"/>
+            <a:ext cx="10703250" cy="1282122"/>
           </a:xfrm>
           <a:prstGeom prst="rect">
             <a:avLst/>
@@ -12284,7 +12405,7 @@
                 <a:cs typeface="Calibri"/>
                 <a:sym typeface="Calibri"/>
               </a:rPr>
-              <a:t>Graphs of BEACO2N CO observation characteristics at Richmond Field Station, Berkeley CA, across months deployed. </a:t>
+              <a:t>BEACO2N CO observation statistics at Richmond Field Station (RFS), Berkeley CA, across months deployed. </a:t>
             </a:r>
           </a:p>
           <a:p>
@@ -12304,7 +12425,7 @@
                 <a:cs typeface="Calibri"/>
                 <a:sym typeface="Calibri"/>
               </a:rPr>
-              <a:t>Row 1:</a:t>
+              <a:t>Left</a:t>
             </a:r>
             <a:r>
               <a:rPr lang="en-US" sz="1833" i="1" dirty="0">
@@ -12316,7 +12437,7 @@
                 <a:cs typeface="Calibri"/>
                 <a:sym typeface="Calibri"/>
               </a:rPr>
-              <a:t> Time series residuals; Time series residual statistics; Probability density functions of observations from measurement and reference sensors; </a:t>
+              <a:t>: Residual correlation statistics versus a collocated reference instrument. </a:t>
             </a:r>
           </a:p>
           <a:p>
@@ -12336,7 +12457,7 @@
                 <a:cs typeface="Calibri"/>
                 <a:sym typeface="Calibri"/>
               </a:rPr>
-              <a:t>Row 2:</a:t>
+              <a:t>Top Right</a:t>
             </a:r>
             <a:r>
               <a:rPr lang="en-US" sz="1833" i="1" dirty="0">
@@ -12348,31 +12469,7 @@
                 <a:cs typeface="Calibri"/>
                 <a:sym typeface="Calibri"/>
               </a:rPr>
-              <a:t> f‑Divergences with meteorological filtering; f‑Divergences without meteorological filtering; f‑Divergence change after meteorological filtering. Reference is external RFS </a:t>
-            </a:r>
-            <a:r>
-              <a:rPr lang="en-US" sz="1833" i="1" dirty="0" err="1">
-                <a:solidFill>
-                  <a:schemeClr val="dk1"/>
-                </a:solidFill>
-                <a:latin typeface="Calibri"/>
-                <a:ea typeface="Calibri"/>
-                <a:cs typeface="Calibri"/>
-                <a:sym typeface="Calibri"/>
-              </a:rPr>
-              <a:t>Picarro</a:t>
-            </a:r>
-            <a:r>
-              <a:rPr lang="en-US" sz="1833" i="1" dirty="0">
-                <a:solidFill>
-                  <a:schemeClr val="dk1"/>
-                </a:solidFill>
-                <a:latin typeface="Calibri"/>
-                <a:ea typeface="Calibri"/>
-                <a:cs typeface="Calibri"/>
-                <a:sym typeface="Calibri"/>
-              </a:rPr>
-              <a:t> CO sensor.</a:t>
+              <a:t>: Divergence statistics versus a collocated reference instrument.</a:t>
             </a:r>
           </a:p>
           <a:p>
@@ -12392,7 +12489,7 @@
                 <a:cs typeface="Calibri"/>
                 <a:sym typeface="Calibri"/>
               </a:rPr>
-              <a:t>Row 3:</a:t>
+              <a:t>Bottom Right</a:t>
             </a:r>
             <a:r>
               <a:rPr lang="en-US" sz="1833" i="1" dirty="0">
@@ -12404,17 +12501,8 @@
                 <a:cs typeface="Calibri"/>
                 <a:sym typeface="Calibri"/>
               </a:rPr>
-              <a:t> Same as Row 2 but with distributions from first 12 operating months of BEACO2N sensor used as reference.</a:t>
+              <a:t>: Divergence statistics with first year of observations treated as reference.</a:t>
             </a:r>
-            <a:endParaRPr lang="en-US" sz="1833" i="1" u="sng" dirty="0">
-              <a:solidFill>
-                <a:schemeClr val="dk1"/>
-              </a:solidFill>
-              <a:latin typeface="Calibri"/>
-              <a:ea typeface="Calibri"/>
-              <a:cs typeface="Calibri"/>
-              <a:sym typeface="Calibri"/>
-            </a:endParaRPr>
           </a:p>
         </p:txBody>
       </p:sp>
@@ -12496,7 +12584,7 @@
         </p:nvSpPr>
         <p:spPr>
           <a:xfrm>
-            <a:off x="12902354" y="4985997"/>
+            <a:off x="12799516" y="4871735"/>
             <a:ext cx="10781250" cy="762000"/>
           </a:xfrm>
           <a:prstGeom prst="rect">
@@ -12559,7 +12647,7 @@
         <p:spPr>
           <a:xfrm>
             <a:off x="24422881" y="5989243"/>
-            <a:ext cx="11308458" cy="13942278"/>
+            <a:ext cx="11308458" cy="8412559"/>
           </a:xfrm>
           <a:prstGeom prst="rect">
             <a:avLst/>
@@ -12576,81 +12664,60 @@
           <a:lstStyle/>
           <a:p>
             <a:pPr algn="just">
+              <a:spcAft>
+                <a:spcPts val="1000"/>
+              </a:spcAft>
               <a:buClr>
                 <a:schemeClr val="dk1"/>
               </a:buClr>
               <a:buSzPts val="1100"/>
             </a:pPr>
             <a:r>
-              <a:rPr lang="en-US" sz="2750" dirty="0">
+              <a:rPr lang="en-US" sz="2600" dirty="0">
                 <a:latin typeface="Calibri"/>
                 <a:ea typeface="Calibri"/>
                 <a:cs typeface="Calibri"/>
                 <a:sym typeface="Calibri"/>
               </a:rPr>
-              <a:t>Across the Breathe Providence network, we find that CO sensors do not exhibit significant trends in divergence from external or internal reference distributions with or without meteorological filtering; standard deviation of the measurement distribution exhibits seasonal variation but does not exhibit long term trends for any CO sensors in the network. This finding does not necessarily assert the reliability of our sensors, but merely indicates that no significant drift was detected in the network. </a:t>
+              <a:t>Across the Breathe Providence network, we find that CO sensors do not exhibit significant trends in divergence from external or internal reference distributions with or without meteorological filtering; standard deviation of measurement distributions exhibit seasonal variation but do not exhibit long term trends for any CO sensors in the network. This finding does not necessarily affirm the reliability of our sensors, but merely indicates that no significant drift was detected in the network. </a:t>
             </a:r>
           </a:p>
           <a:p>
-            <a:pPr algn="just">
-              <a:buClr>
-                <a:schemeClr val="dk1"/>
-              </a:buClr>
-              <a:buSzPts val="1100"/>
-            </a:pPr>
-            <a:endParaRPr lang="en-US" sz="2750" dirty="0">
-              <a:latin typeface="Calibri"/>
-              <a:ea typeface="Calibri"/>
-              <a:cs typeface="Calibri"/>
-              <a:sym typeface="Calibri"/>
-            </a:endParaRPr>
-          </a:p>
-          <a:p>
             <a:pPr lvl="0" algn="just">
+              <a:spcAft>
+                <a:spcPts val="1000"/>
+              </a:spcAft>
               <a:buClr>
                 <a:schemeClr val="dk1"/>
               </a:buClr>
               <a:buSzPts val="1100"/>
             </a:pPr>
             <a:r>
-              <a:rPr lang="en-US" sz="2750" dirty="0">
+              <a:rPr lang="en-US" sz="2600" dirty="0">
                 <a:latin typeface="Calibri"/>
                 <a:ea typeface="Calibri"/>
                 <a:cs typeface="Calibri"/>
                 <a:sym typeface="Calibri"/>
               </a:rPr>
-              <a:t>Furthermore, we find that meteorological filtering tends to increase distribution divergence for CO sensors in the Breathe Providence network as time since deployment increases. Of the [X] CO sensors examined, [X] exhibited a noticeable increase in KL divergence after meteorological filtering; this trend was exhibited both when external data and internal first-year data was used as reference. KL divergence has a standard interpretation as the information lost by using a measurement distribution to approximate a reference distribution, therefore an increase in KL divergence after meteorological filtering indicates that low-cost CO sensors lose information that is captured by reference when observations during strenuous meteorological conditions are omitted. </a:t>
+              <a:t>Furthermore, we find evidence that meteorological filtering tends to increase distribution divergence and information loss for CO sensors in the Breathe Providence Network. Of the 25 CO sensors examined, 13 (52%) exhibited an increase in average </a:t>
             </a:r>
-          </a:p>
-          <a:p>
-            <a:pPr lvl="0" algn="just">
-              <a:buClr>
-                <a:schemeClr val="dk1"/>
-              </a:buClr>
-              <a:buSzPts val="1100"/>
-            </a:pPr>
-            <a:endParaRPr lang="en-US" sz="2750" dirty="0">
-              <a:latin typeface="Calibri"/>
-              <a:ea typeface="Calibri"/>
-              <a:cs typeface="Calibri"/>
-              <a:sym typeface="Calibri"/>
-            </a:endParaRPr>
-          </a:p>
-          <a:p>
-            <a:pPr lvl="0" algn="just">
-              <a:buClr>
-                <a:schemeClr val="dk1"/>
-              </a:buClr>
-              <a:buSzPts val="1100"/>
-            </a:pPr>
             <a:r>
-              <a:rPr lang="en-US" sz="2750" dirty="0">
+              <a:rPr lang="en-US" sz="2600" dirty="0" err="1">
                 <a:latin typeface="Calibri"/>
                 <a:ea typeface="Calibri"/>
                 <a:cs typeface="Calibri"/>
                 <a:sym typeface="Calibri"/>
               </a:rPr>
-              <a:t>This finding indicates that more study is needed regarding how low-cost sensor observations at strenuous meteorological conditions are processed. To the author’s knowledge, no reliability or calibration studies of low-cost gas sensors in air quality monitoring applications specifically examine data recorded at high temperature or relative humidity values. Existing literature characterizes low-cost gas sensors as unreliable at these meteorological conditions, however this characterization is solely determined by examining correlation with reference instruments. Though low-cost gas sensors may not correlate one-to-one with reference-grade instruments at these meteorological conditions, this study suggests that these observations still carry information about the distribution of air quality during a given time period.</a:t>
+              <a:t>Kullback</a:t>
+            </a:r>
+            <a:r>
+              <a:rPr lang="en-US" sz="2600" dirty="0">
+                <a:latin typeface="Calibri"/>
+                <a:ea typeface="Calibri"/>
+                <a:cs typeface="Calibri"/>
+                <a:sym typeface="Calibri"/>
+              </a:rPr>
+              <a:t>-Liebler (KL) divergence after meteorological filtering of either external or internal reference data. Of these 13 sensors, 6 (24% of total) exhibited an average increase in KL divergence of greater than 0.1 part per million. Only 2 sensors in the network exhibited any average decrease in KL divergence after meteorological filtering of either external or internal reference data. KL divergence is interpreted as the information lost by using a measurement distribution to approximate a reference distribution, therefore an increase in KL divergence after meteorological filtering indicates that low-cost CO sensors lose information that is captured by the reference sensor (which is also filtered) when observations during strenuous meteorological conditions are omitted. </a:t>
             </a:r>
           </a:p>
         </p:txBody>
@@ -12670,7 +12737,7 @@
           <p:nvPr/>
         </p:nvPicPr>
         <p:blipFill>
-          <a:blip r:embed="rId5">
+          <a:blip r:embed="rId6">
             <a:extLst>
               <a:ext uri="{28A0092B-C50C-407E-A947-70E740481C1C}">
                 <a14:useLocalDpi xmlns:a14="http://schemas.microsoft.com/office/drawing/2010/main" val="0"/>
@@ -12717,7 +12784,7 @@
           <p:nvPr/>
         </p:nvPicPr>
         <p:blipFill>
-          <a:blip r:embed="rId6">
+          <a:blip r:embed="rId7">
             <a:extLst>
               <a:ext uri="{28A0092B-C50C-407E-A947-70E740481C1C}">
                 <a14:useLocalDpi xmlns:a14="http://schemas.microsoft.com/office/drawing/2010/main" val="0"/>
@@ -12842,8 +12909,8 @@
           </a:p>
         </p:txBody>
       </p:sp>
-      <mc:AlternateContent xmlns:mc="http://schemas.openxmlformats.org/markup-compatibility/2006">
-        <mc:Choice xmlns:a14="http://schemas.microsoft.com/office/drawing/2010/main" Requires="a14">
+      <mc:AlternateContent xmlns:mc="http://schemas.openxmlformats.org/markup-compatibility/2006" xmlns:a14="http://schemas.microsoft.com/office/drawing/2010/main">
+        <mc:Choice Requires="a14">
           <p:sp>
             <p:nvSpPr>
               <p:cNvPr id="12" name="Google Shape;114;p13">
@@ -13053,7 +13120,7 @@
             </p:txBody>
           </p:sp>
         </mc:Choice>
-        <mc:Fallback>
+        <mc:Fallback xmlns="">
           <p:sp>
             <p:nvSpPr>
               <p:cNvPr id="12" name="Google Shape;114;p13">
@@ -13077,7 +13144,7 @@
                 <a:avLst/>
               </a:prstGeom>
               <a:blipFill>
-                <a:blip r:embed="rId7"/>
+                <a:blip r:embed="rId8"/>
                 <a:stretch>
                   <a:fillRect l="-2609" r="-3043" b="-1167"/>
                 </a:stretch>
@@ -13103,40 +13170,10 @@
       </mc:AlternateContent>
       <p:pic>
         <p:nvPicPr>
-          <p:cNvPr id="3" name="Picture 2">
+          <p:cNvPr id="13" name="Picture 12">
             <a:extLst>
               <a:ext uri="{FF2B5EF4-FFF2-40B4-BE49-F238E27FC236}">
-                <a16:creationId xmlns:a16="http://schemas.microsoft.com/office/drawing/2014/main" id="{5F1A3734-7B76-DF7C-A51F-D941E769D17C}"/>
-              </a:ext>
-            </a:extLst>
-          </p:cNvPr>
-          <p:cNvPicPr>
-            <a:picLocks noChangeAspect="1"/>
-          </p:cNvPicPr>
-          <p:nvPr/>
-        </p:nvPicPr>
-        <p:blipFill>
-          <a:blip r:embed="rId8"/>
-          <a:stretch>
-            <a:fillRect/>
-          </a:stretch>
-        </p:blipFill>
-        <p:spPr>
-          <a:xfrm>
-            <a:off x="13746599" y="5990396"/>
-            <a:ext cx="3940965" cy="5097765"/>
-          </a:xfrm>
-          <a:prstGeom prst="rect">
-            <a:avLst/>
-          </a:prstGeom>
-        </p:spPr>
-      </p:pic>
-      <p:pic>
-        <p:nvPicPr>
-          <p:cNvPr id="6" name="Picture 5">
-            <a:extLst>
-              <a:ext uri="{FF2B5EF4-FFF2-40B4-BE49-F238E27FC236}">
-                <a16:creationId xmlns:a16="http://schemas.microsoft.com/office/drawing/2014/main" id="{DACE48DF-A28B-B6B8-0A28-5E129C4B7516}"/>
+                <a16:creationId xmlns:a16="http://schemas.microsoft.com/office/drawing/2014/main" id="{F18F6249-5E37-2D7C-B7B9-D756B6835F68}"/>
               </a:ext>
             </a:extLst>
           </p:cNvPr>
@@ -13153,8 +13190,8 @@
         </p:blipFill>
         <p:spPr>
           <a:xfrm>
-            <a:off x="18882309" y="5989243"/>
-            <a:ext cx="3940963" cy="5100072"/>
+            <a:off x="18452592" y="5760720"/>
+            <a:ext cx="5120641" cy="3657600"/>
           </a:xfrm>
           <a:prstGeom prst="rect">
             <a:avLst/>
@@ -13163,10 +13200,10 @@
       </p:pic>
       <p:pic>
         <p:nvPicPr>
-          <p:cNvPr id="9" name="Picture 8">
+          <p:cNvPr id="16" name="Picture 15">
             <a:extLst>
               <a:ext uri="{FF2B5EF4-FFF2-40B4-BE49-F238E27FC236}">
-                <a16:creationId xmlns:a16="http://schemas.microsoft.com/office/drawing/2014/main" id="{8A4DE4E6-5449-8A6A-2AD3-CDF683E2A72C}"/>
+                <a16:creationId xmlns:a16="http://schemas.microsoft.com/office/drawing/2014/main" id="{5C227AA2-6902-0698-4DC0-2E27EF908B3C}"/>
               </a:ext>
             </a:extLst>
           </p:cNvPr>
@@ -13183,8 +13220,8 @@
         </p:blipFill>
         <p:spPr>
           <a:xfrm>
-            <a:off x="30256681" y="19474796"/>
-            <a:ext cx="5137729" cy="3669806"/>
+            <a:off x="18452592" y="9418320"/>
+            <a:ext cx="5120640" cy="3657600"/>
           </a:xfrm>
           <a:prstGeom prst="rect">
             <a:avLst/>
@@ -13193,10 +13230,10 @@
       </p:pic>
       <p:pic>
         <p:nvPicPr>
-          <p:cNvPr id="10" name="Picture 9">
+          <p:cNvPr id="18" name="Picture 17">
             <a:extLst>
               <a:ext uri="{FF2B5EF4-FFF2-40B4-BE49-F238E27FC236}">
-                <a16:creationId xmlns:a16="http://schemas.microsoft.com/office/drawing/2014/main" id="{A3465C22-BC17-BEE3-8D63-AB904E9E2A60}"/>
+                <a16:creationId xmlns:a16="http://schemas.microsoft.com/office/drawing/2014/main" id="{E1AF4E2A-9D72-AC7F-F886-B64BFA5B95EB}"/>
               </a:ext>
             </a:extLst>
           </p:cNvPr>
@@ -13213,8 +13250,8 @@
         </p:blipFill>
         <p:spPr>
           <a:xfrm>
-            <a:off x="13262702" y="11328254"/>
-            <a:ext cx="4535272" cy="3239479"/>
+            <a:off x="12801600" y="5760720"/>
+            <a:ext cx="5652656" cy="7315200"/>
           </a:xfrm>
           <a:prstGeom prst="rect">
             <a:avLst/>
@@ -13223,10 +13260,10 @@
       </p:pic>
       <p:pic>
         <p:nvPicPr>
-          <p:cNvPr id="14" name="Picture 13">
+          <p:cNvPr id="20" name="Picture 19">
             <a:extLst>
               <a:ext uri="{FF2B5EF4-FFF2-40B4-BE49-F238E27FC236}">
-                <a16:creationId xmlns:a16="http://schemas.microsoft.com/office/drawing/2014/main" id="{394A25AD-E86D-FFD4-A07A-6DEFA2B24203}"/>
+                <a16:creationId xmlns:a16="http://schemas.microsoft.com/office/drawing/2014/main" id="{E575314F-9A1C-08D8-651B-D8A14031D2BB}"/>
               </a:ext>
             </a:extLst>
           </p:cNvPr>
@@ -13243,14 +13280,167 @@
         </p:blipFill>
         <p:spPr>
           <a:xfrm>
-            <a:off x="18882309" y="11328254"/>
-            <a:ext cx="4535272" cy="3239479"/>
+            <a:off x="24422881" y="14325311"/>
+            <a:ext cx="5371750" cy="3836965"/>
           </a:xfrm>
           <a:prstGeom prst="rect">
             <a:avLst/>
           </a:prstGeom>
         </p:spPr>
       </p:pic>
+      <p:pic>
+        <p:nvPicPr>
+          <p:cNvPr id="22" name="Picture 21">
+            <a:extLst>
+              <a:ext uri="{FF2B5EF4-FFF2-40B4-BE49-F238E27FC236}">
+                <a16:creationId xmlns:a16="http://schemas.microsoft.com/office/drawing/2014/main" id="{C414E5D8-CD81-FCD5-7D6E-514E24A21BEE}"/>
+              </a:ext>
+            </a:extLst>
+          </p:cNvPr>
+          <p:cNvPicPr>
+            <a:picLocks noChangeAspect="1"/>
+          </p:cNvPicPr>
+          <p:nvPr/>
+        </p:nvPicPr>
+        <p:blipFill>
+          <a:blip r:embed="rId13"/>
+          <a:stretch>
+            <a:fillRect/>
+          </a:stretch>
+        </p:blipFill>
+        <p:spPr>
+          <a:xfrm>
+            <a:off x="30077110" y="14401802"/>
+            <a:ext cx="5371750" cy="3836965"/>
+          </a:xfrm>
+          <a:prstGeom prst="rect">
+            <a:avLst/>
+          </a:prstGeom>
+        </p:spPr>
+      </p:pic>
+      <p:sp>
+        <p:nvSpPr>
+          <p:cNvPr id="23" name="TextBox 22">
+            <a:extLst>
+              <a:ext uri="{FF2B5EF4-FFF2-40B4-BE49-F238E27FC236}">
+                <a16:creationId xmlns:a16="http://schemas.microsoft.com/office/drawing/2014/main" id="{C2693214-0DAC-588B-2C75-E70322F5C64D}"/>
+              </a:ext>
+            </a:extLst>
+          </p:cNvPr>
+          <p:cNvSpPr txBox="1"/>
+          <p:nvPr/>
+        </p:nvSpPr>
+        <p:spPr>
+          <a:xfrm>
+            <a:off x="24422881" y="19649060"/>
+            <a:ext cx="11308458" cy="4801379"/>
+          </a:xfrm>
+          <a:prstGeom prst="rect">
+            <a:avLst/>
+          </a:prstGeom>
+          <a:noFill/>
+        </p:spPr>
+        <p:txBody>
+          <a:bodyPr wrap="square" rtlCol="0">
+            <a:spAutoFit/>
+          </a:bodyPr>
+          <a:lstStyle/>
+          <a:p>
+            <a:pPr marL="0" marR="0" lvl="0" indent="0" algn="just" defTabSz="914400" rtl="0" eaLnBrk="1" fontAlgn="auto" latinLnBrk="0" hangingPunct="1">
+              <a:lnSpc>
+                <a:spcPct val="100000"/>
+              </a:lnSpc>
+              <a:spcBef>
+                <a:spcPts val="0"/>
+              </a:spcBef>
+              <a:spcAft>
+                <a:spcPts val="1000"/>
+              </a:spcAft>
+              <a:buClr>
+                <a:srgbClr val="000000"/>
+              </a:buClr>
+              <a:buSzPts val="1100"/>
+              <a:buFont typeface="Arial"/>
+              <a:buNone/>
+              <a:tabLst/>
+              <a:defRPr/>
+            </a:pPr>
+            <a:r>
+              <a:rPr kumimoji="0" lang="en-US" sz="2600" b="0" i="0" u="none" strike="noStrike" kern="0" cap="none" spc="0" normalizeH="0" baseline="0" noProof="0" dirty="0">
+                <a:ln>
+                  <a:noFill/>
+                </a:ln>
+                <a:solidFill>
+                  <a:srgbClr val="000000"/>
+                </a:solidFill>
+                <a:effectLst/>
+                <a:uLnTx/>
+                <a:uFillTx/>
+                <a:latin typeface="Calibri"/>
+                <a:ea typeface="Calibri"/>
+                <a:cs typeface="Calibri"/>
+                <a:sym typeface="Calibri"/>
+              </a:rPr>
+              <a:t>This finding indicates that more study is needed regarding how low-cost sensor observations at strenuous meteorological conditions are processed. To the author’s knowledge, no reliability or calibration studies of low-cost gas sensors in air quality monitoring applications specifically examine data recorded at high temperature or relative humidity. Existing literature characterizes low-cost gas sensors as being unreliable at these meteorological conditions, however this characterization is solely determined by examining correlation with reference instruments. Though low-cost gas sensors may not correlate one-to-one with reference-grade instruments at these meteorological conditions, this finding suggests that these observations still carry information about the distribution of air quality during a given period.</a:t>
+            </a:r>
+          </a:p>
+          <a:p>
+            <a:endParaRPr lang="en-US" dirty="0"/>
+          </a:p>
+        </p:txBody>
+      </p:sp>
+      <p:sp>
+        <p:nvSpPr>
+          <p:cNvPr id="24" name="Google Shape;114;p13">
+            <a:extLst>
+              <a:ext uri="{FF2B5EF4-FFF2-40B4-BE49-F238E27FC236}">
+                <a16:creationId xmlns:a16="http://schemas.microsoft.com/office/drawing/2014/main" id="{2981A85A-1C92-DA19-E0E5-F2FE7AE6CDC4}"/>
+              </a:ext>
+            </a:extLst>
+          </p:cNvPr>
+          <p:cNvSpPr txBox="1"/>
+          <p:nvPr/>
+        </p:nvSpPr>
+        <p:spPr>
+          <a:xfrm>
+            <a:off x="24725485" y="18238767"/>
+            <a:ext cx="10703250" cy="1000058"/>
+          </a:xfrm>
+          <a:prstGeom prst="rect">
+            <a:avLst/>
+          </a:prstGeom>
+          <a:noFill/>
+          <a:ln>
+            <a:noFill/>
+          </a:ln>
+        </p:spPr>
+        <p:txBody>
+          <a:bodyPr spcFirstLastPara="1" wrap="square" lIns="76188" tIns="76188" rIns="76188" bIns="76188" anchor="t" anchorCtr="0">
+            <a:spAutoFit/>
+          </a:bodyPr>
+          <a:lstStyle/>
+          <a:p>
+            <a:pPr algn="just">
+              <a:buClr>
+                <a:schemeClr val="dk1"/>
+              </a:buClr>
+              <a:buSzPts val="1100"/>
+            </a:pPr>
+            <a:r>
+              <a:rPr lang="en-US" sz="1833" i="1" dirty="0">
+                <a:solidFill>
+                  <a:schemeClr val="dk1"/>
+                </a:solidFill>
+                <a:latin typeface="Calibri"/>
+                <a:ea typeface="Calibri"/>
+                <a:cs typeface="Calibri"/>
+                <a:sym typeface="Calibri"/>
+              </a:rPr>
+              <a:t>Change in divergence after meteorological filtering for two Breathe Providence Network nodes. Environmental Protection Agency air quality monitor observations from Myron J. Francis Elementary School are used as reference in both cases. Blue dashed line shows mean divergence change across months deployed.</a:t>
+            </a:r>
+          </a:p>
+        </p:txBody>
+      </p:sp>
     </p:spTree>
   </p:cSld>
   <p:clrMapOvr>

--- a/Poster_draft_7-30-25.pptx
+++ b/Poster_draft_7-30-25.pptx
@@ -11313,14 +11313,14 @@
         <p:nvSpPr>
           <p:cNvPr id="88" name="Google Shape;88;p13"/>
           <p:cNvSpPr>
-            <a:spLocks noGrp="1" noRot="1" noMove="1" noResize="1" noEditPoints="1" noAdjustHandles="1" noChangeArrowheads="1" noChangeShapeType="1"/>
+            <a:spLocks/>
           </p:cNvSpPr>
           <p:nvPr/>
         </p:nvSpPr>
         <p:spPr>
           <a:xfrm>
-            <a:off x="12551854" y="4744750"/>
-            <a:ext cx="11449000" cy="21909500"/>
+            <a:off x="12554712" y="4572000"/>
+            <a:ext cx="11448288" cy="21909500"/>
           </a:xfrm>
           <a:prstGeom prst="rect">
             <a:avLst/>
@@ -11350,70 +11350,16 @@
       </p:sp>
       <p:sp>
         <p:nvSpPr>
-          <p:cNvPr id="90" name="Google Shape;90;p13"/>
-          <p:cNvSpPr txBox="1"/>
+          <p:cNvPr id="93" name="Google Shape;93;p13"/>
+          <p:cNvSpPr txBox="1">
+            <a:spLocks noGrp="1" noRot="1" noMove="1" noResize="1" noEditPoints="1" noAdjustHandles="1" noChangeArrowheads="1" noChangeShapeType="1"/>
+          </p:cNvSpPr>
           <p:nvPr/>
         </p:nvSpPr>
         <p:spPr>
           <a:xfrm>
-            <a:off x="24422883" y="4943958"/>
-            <a:ext cx="10781250" cy="762000"/>
-          </a:xfrm>
-          <a:prstGeom prst="rect">
-            <a:avLst/>
-          </a:prstGeom>
-          <a:noFill/>
-          <a:ln>
-            <a:noFill/>
-          </a:ln>
-        </p:spPr>
-        <p:txBody>
-          <a:bodyPr spcFirstLastPara="1" wrap="square" lIns="76188" tIns="38083" rIns="76188" bIns="38083" anchor="t" anchorCtr="0">
-            <a:noAutofit/>
-          </a:bodyPr>
-          <a:lstStyle/>
-          <a:p>
-            <a:r>
-              <a:rPr lang="en-US" sz="4333" b="1" dirty="0">
-                <a:solidFill>
-                  <a:srgbClr val="595959"/>
-                </a:solidFill>
-                <a:latin typeface="Calibri"/>
-                <a:ea typeface="Calibri"/>
-                <a:cs typeface="Calibri"/>
-                <a:sym typeface="Calibri"/>
-              </a:rPr>
-              <a:t>RESULTS AND DISCUSSION</a:t>
-            </a:r>
-            <a:endParaRPr sz="4333" b="1" dirty="0">
-              <a:solidFill>
-                <a:srgbClr val="595959"/>
-              </a:solidFill>
-              <a:latin typeface="Calibri"/>
-              <a:ea typeface="Calibri"/>
-              <a:cs typeface="Calibri"/>
-              <a:sym typeface="Calibri"/>
-            </a:endParaRPr>
-          </a:p>
-          <a:p>
-            <a:endParaRPr sz="4333" b="1" dirty="0">
-              <a:solidFill>
-                <a:srgbClr val="595959"/>
-              </a:solidFill>
-            </a:endParaRPr>
-          </a:p>
-        </p:txBody>
-      </p:sp>
-      <p:sp>
-        <p:nvSpPr>
-          <p:cNvPr id="93" name="Google Shape;93;p13"/>
-          <p:cNvSpPr txBox="1"/>
-          <p:nvPr/>
-        </p:nvSpPr>
-        <p:spPr>
-          <a:xfrm>
-            <a:off x="12475141" y="23698499"/>
-            <a:ext cx="11430000" cy="3139296"/>
+            <a:off x="12573000" y="24231600"/>
+            <a:ext cx="11430000" cy="2277521"/>
           </a:xfrm>
           <a:prstGeom prst="rect">
             <a:avLst/>
@@ -11458,7 +11404,7 @@
               </a:spcAft>
             </a:pPr>
             <a:r>
-              <a:rPr lang="en-US" sz="1800" i="1" dirty="0">
+              <a:rPr lang="en-US" sz="2000" i="1" dirty="0">
                 <a:solidFill>
                   <a:schemeClr val="dk1"/>
                 </a:solidFill>
@@ -11469,164 +11415,6 @@
               </a:rPr>
               <a:t>I am sincerely grateful to Professor Meredith Hastings for the opportunity to contribute to the Breathe Providence Project and for her insightful guidance and support. I also acknowledge the BEACO2N team at the University of California Berkeley, whose research on low-cost air quality monitor performance provided inspiration for this work.</a:t>
             </a:r>
-          </a:p>
-          <a:p>
-            <a:pPr marL="0" marR="0" lvl="0" indent="0" algn="l" defTabSz="914400" rtl="0" eaLnBrk="1" fontAlgn="auto" latinLnBrk="0" hangingPunct="1">
-              <a:lnSpc>
-                <a:spcPct val="100000"/>
-              </a:lnSpc>
-              <a:spcBef>
-                <a:spcPts val="0"/>
-              </a:spcBef>
-              <a:spcAft>
-                <a:spcPts val="0"/>
-              </a:spcAft>
-              <a:buClr>
-                <a:srgbClr val="000000"/>
-              </a:buClr>
-              <a:buSzTx/>
-              <a:buFont typeface="Arial"/>
-              <a:buNone/>
-              <a:tabLst/>
-              <a:defRPr/>
-            </a:pPr>
-            <a:r>
-              <a:rPr kumimoji="0" lang="en-US" sz="2800" b="1" i="0" u="none" strike="noStrike" kern="0" cap="none" spc="0" normalizeH="0" baseline="0" noProof="0" dirty="0">
-                <a:ln>
-                  <a:noFill/>
-                </a:ln>
-                <a:solidFill>
-                  <a:srgbClr val="595959"/>
-                </a:solidFill>
-                <a:effectLst/>
-                <a:uLnTx/>
-                <a:uFillTx/>
-                <a:latin typeface="Calibri"/>
-                <a:ea typeface="Calibri"/>
-                <a:cs typeface="Calibri"/>
-                <a:sym typeface="Calibri"/>
-              </a:rPr>
-              <a:t>REFERENCES</a:t>
-            </a:r>
-          </a:p>
-          <a:p>
-            <a:r>
-              <a:rPr lang="en-US" sz="1800" dirty="0">
-                <a:solidFill>
-                  <a:schemeClr val="dk1"/>
-                </a:solidFill>
-                <a:latin typeface="Calibri" panose="020F0502020204030204" pitchFamily="34" charset="0"/>
-                <a:ea typeface="Calibri" panose="020F0502020204030204" pitchFamily="34" charset="0"/>
-                <a:cs typeface="Calibri" panose="020F0502020204030204" pitchFamily="34" charset="0"/>
-                <a:sym typeface="Calibri"/>
-              </a:rPr>
-              <a:t>[1] </a:t>
-            </a:r>
-            <a:r>
-              <a:rPr lang="en-US" sz="1800" b="1" dirty="0">
-                <a:latin typeface="Calibri" panose="020F0502020204030204" pitchFamily="34" charset="0"/>
-                <a:ea typeface="Calibri" panose="020F0502020204030204" pitchFamily="34" charset="0"/>
-                <a:cs typeface="Calibri" panose="020F0502020204030204" pitchFamily="34" charset="0"/>
-              </a:rPr>
-              <a:t>Sustained Performance of Low-Cost Air Quality Sensors in Long-Term Deployments. </a:t>
-            </a:r>
-            <a:r>
-              <a:rPr lang="en-US" sz="1800" dirty="0">
-                <a:latin typeface="Calibri" panose="020F0502020204030204" pitchFamily="34" charset="0"/>
-                <a:ea typeface="Calibri" panose="020F0502020204030204" pitchFamily="34" charset="0"/>
-                <a:cs typeface="Calibri" panose="020F0502020204030204" pitchFamily="34" charset="0"/>
-              </a:rPr>
-              <a:t>Anna R. Winter, </a:t>
-            </a:r>
-            <a:r>
-              <a:rPr lang="en-US" sz="1800" dirty="0" err="1">
-                <a:latin typeface="Calibri" panose="020F0502020204030204" pitchFamily="34" charset="0"/>
-                <a:ea typeface="Calibri" panose="020F0502020204030204" pitchFamily="34" charset="0"/>
-                <a:cs typeface="Calibri" panose="020F0502020204030204" pitchFamily="34" charset="0"/>
-              </a:rPr>
-              <a:t>Yishu</a:t>
-            </a:r>
-            <a:r>
-              <a:rPr lang="en-US" sz="1800" dirty="0">
-                <a:latin typeface="Calibri" panose="020F0502020204030204" pitchFamily="34" charset="0"/>
-                <a:ea typeface="Calibri" panose="020F0502020204030204" pitchFamily="34" charset="0"/>
-                <a:cs typeface="Calibri" panose="020F0502020204030204" pitchFamily="34" charset="0"/>
-              </a:rPr>
-              <a:t> Zhu, Naomi G. </a:t>
-            </a:r>
-            <a:r>
-              <a:rPr lang="en-US" sz="1800" dirty="0" err="1">
-                <a:latin typeface="Calibri" panose="020F0502020204030204" pitchFamily="34" charset="0"/>
-                <a:ea typeface="Calibri" panose="020F0502020204030204" pitchFamily="34" charset="0"/>
-                <a:cs typeface="Calibri" panose="020F0502020204030204" pitchFamily="34" charset="0"/>
-              </a:rPr>
-              <a:t>Asimow</a:t>
-            </a:r>
-            <a:r>
-              <a:rPr lang="en-US" sz="1800" dirty="0">
-                <a:latin typeface="Calibri" panose="020F0502020204030204" pitchFamily="34" charset="0"/>
-                <a:ea typeface="Calibri" panose="020F0502020204030204" pitchFamily="34" charset="0"/>
-                <a:cs typeface="Calibri" panose="020F0502020204030204" pitchFamily="34" charset="0"/>
-              </a:rPr>
-              <a:t>, Milan Y. Patel, and Ronald C. Cohen. </a:t>
-            </a:r>
-            <a:r>
-              <a:rPr lang="en-US" sz="1800" i="1" dirty="0">
-                <a:latin typeface="Calibri" panose="020F0502020204030204" pitchFamily="34" charset="0"/>
-                <a:ea typeface="Calibri" panose="020F0502020204030204" pitchFamily="34" charset="0"/>
-                <a:cs typeface="Calibri" panose="020F0502020204030204" pitchFamily="34" charset="0"/>
-              </a:rPr>
-              <a:t>ACS Sensors</a:t>
-            </a:r>
-            <a:r>
-              <a:rPr lang="en-US" sz="1800" dirty="0">
-                <a:latin typeface="Calibri" panose="020F0502020204030204" pitchFamily="34" charset="0"/>
-                <a:ea typeface="Calibri" panose="020F0502020204030204" pitchFamily="34" charset="0"/>
-                <a:cs typeface="Calibri" panose="020F0502020204030204" pitchFamily="34" charset="0"/>
-              </a:rPr>
-              <a:t> </a:t>
-            </a:r>
-            <a:r>
-              <a:rPr lang="en-US" sz="1800" b="1" dirty="0">
-                <a:latin typeface="Calibri" panose="020F0502020204030204" pitchFamily="34" charset="0"/>
-                <a:ea typeface="Calibri" panose="020F0502020204030204" pitchFamily="34" charset="0"/>
-                <a:cs typeface="Calibri" panose="020F0502020204030204" pitchFamily="34" charset="0"/>
-              </a:rPr>
-              <a:t>2025</a:t>
-            </a:r>
-            <a:r>
-              <a:rPr lang="en-US" sz="1800" dirty="0">
-                <a:latin typeface="Calibri" panose="020F0502020204030204" pitchFamily="34" charset="0"/>
-                <a:ea typeface="Calibri" panose="020F0502020204030204" pitchFamily="34" charset="0"/>
-                <a:cs typeface="Calibri" panose="020F0502020204030204" pitchFamily="34" charset="0"/>
-              </a:rPr>
-              <a:t> </a:t>
-            </a:r>
-            <a:r>
-              <a:rPr lang="en-US" sz="1800" i="1" dirty="0">
-                <a:latin typeface="Calibri" panose="020F0502020204030204" pitchFamily="34" charset="0"/>
-                <a:ea typeface="Calibri" panose="020F0502020204030204" pitchFamily="34" charset="0"/>
-                <a:cs typeface="Calibri" panose="020F0502020204030204" pitchFamily="34" charset="0"/>
-              </a:rPr>
-              <a:t>10</a:t>
-            </a:r>
-            <a:r>
-              <a:rPr lang="en-US" sz="1800" dirty="0">
-                <a:latin typeface="Calibri" panose="020F0502020204030204" pitchFamily="34" charset="0"/>
-                <a:ea typeface="Calibri" panose="020F0502020204030204" pitchFamily="34" charset="0"/>
-                <a:cs typeface="Calibri" panose="020F0502020204030204" pitchFamily="34" charset="0"/>
-              </a:rPr>
-              <a:t> (6), 4329-4335. DOI: 10.1021/acssensors.5c00566 </a:t>
-            </a:r>
-            <a:endParaRPr lang="en-US" sz="1800" i="1" dirty="0">
-              <a:solidFill>
-                <a:schemeClr val="dk1"/>
-              </a:solidFill>
-              <a:latin typeface="Calibri" panose="020F0502020204030204" pitchFamily="34" charset="0"/>
-              <a:ea typeface="Calibri" panose="020F0502020204030204" pitchFamily="34" charset="0"/>
-              <a:cs typeface="Calibri" panose="020F0502020204030204" pitchFamily="34" charset="0"/>
-              <a:sym typeface="Calibri"/>
-            </a:endParaRPr>
           </a:p>
         </p:txBody>
       </p:sp>
@@ -11804,298 +11592,90 @@
           </a:ln>
         </p:spPr>
       </p:pic>
-      <mc:AlternateContent xmlns:mc="http://schemas.openxmlformats.org/markup-compatibility/2006">
-        <mc:Choice xmlns:a14="http://schemas.microsoft.com/office/drawing/2010/main" Requires="a14">
-          <p:sp>
-            <p:nvSpPr>
-              <p:cNvPr id="98" name="Google Shape;98;p13"/>
-              <p:cNvSpPr txBox="1"/>
-              <p:nvPr/>
-            </p:nvSpPr>
-            <p:spPr>
-              <a:xfrm>
-                <a:off x="768813" y="4871735"/>
-                <a:ext cx="11430000" cy="13608790"/>
-              </a:xfrm>
-              <a:prstGeom prst="rect">
-                <a:avLst/>
-              </a:prstGeom>
-              <a:noFill/>
-              <a:ln>
-                <a:noFill/>
-              </a:ln>
-            </p:spPr>
-            <p:txBody>
-              <a:bodyPr spcFirstLastPara="1" wrap="square" lIns="76200" tIns="76200" rIns="76200" bIns="76200" anchor="t" anchorCtr="0">
-                <a:spAutoFit/>
-              </a:bodyPr>
-              <a:lstStyle/>
-              <a:p>
-                <a:pPr algn="just">
-                  <a:spcAft>
-                    <a:spcPts val="1000"/>
-                  </a:spcAft>
-                  <a:buClr>
-                    <a:schemeClr val="dk1"/>
-                  </a:buClr>
-                  <a:buSzPts val="1100"/>
-                </a:pPr>
-                <a:r>
-                  <a:rPr kumimoji="0" lang="en-US" sz="4333" b="1" i="0" u="none" strike="noStrike" kern="0" cap="none" spc="0" normalizeH="0" baseline="0" noProof="0" dirty="0">
-                    <a:ln>
-                      <a:noFill/>
-                    </a:ln>
-                    <a:solidFill>
-                      <a:srgbClr val="595959"/>
-                    </a:solidFill>
-                    <a:effectLst/>
-                    <a:uLnTx/>
-                    <a:uFillTx/>
-                    <a:latin typeface="Calibri"/>
-                    <a:ea typeface="Calibri"/>
-                    <a:cs typeface="Calibri"/>
-                    <a:sym typeface="Calibri"/>
-                  </a:rPr>
-                  <a:t>ABSTRACT</a:t>
-                </a:r>
-                <a:endParaRPr lang="en-US" sz="2600" dirty="0">
-                  <a:latin typeface="Calibri"/>
-                  <a:ea typeface="Calibri"/>
-                  <a:cs typeface="Calibri"/>
-                  <a:sym typeface="Calibri"/>
-                </a:endParaRPr>
-              </a:p>
-              <a:p>
-                <a:pPr algn="just">
-                  <a:spcAft>
-                    <a:spcPts val="1000"/>
-                  </a:spcAft>
-                  <a:buClr>
-                    <a:schemeClr val="dk1"/>
-                  </a:buClr>
-                  <a:buSzPts val="1100"/>
-                </a:pPr>
-                <a:r>
-                  <a:rPr lang="en-US" sz="2600" dirty="0">
-                    <a:latin typeface="Calibri"/>
-                    <a:ea typeface="Calibri"/>
-                    <a:cs typeface="Calibri"/>
-                    <a:sym typeface="Calibri"/>
-                  </a:rPr>
-                  <a:t>Low-cost sensors for measuring common air pollutants have made urban air quality research possible at high spatial and temporal resolution. This high-resolution data can be used to identify air quality events and trends at scales that are impractical for expensive reference-grade instruments to measure, however calibration of low-cost sensors remains challenging. Sensor applications in large distributed air quality monitoring networks further complicate calibration needs – laboratory calibration has been shown to translate poorly after sensor deployment and requires downtime for every sensor in the network, and in situ gas calibration requires frequent site visits to account for seasonal interferences to sensor measurements. </a:t>
-                </a:r>
-                <a:r>
-                  <a:rPr lang="en-US" sz="2600" dirty="0" err="1">
-                    <a:latin typeface="Calibri"/>
-                    <a:ea typeface="Calibri"/>
-                    <a:cs typeface="Calibri"/>
-                    <a:sym typeface="Calibri"/>
-                  </a:rPr>
-                  <a:t>Alphasense</a:t>
-                </a:r>
-                <a:r>
-                  <a:rPr lang="en-US" sz="2600" dirty="0">
-                    <a:latin typeface="Calibri"/>
-                    <a:ea typeface="Calibri"/>
-                    <a:cs typeface="Calibri"/>
-                    <a:sym typeface="Calibri"/>
-                  </a:rPr>
-                  <a:t> electrochemical gas sensors are also known to be cross-sensitive to temperature and relative humidity, which are seasonally-dependent and can cause poor sensor performance, especially in summer months, and induce drift over time.</a:t>
-                </a:r>
-              </a:p>
-              <a:p>
-                <a:pPr algn="just">
-                  <a:spcAft>
-                    <a:spcPts val="1000"/>
-                  </a:spcAft>
-                  <a:buClr>
-                    <a:schemeClr val="dk1"/>
-                  </a:buClr>
-                  <a:buSzPts val="1100"/>
-                </a:pPr>
-                <a:r>
-                  <a:rPr lang="en-US" sz="2600" dirty="0">
-                    <a:latin typeface="Calibri"/>
-                    <a:ea typeface="Calibri"/>
-                    <a:cs typeface="Calibri"/>
-                    <a:sym typeface="Calibri"/>
-                  </a:rPr>
-                  <a:t>This project seeks to characterize the reliability of carbon monoxide sensors in the Breathe Providence air quality monitoring network using distributed methods. The Breathe Providence Network contains twenty-five </a:t>
-                </a:r>
-                <a:r>
-                  <a:rPr lang="en-US" sz="2600" dirty="0">
-                    <a:solidFill>
-                      <a:schemeClr val="dk1"/>
-                    </a:solidFill>
-                    <a:latin typeface="Calibri"/>
-                    <a:ea typeface="Calibri"/>
-                    <a:cs typeface="Calibri"/>
-                    <a:sym typeface="Calibri"/>
-                  </a:rPr>
-                  <a:t>Berkeley Environmental Air-quality and </a:t>
-                </a:r>
-                <a14:m>
-                  <m:oMath xmlns:m="http://schemas.openxmlformats.org/officeDocument/2006/math">
-                    <m:sSub>
-                      <m:sSubPr>
-                        <m:ctrlPr>
-                          <a:rPr lang="en-US" sz="2600">
-                            <a:solidFill>
-                              <a:schemeClr val="dk1"/>
-                            </a:solidFill>
-                            <a:latin typeface="Cambria Math" panose="02040503050406030204" pitchFamily="18" charset="0"/>
-                            <a:ea typeface="Calibri"/>
-                            <a:cs typeface="Calibri"/>
-                            <a:sym typeface="Calibri"/>
-                          </a:rPr>
-                        </m:ctrlPr>
-                      </m:sSubPr>
-                      <m:e>
-                        <m:r>
-                          <m:rPr>
-                            <m:nor/>
-                          </m:rPr>
-                          <a:rPr lang="en-US" sz="2600">
-                            <a:solidFill>
-                              <a:schemeClr val="dk1"/>
-                            </a:solidFill>
-                            <a:latin typeface="Cambria Math" panose="02040503050406030204" pitchFamily="18" charset="0"/>
-                            <a:ea typeface="Calibri"/>
-                            <a:cs typeface="Calibri"/>
-                            <a:sym typeface="Calibri"/>
-                          </a:rPr>
-                          <m:t>CO</m:t>
-                        </m:r>
-                      </m:e>
-                      <m:sub>
-                        <m:r>
-                          <a:rPr lang="en-US" sz="2600" i="0">
-                            <a:solidFill>
-                              <a:schemeClr val="dk1"/>
-                            </a:solidFill>
-                            <a:latin typeface="Cambria Math" panose="02040503050406030204" pitchFamily="18" charset="0"/>
-                            <a:ea typeface="Calibri"/>
-                            <a:cs typeface="Calibri"/>
-                            <a:sym typeface="Calibri"/>
-                          </a:rPr>
-                          <m:t>2</m:t>
-                        </m:r>
-                      </m:sub>
-                    </m:sSub>
-                  </m:oMath>
-                </a14:m>
-                <a:r>
-                  <a:rPr lang="en-US" sz="2600" dirty="0">
-                    <a:solidFill>
-                      <a:schemeClr val="dk1"/>
-                    </a:solidFill>
-                    <a:latin typeface="Calibri"/>
-                    <a:ea typeface="Calibri"/>
-                    <a:cs typeface="Calibri"/>
-                    <a:sym typeface="Calibri"/>
-                  </a:rPr>
-                  <a:t> Network (BEACO2N) </a:t>
-                </a:r>
-                <a:r>
-                  <a:rPr lang="en-US" sz="2600" dirty="0">
-                    <a:latin typeface="Calibri"/>
-                    <a:ea typeface="Calibri"/>
-                    <a:cs typeface="Calibri"/>
-                    <a:sym typeface="Calibri"/>
-                  </a:rPr>
-                  <a:t>monitoring stations, which in turn each contain an </a:t>
-                </a:r>
-                <a:r>
-                  <a:rPr lang="en-US" sz="2600" dirty="0" err="1">
-                    <a:latin typeface="Calibri"/>
-                    <a:ea typeface="Calibri"/>
-                    <a:cs typeface="Calibri"/>
-                    <a:sym typeface="Calibri"/>
-                  </a:rPr>
-                  <a:t>Alphasense</a:t>
-                </a:r>
-                <a:r>
-                  <a:rPr lang="en-US" sz="2600" dirty="0">
-                    <a:latin typeface="Calibri"/>
-                    <a:ea typeface="Calibri"/>
-                    <a:cs typeface="Calibri"/>
-                    <a:sym typeface="Calibri"/>
-                  </a:rPr>
-                  <a:t> CO-B4 electrochemical carbon monoxide sensor. Existing methods for characterizing the reliability of these low-cost sensors rely extensively on simultaneous reference observations and residual statistics, however availability of reference data from Environmental Protection Agency monitoring stations is limited in the City of Providence. Therefore, in addition to calculating residual statistics, the probability density function (PDF) of measurement and reference observations is approximated for each month since sensor deployment. When reference‑grade observations are not available, sensor data from the first year of sensor deployment is treated as reference. </a:t>
-                </a:r>
-                <a:r>
-                  <a:rPr lang="en-US" sz="2600" i="1" dirty="0">
-                    <a:latin typeface="Calibri"/>
-                    <a:ea typeface="Calibri"/>
-                    <a:cs typeface="Calibri"/>
-                    <a:sym typeface="Calibri"/>
-                  </a:rPr>
-                  <a:t>F</a:t>
-                </a:r>
-                <a:r>
-                  <a:rPr lang="en-US" sz="2600" dirty="0">
-                    <a:latin typeface="Calibri"/>
-                    <a:ea typeface="Calibri"/>
-                    <a:cs typeface="Calibri"/>
-                    <a:sym typeface="Calibri"/>
-                  </a:rPr>
-                  <a:t>-Divergences of reference and measurement distributions are then calculated and interpreted as an indication of drift. Since low-cost gas sensors are thought to be unreliable at high temperature or relative humidity values, we compare residual correlation and PDF divergence with and without a meteorological filter which excludes observations at Temp &gt; 30°C and RH &gt; 0.75. This method is applied to a BEACO2N sensor with published reliability statistics as a control experiment.</a:t>
-                </a:r>
-              </a:p>
-            </p:txBody>
-          </p:sp>
-        </mc:Choice>
-        <mc:Fallback>
-          <p:sp>
-            <p:nvSpPr>
-              <p:cNvPr id="98" name="Google Shape;98;p13"/>
-              <p:cNvSpPr txBox="1">
-                <a:spLocks noRot="1" noChangeAspect="1" noMove="1" noResize="1" noEditPoints="1" noAdjustHandles="1" noChangeArrowheads="1" noChangeShapeType="1" noTextEdit="1"/>
-              </p:cNvSpPr>
-              <p:nvPr/>
-            </p:nvSpPr>
-            <p:spPr>
-              <a:xfrm>
-                <a:off x="768813" y="4871735"/>
-                <a:ext cx="11430000" cy="13608790"/>
-              </a:xfrm>
-              <a:prstGeom prst="rect">
-                <a:avLst/>
-              </a:prstGeom>
-              <a:blipFill>
-                <a:blip r:embed="rId4"/>
-                <a:stretch>
-                  <a:fillRect l="-2240" t="-672" r="-1120"/>
-                </a:stretch>
-              </a:blipFill>
-              <a:ln>
-                <a:noFill/>
-              </a:ln>
-            </p:spPr>
-            <p:txBody>
-              <a:bodyPr/>
-              <a:lstStyle/>
-              <a:p>
-                <a:r>
-                  <a:rPr lang="en-US">
-                    <a:noFill/>
-                  </a:rPr>
-                  <a:t> </a:t>
-                </a:r>
-              </a:p>
-            </p:txBody>
-          </p:sp>
-        </mc:Fallback>
-      </mc:AlternateContent>
       <p:sp>
         <p:nvSpPr>
-          <p:cNvPr id="99" name="Google Shape;99;p13"/>
-          <p:cNvSpPr txBox="1"/>
+          <p:cNvPr id="98" name="Google Shape;98;p13"/>
+          <p:cNvSpPr txBox="1">
+            <a:spLocks/>
+          </p:cNvSpPr>
           <p:nvPr/>
         </p:nvSpPr>
         <p:spPr>
           <a:xfrm>
-            <a:off x="699825" y="22328587"/>
+            <a:off x="914400" y="4572000"/>
+            <a:ext cx="11430000" cy="8550995"/>
+          </a:xfrm>
+          <a:prstGeom prst="rect">
+            <a:avLst/>
+          </a:prstGeom>
+          <a:noFill/>
+          <a:ln>
+            <a:noFill/>
+          </a:ln>
+        </p:spPr>
+        <p:txBody>
+          <a:bodyPr spcFirstLastPara="1" wrap="square" lIns="91440" tIns="76200" rIns="182880" bIns="76200" anchor="t" anchorCtr="0">
+            <a:spAutoFit/>
+          </a:bodyPr>
+          <a:lstStyle/>
+          <a:p>
+            <a:pPr algn="just">
+              <a:spcAft>
+                <a:spcPts val="1000"/>
+              </a:spcAft>
+              <a:buClr>
+                <a:schemeClr val="dk1"/>
+              </a:buClr>
+              <a:buSzPts val="1100"/>
+            </a:pPr>
+            <a:r>
+              <a:rPr kumimoji="0" lang="en-US" sz="4333" b="1" i="0" u="none" strike="noStrike" kern="0" cap="none" spc="0" normalizeH="0" baseline="0" noProof="0" dirty="0">
+                <a:ln>
+                  <a:noFill/>
+                </a:ln>
+                <a:solidFill>
+                  <a:srgbClr val="595959"/>
+                </a:solidFill>
+                <a:effectLst/>
+                <a:uLnTx/>
+                <a:uFillTx/>
+                <a:latin typeface="Calibri"/>
+                <a:ea typeface="Calibri"/>
+                <a:cs typeface="Calibri"/>
+                <a:sym typeface="Calibri"/>
+              </a:rPr>
+              <a:t>ABSTRACT</a:t>
+            </a:r>
+            <a:endParaRPr lang="en-US" sz="2600" dirty="0">
+              <a:latin typeface="Calibri"/>
+              <a:ea typeface="Calibri"/>
+              <a:cs typeface="Calibri"/>
+              <a:sym typeface="Calibri"/>
+            </a:endParaRPr>
+          </a:p>
+          <a:p>
+            <a:pPr algn="just"/>
+            <a:r>
+              <a:rPr lang="en-US" sz="2600" dirty="0">
+                <a:latin typeface="Calibri"/>
+                <a:cs typeface="Calibri"/>
+              </a:rPr>
+              <a:t>Low-cost sensors for measuring common air pollutants have made urban air quality research possible at high spatial and temporal resolution. This high-resolution data can be used to identify air quality events and trends at scales that are impractical for expensive reference-grade instruments to measure, however calibration of low­ cost sensors remains challenging. Sensor applications in large distributed air quality monitoring networks further complicate calibration needs — laboratory calibration translates poorly after sensor deployment and requires downtime for every sensor in the network, and in situ gas calibration requires frequent site visits to account for seasonal interferences to sensor measurements. The Breathe Providence Network maintains 25 air quality sensors measuring air quality at an intra-urban scale in effort to support understanding of air quality exposure and health impacts in Rhode Island. To meet the project’s goals, the data collected from these air quality sensors must be deemed reliable based on calibrations against reference data (i.e. Environmental Protection Agency approved monitoring) and an understanding of the low-cost sensors’ behavior over time. However, there is limited reference-grade data available in RI, with only one major reference site located in East Providence, RI. This project examines methods for characterizing sensor reliability and develops a framework that can be applied to the Breathe Providence network’s variety of gas and particle phase data.</a:t>
+            </a:r>
+          </a:p>
+        </p:txBody>
+      </p:sp>
+      <p:sp>
+        <p:nvSpPr>
+          <p:cNvPr id="99" name="Google Shape;99;p13"/>
+          <p:cNvSpPr txBox="1">
+            <a:spLocks noGrp="1" noRot="1" noMove="1" noResize="1" noEditPoints="1" noAdjustHandles="1" noChangeArrowheads="1" noChangeShapeType="1"/>
+          </p:cNvSpPr>
+          <p:nvPr/>
+        </p:nvSpPr>
+        <p:spPr>
+          <a:xfrm>
+            <a:off x="914400" y="22494240"/>
             <a:ext cx="11430000" cy="3706440"/>
           </a:xfrm>
           <a:prstGeom prst="rect">
@@ -12107,7 +11687,7 @@
           </a:ln>
         </p:spPr>
         <p:txBody>
-          <a:bodyPr spcFirstLastPara="1" wrap="square" lIns="76188" tIns="76188" rIns="76188" bIns="76188" anchor="t" anchorCtr="0">
+          <a:bodyPr spcFirstLastPara="1" wrap="square" lIns="91440" tIns="76188" rIns="182880" bIns="76188" anchor="t" anchorCtr="0">
             <a:spAutoFit/>
           </a:bodyPr>
           <a:lstStyle/>
@@ -12233,13 +11813,15 @@
       <p:sp>
         <p:nvSpPr>
           <p:cNvPr id="100" name="Google Shape;100;p13"/>
-          <p:cNvSpPr txBox="1"/>
+          <p:cNvSpPr txBox="1">
+            <a:spLocks noGrp="1" noRot="1" noMove="1" noResize="1" noEditPoints="1" noAdjustHandles="1" noChangeArrowheads="1" noChangeShapeType="1"/>
+          </p:cNvSpPr>
           <p:nvPr/>
         </p:nvSpPr>
         <p:spPr>
           <a:xfrm>
-            <a:off x="12799516" y="14611643"/>
-            <a:ext cx="10781250" cy="9356383"/>
+            <a:off x="12893040" y="14630400"/>
+            <a:ext cx="10781250" cy="9756493"/>
           </a:xfrm>
           <a:prstGeom prst="rect">
             <a:avLst/>
@@ -12250,16 +11832,27 @@
           </a:ln>
         </p:spPr>
         <p:txBody>
-          <a:bodyPr spcFirstLastPara="1" wrap="square" lIns="76188" tIns="76188" rIns="76188" bIns="76188" anchor="t" anchorCtr="0">
+          <a:bodyPr spcFirstLastPara="1" wrap="square" lIns="91440" tIns="76188" rIns="91440" bIns="76188" anchor="t" anchorCtr="0">
             <a:spAutoFit/>
           </a:bodyPr>
           <a:lstStyle/>
           <a:p>
-            <a:pPr algn="just">
-              <a:buClr>
-                <a:schemeClr val="dk1"/>
-              </a:buClr>
-              <a:buSzPts val="1100"/>
+            <a:pPr algn="just"/>
+            <a:r>
+              <a:rPr lang="en-US" sz="2600" dirty="0">
+                <a:solidFill>
+                  <a:schemeClr val="dk1"/>
+                </a:solidFill>
+                <a:latin typeface="Calibri"/>
+                <a:cs typeface="Calibri"/>
+              </a:rPr>
+              <a:t>The sensor hubs used in the Breathe Providence Network (BEACO2N nodes) have been similarly deployed in Berkeley, CA for more than 5 years. As an experimental control, we first examine reliability statistics for a common pollutant (carbon monoxide, CO) for a reference site (Richmond Field Station, RFS). Existing reliability statistics for this sensor are published by Winter et. al. [1], which allows us to build confidence in this methodological approach. </a:t>
+            </a:r>
+          </a:p>
+          <a:p>
+            <a:pPr marL="457200" indent="-457200" algn="just" fontAlgn="base">
+              <a:buFont typeface="Arial" panose="020B0604020202020204" pitchFamily="34" charset="0"/>
+              <a:buChar char="•"/>
             </a:pPr>
             <a:r>
               <a:rPr lang="en-US" sz="2600" dirty="0">
@@ -12267,36 +11860,91 @@
                   <a:schemeClr val="dk1"/>
                 </a:solidFill>
                 <a:latin typeface="Calibri"/>
-                <a:ea typeface="Calibri"/>
                 <a:cs typeface="Calibri"/>
-                <a:sym typeface="Calibri"/>
               </a:rPr>
-              <a:t>As an experimental control, we first examine reliability statistics for BEACO2N @ Richmond Field Station (RFS), Berkeley CA; existing reliability statistics for this sensor are published by Winter et. al. [1], which allows us to be confident in the true reliability state of the sensor. Time series correlation statistics are plotted over duration of deployment for the sensor. We find strong residual correlation with reference for this particular sensor over time, however we seek a reliability characterization method that relies minimally on simultaneous reference observations. We therefore estimate the probability density function (PDF) of sensor observations for each month of deployment and characterize the divergence between reference and measurement distributions using </a:t>
+              <a:t>Time series correlation statistics indicate the RFS BEACO2N sensor remains strongly correlated with collocated reference measurements throughout the sensor’s deployment, with expected seasonal variability.</a:t>
             </a:r>
-            <a:r>
-              <a:rPr lang="en-US" sz="2600" dirty="0" err="1">
-                <a:solidFill>
-                  <a:schemeClr val="dk1"/>
-                </a:solidFill>
-                <a:latin typeface="Calibri"/>
-                <a:ea typeface="Calibri"/>
-                <a:cs typeface="Calibri"/>
-                <a:sym typeface="Calibri"/>
-              </a:rPr>
-              <a:t>Kullback</a:t>
-            </a:r>
+          </a:p>
+          <a:p>
+            <a:pPr marL="457200" indent="-457200" algn="just" fontAlgn="base">
+              <a:buFont typeface="Arial" panose="020B0604020202020204" pitchFamily="34" charset="0"/>
+              <a:buChar char="•"/>
+            </a:pPr>
             <a:r>
               <a:rPr lang="en-US" sz="2600" dirty="0">
                 <a:solidFill>
                   <a:schemeClr val="dk1"/>
                 </a:solidFill>
                 <a:latin typeface="Calibri"/>
-                <a:ea typeface="Calibri"/>
                 <a:cs typeface="Calibri"/>
-                <a:sym typeface="Calibri"/>
               </a:rPr>
-              <a:t>-Liebler, Hellinger, and Euclidean divergences. PDFs are estimated via a discrete histogram approximation with bin width set to 0.05 ppm; this approximation granularity was found to be necessary to reduce sensor noise uptake in the distribution estimation and to prevent floating-point arithmetic underflow. Since low-cost sensors are likely to be inaccurate at high temperature and relative humidity values, we compare residual correlation and PDF divergence with and without a meteorological filter which excludes observations at Temp &gt; 30°C and RH &gt; 0.75. We also compare trends in divergence when the first 12 months of the sensor’s operation are treated as reference distributions. We find that there is no significant trend in divergence when the source of reference data is either external or internal, however we find some evidence of information loss after meteorological filtering.</a:t>
+              <a:t>Limited reference data availability in RI requires that we seek a reliability characterization method that relies minimally on simultaneous reference observations.</a:t>
             </a:r>
+          </a:p>
+          <a:p>
+            <a:pPr marL="457200" indent="-457200" algn="just" fontAlgn="base">
+              <a:buFont typeface="Arial" panose="020B0604020202020204" pitchFamily="34" charset="0"/>
+              <a:buChar char="•"/>
+            </a:pPr>
+            <a:r>
+              <a:rPr lang="en-US" sz="2600" dirty="0">
+                <a:solidFill>
+                  <a:schemeClr val="dk1"/>
+                </a:solidFill>
+                <a:latin typeface="Calibri"/>
+                <a:cs typeface="Calibri"/>
+              </a:rPr>
+              <a:t>We therefore characterize the divergence between reference and measurement distributions using Kullback-Liebler, Hellinger, and Euclidean divergences. </a:t>
+            </a:r>
+          </a:p>
+          <a:p>
+            <a:pPr marL="457200" indent="-457200" algn="just" fontAlgn="base">
+              <a:buFont typeface="Arial" panose="020B0604020202020204" pitchFamily="34" charset="0"/>
+              <a:buChar char="•"/>
+            </a:pPr>
+            <a:r>
+              <a:rPr lang="en-US" sz="2600" dirty="0">
+                <a:solidFill>
+                  <a:schemeClr val="dk1"/>
+                </a:solidFill>
+                <a:latin typeface="Calibri"/>
+                <a:cs typeface="Calibri"/>
+              </a:rPr>
+              <a:t>Probability density functions (PDFs) are estimated via a discrete histogram approximation (bin width=0.05 ppm) for every month since the sensor’s deployment.</a:t>
+            </a:r>
+          </a:p>
+          <a:p>
+            <a:pPr marL="457200" indent="-457200" algn="just" fontAlgn="base">
+              <a:buFont typeface="Arial" panose="020B0604020202020204" pitchFamily="34" charset="0"/>
+              <a:buChar char="•"/>
+            </a:pPr>
+            <a:r>
+              <a:rPr lang="en-US" sz="2600" dirty="0">
+                <a:solidFill>
+                  <a:schemeClr val="dk1"/>
+                </a:solidFill>
+                <a:latin typeface="Calibri"/>
+                <a:cs typeface="Calibri"/>
+              </a:rPr>
+              <a:t>Low-cost sensors are sensitive to high temperature and relative humidity, thus we compare residual correlation and PDF divergence with and without a meteorological filter which excludes observations at Temp &gt; 30°C and RH &gt; 0.75. However, we find evidence of information loss after meteorological filtering.</a:t>
+            </a:r>
+          </a:p>
+          <a:p>
+            <a:pPr algn="just">
+              <a:buClr>
+                <a:schemeClr val="dk1"/>
+              </a:buClr>
+              <a:buSzPts val="1100"/>
+            </a:pPr>
+            <a:endParaRPr lang="en-US" sz="2600" dirty="0">
+              <a:solidFill>
+                <a:schemeClr val="dk1"/>
+              </a:solidFill>
+              <a:latin typeface="Calibri"/>
+              <a:ea typeface="Calibri"/>
+              <a:cs typeface="Calibri"/>
+              <a:sym typeface="Calibri"/>
+            </a:endParaRPr>
           </a:p>
         </p:txBody>
       </p:sp>
@@ -12307,7 +11955,7 @@
           <p:nvPr/>
         </p:nvPicPr>
         <p:blipFill rotWithShape="1">
-          <a:blip r:embed="rId5">
+          <a:blip r:embed="rId4">
             <a:alphaModFix/>
           </a:blip>
           <a:srcRect l="31778" t="6009" r="31090" b="19284"/>
@@ -12367,13 +12015,15 @@
       <p:sp>
         <p:nvSpPr>
           <p:cNvPr id="114" name="Google Shape;114;p13"/>
-          <p:cNvSpPr txBox="1"/>
+          <p:cNvSpPr txBox="1">
+            <a:spLocks noGrp="1" noRot="1" noMove="1" noResize="1" noEditPoints="1" noAdjustHandles="1" noChangeArrowheads="1" noChangeShapeType="1"/>
+          </p:cNvSpPr>
           <p:nvPr/>
         </p:nvSpPr>
         <p:spPr>
           <a:xfrm>
-            <a:off x="12799516" y="13289121"/>
-            <a:ext cx="10703250" cy="1282122"/>
+            <a:off x="12893040" y="13258800"/>
+            <a:ext cx="10703250" cy="1246483"/>
           </a:xfrm>
           <a:prstGeom prst="rect">
             <a:avLst/>
@@ -12384,7 +12034,7 @@
           </a:ln>
         </p:spPr>
         <p:txBody>
-          <a:bodyPr spcFirstLastPara="1" wrap="square" lIns="76188" tIns="76188" rIns="76188" bIns="76188" anchor="t" anchorCtr="0">
+          <a:bodyPr spcFirstLastPara="1" wrap="square" lIns="91440" tIns="0" rIns="91440" bIns="76188" anchor="t" anchorCtr="0">
             <a:spAutoFit/>
           </a:bodyPr>
           <a:lstStyle/>
@@ -12396,7 +12046,7 @@
               <a:buSzPts val="1100"/>
             </a:pPr>
             <a:r>
-              <a:rPr lang="en-US" sz="1833" i="1" dirty="0">
+              <a:rPr lang="en-US" sz="1900" i="1" dirty="0">
                 <a:solidFill>
                   <a:schemeClr val="dk1"/>
                 </a:solidFill>
@@ -12416,7 +12066,7 @@
               <a:buSzPts val="1100"/>
             </a:pPr>
             <a:r>
-              <a:rPr lang="en-US" sz="1833" i="1" u="sng" dirty="0">
+              <a:rPr lang="en-US" sz="1900" i="1" u="sng" dirty="0">
                 <a:solidFill>
                   <a:schemeClr val="dk1"/>
                 </a:solidFill>
@@ -12428,7 +12078,7 @@
               <a:t>Left</a:t>
             </a:r>
             <a:r>
-              <a:rPr lang="en-US" sz="1833" i="1" dirty="0">
+              <a:rPr lang="en-US" sz="1900" i="1" dirty="0">
                 <a:solidFill>
                   <a:schemeClr val="dk1"/>
                 </a:solidFill>
@@ -12448,7 +12098,7 @@
               <a:buSzPts val="1100"/>
             </a:pPr>
             <a:r>
-              <a:rPr lang="en-US" sz="1833" i="1" u="sng" dirty="0">
+              <a:rPr lang="en-US" sz="1900" i="1" u="sng" dirty="0">
                 <a:solidFill>
                   <a:schemeClr val="dk1"/>
                 </a:solidFill>
@@ -12460,7 +12110,7 @@
               <a:t>Top Right</a:t>
             </a:r>
             <a:r>
-              <a:rPr lang="en-US" sz="1833" i="1" dirty="0">
+              <a:rPr lang="en-US" sz="1900" i="1" dirty="0">
                 <a:solidFill>
                   <a:schemeClr val="dk1"/>
                 </a:solidFill>
@@ -12480,7 +12130,7 @@
               <a:buSzPts val="1100"/>
             </a:pPr>
             <a:r>
-              <a:rPr lang="en-US" sz="1833" i="1" u="sng" dirty="0">
+              <a:rPr lang="en-US" sz="1900" i="1" u="sng" dirty="0">
                 <a:solidFill>
                   <a:schemeClr val="dk1"/>
                 </a:solidFill>
@@ -12492,7 +12142,7 @@
               <a:t>Bottom Right</a:t>
             </a:r>
             <a:r>
-              <a:rPr lang="en-US" sz="1833" i="1" dirty="0">
+              <a:rPr lang="en-US" sz="1900" i="1" dirty="0">
                 <a:solidFill>
                   <a:schemeClr val="dk1"/>
                 </a:solidFill>
@@ -12579,12 +12229,14 @@
               </a:ext>
             </a:extLst>
           </p:cNvPr>
-          <p:cNvSpPr txBox="1"/>
+          <p:cNvSpPr txBox="1">
+            <a:spLocks noGrp="1" noRot="1" noMove="1" noResize="1" noEditPoints="1" noAdjustHandles="1" noChangeArrowheads="1" noChangeShapeType="1"/>
+          </p:cNvSpPr>
           <p:nvPr/>
         </p:nvSpPr>
         <p:spPr>
           <a:xfrm>
-            <a:off x="12799516" y="4871735"/>
+            <a:off x="12799516" y="4800600"/>
             <a:ext cx="10781250" cy="762000"/>
           </a:xfrm>
           <a:prstGeom prst="rect">
@@ -12646,8 +12298,8 @@
         </p:nvSpPr>
         <p:spPr>
           <a:xfrm>
-            <a:off x="24422881" y="5989243"/>
-            <a:ext cx="11308458" cy="8412559"/>
+            <a:off x="24414480" y="4572000"/>
+            <a:ext cx="11308458" cy="9207585"/>
           </a:xfrm>
           <a:prstGeom prst="rect">
             <a:avLst/>
@@ -12658,10 +12310,55 @@
           </a:ln>
         </p:spPr>
         <p:txBody>
-          <a:bodyPr spcFirstLastPara="1" wrap="square" lIns="76200" tIns="76200" rIns="76200" bIns="76200" anchor="t" anchorCtr="0">
+          <a:bodyPr spcFirstLastPara="1" wrap="square" lIns="91440" tIns="76200" rIns="91440" bIns="76200" anchor="t" anchorCtr="0">
             <a:spAutoFit/>
           </a:bodyPr>
           <a:lstStyle/>
+          <a:p>
+            <a:pPr marL="0" marR="0" lvl="0" indent="0" algn="l" defTabSz="914400" rtl="0" eaLnBrk="1" fontAlgn="auto" latinLnBrk="0" hangingPunct="1">
+              <a:lnSpc>
+                <a:spcPct val="100000"/>
+              </a:lnSpc>
+              <a:spcBef>
+                <a:spcPts val="0"/>
+              </a:spcBef>
+              <a:spcAft>
+                <a:spcPts val="1000"/>
+              </a:spcAft>
+              <a:buClr>
+                <a:srgbClr val="000000"/>
+              </a:buClr>
+              <a:buSzTx/>
+              <a:buFont typeface="Arial"/>
+              <a:buNone/>
+              <a:tabLst/>
+              <a:defRPr/>
+            </a:pPr>
+            <a:r>
+              <a:rPr kumimoji="0" lang="en-US" sz="4333" b="1" i="0" u="none" strike="noStrike" kern="0" cap="none" spc="0" normalizeH="0" baseline="0" noProof="0" dirty="0">
+                <a:ln>
+                  <a:noFill/>
+                </a:ln>
+                <a:solidFill>
+                  <a:srgbClr val="595959"/>
+                </a:solidFill>
+                <a:effectLst/>
+                <a:uLnTx/>
+                <a:uFillTx/>
+                <a:latin typeface="Calibri"/>
+                <a:ea typeface="Calibri"/>
+                <a:cs typeface="Calibri"/>
+                <a:sym typeface="Calibri"/>
+              </a:rPr>
+              <a:t>RESULTS AND DISCUSSION</a:t>
+            </a:r>
+            <a:endParaRPr lang="en-US" sz="2600" dirty="0">
+              <a:latin typeface="Calibri"/>
+              <a:ea typeface="Calibri"/>
+              <a:cs typeface="Calibri"/>
+              <a:sym typeface="Calibri"/>
+            </a:endParaRPr>
+          </a:p>
           <a:p>
             <a:pPr algn="just">
               <a:spcAft>
@@ -12679,7 +12376,7 @@
                 <a:cs typeface="Calibri"/>
                 <a:sym typeface="Calibri"/>
               </a:rPr>
-              <a:t>Across the Breathe Providence network, we find that CO sensors do not exhibit significant trends in divergence from external or internal reference distributions with or without meteorological filtering; standard deviation of measurement distributions exhibit seasonal variation but do not exhibit long term trends for any CO sensors in the network. This finding does not necessarily affirm the reliability of our sensors, but merely indicates that no significant drift was detected in the network. </a:t>
+              <a:t>Across the Breathe Providence network, we find that CO sensors do not exhibit significant trends in divergence from external or internal reference distributions with or without meteorological filtering; standard deviations of measurement distributions exhibit seasonal variation but do not exhibit long term trends for any CO sensors in the network. This finding does not necessarily affirm the reliability of our sensors, but merely indicates that no significant drift was detected in the network. </a:t>
             </a:r>
           </a:p>
           <a:p>
@@ -12717,7 +12414,16 @@
                 <a:cs typeface="Calibri"/>
                 <a:sym typeface="Calibri"/>
               </a:rPr>
-              <a:t>-Liebler (KL) divergence after meteorological filtering of either external or internal reference data. Of these 13 sensors, 6 (24% of total) exhibited an average increase in KL divergence of greater than 0.1 part per million. Only 2 sensors in the network exhibited any average decrease in KL divergence after meteorological filtering of either external or internal reference data. KL divergence is interpreted as the information lost by using a measurement distribution to approximate a reference distribution, therefore an increase in KL divergence after meteorological filtering indicates that low-cost CO sensors lose information that is captured by the reference sensor (which is also filtered) when observations during strenuous meteorological conditions are omitted. </a:t>
+              <a:t>-Liebler (KL) divergence after meteorological filtering of either external or internal reference data. Of these 13 sensors, 6 (24% of total) exhibited an average increase in KL divergence of greater than 0.1 part per million. Only 2 sensors in the network exhibited any average decrease in KL divergence after meteorological filtering of either external or internal reference data. </a:t>
+            </a:r>
+            <a:r>
+              <a:rPr lang="en-US" sz="2600" b="1" dirty="0">
+                <a:latin typeface="Calibri"/>
+                <a:ea typeface="Calibri"/>
+                <a:cs typeface="Calibri"/>
+                <a:sym typeface="Calibri"/>
+              </a:rPr>
+              <a:t>KL divergence is interpreted as the information lost by using a measurement distribution to approximate a reference distribution, therefore an increase in KL divergence after meteorological filtering indicates that low-cost CO sensors lose information that is captured by the reference sensor (which is also filtered) when observations during strenuous meteorological conditions are omitted. </a:t>
             </a:r>
           </a:p>
         </p:txBody>
@@ -12732,12 +12438,12 @@
             </a:extLst>
           </p:cNvPr>
           <p:cNvPicPr>
-            <a:picLocks noChangeAspect="1" noChangeArrowheads="1"/>
+            <a:picLocks noGrp="1" noRot="1" noChangeAspect="1" noMove="1" noResize="1" noEditPoints="1" noAdjustHandles="1" noChangeArrowheads="1" noChangeShapeType="1" noCrop="1"/>
           </p:cNvPicPr>
           <p:nvPr/>
         </p:nvPicPr>
         <p:blipFill>
-          <a:blip r:embed="rId6">
+          <a:blip r:embed="rId5">
             <a:extLst>
               <a:ext uri="{28A0092B-C50C-407E-A947-70E740481C1C}">
                 <a14:useLocalDpi xmlns:a14="http://schemas.microsoft.com/office/drawing/2010/main" val="0"/>
@@ -12751,8 +12457,8 @@
         </p:blipFill>
         <p:spPr bwMode="auto">
           <a:xfrm>
-            <a:off x="761998" y="18508662"/>
-            <a:ext cx="2655817" cy="3541088"/>
+            <a:off x="1604739" y="13533120"/>
+            <a:ext cx="2743201" cy="3657600"/>
           </a:xfrm>
           <a:prstGeom prst="rect">
             <a:avLst/>
@@ -12779,12 +12485,12 @@
             </a:extLst>
           </p:cNvPr>
           <p:cNvPicPr>
-            <a:picLocks noChangeAspect="1" noChangeArrowheads="1"/>
+            <a:picLocks noGrp="1" noRot="1" noChangeAspect="1" noMove="1" noResize="1" noEditPoints="1" noAdjustHandles="1" noChangeArrowheads="1" noChangeShapeType="1" noCrop="1"/>
           </p:cNvPicPr>
           <p:nvPr/>
         </p:nvPicPr>
         <p:blipFill>
-          <a:blip r:embed="rId7">
+          <a:blip r:embed="rId6">
             <a:extLst>
               <a:ext uri="{28A0092B-C50C-407E-A947-70E740481C1C}">
                 <a14:useLocalDpi xmlns:a14="http://schemas.microsoft.com/office/drawing/2010/main" val="0"/>
@@ -12798,7 +12504,7 @@
         </p:blipFill>
         <p:spPr bwMode="auto">
           <a:xfrm>
-            <a:off x="3665477" y="18508662"/>
+            <a:off x="5852160" y="13533120"/>
             <a:ext cx="5311633" cy="3541088"/>
           </a:xfrm>
           <a:prstGeom prst="rect">
@@ -12826,14 +12532,13 @@
             </a:extLst>
           </p:cNvPr>
           <p:cNvCxnSpPr>
-            <a:cxnSpLocks/>
-            <a:stCxn id="5" idx="2"/>
+            <a:cxnSpLocks noGrp="1" noRot="1" noMove="1" noResize="1" noEditPoints="1" noAdjustHandles="1" noChangeArrowheads="1" noChangeShapeType="1"/>
           </p:cNvCxnSpPr>
           <p:nvPr/>
         </p:nvCxnSpPr>
         <p:spPr>
           <a:xfrm flipH="1">
-            <a:off x="4837080" y="18963291"/>
+            <a:off x="7132320" y="13990320"/>
             <a:ext cx="256170" cy="820650"/>
           </a:xfrm>
           <a:prstGeom prst="straightConnector1">
@@ -12870,12 +12575,14 @@
               </a:ext>
             </a:extLst>
           </p:cNvPr>
-          <p:cNvSpPr txBox="1"/>
+          <p:cNvSpPr txBox="1">
+            <a:spLocks noGrp="1" noRot="1" noMove="1" noResize="1" noEditPoints="1" noAdjustHandles="1" noChangeArrowheads="1" noChangeShapeType="1"/>
+          </p:cNvSpPr>
           <p:nvPr/>
         </p:nvSpPr>
         <p:spPr>
           <a:xfrm>
-            <a:off x="4114291" y="18640126"/>
+            <a:off x="6492240" y="13716000"/>
             <a:ext cx="1957917" cy="323165"/>
           </a:xfrm>
           <a:prstGeom prst="rect">
@@ -12909,8 +12616,8 @@
           </a:p>
         </p:txBody>
       </p:sp>
-      <mc:AlternateContent xmlns:mc="http://schemas.openxmlformats.org/markup-compatibility/2006" xmlns:a14="http://schemas.microsoft.com/office/drawing/2010/main">
-        <mc:Choice Requires="a14">
+      <mc:AlternateContent xmlns:mc="http://schemas.openxmlformats.org/markup-compatibility/2006">
+        <mc:Choice xmlns:a14="http://schemas.microsoft.com/office/drawing/2010/main" Requires="a14">
           <p:sp>
             <p:nvSpPr>
               <p:cNvPr id="12" name="Google Shape;114;p13">
@@ -12920,13 +12627,15 @@
                   </a:ext>
                 </a:extLst>
               </p:cNvPr>
-              <p:cNvSpPr txBox="1"/>
+              <p:cNvSpPr txBox="1">
+                <a:spLocks noGrp="1" noRot="1" noMove="1" noResize="1" noEditPoints="1" noAdjustHandles="1" noChangeArrowheads="1" noChangeShapeType="1"/>
+              </p:cNvSpPr>
               <p:nvPr/>
             </p:nvSpPr>
             <p:spPr>
               <a:xfrm>
-                <a:off x="9224772" y="18571789"/>
-                <a:ext cx="2905053" cy="3256573"/>
+                <a:off x="7260405" y="17828935"/>
+                <a:ext cx="3488101" cy="4154959"/>
               </a:xfrm>
               <a:prstGeom prst="rect">
                 <a:avLst/>
@@ -12949,7 +12658,7 @@
                   <a:buSzPts val="1100"/>
                 </a:pPr>
                 <a:r>
-                  <a:rPr lang="en-US" sz="1833" i="1" u="sng" dirty="0">
+                  <a:rPr lang="en-US" sz="2000" i="1" u="sng" dirty="0">
                     <a:solidFill>
                       <a:schemeClr val="dk1"/>
                     </a:solidFill>
@@ -12958,10 +12667,10 @@
                     <a:cs typeface="Calibri"/>
                     <a:sym typeface="Calibri"/>
                   </a:rPr>
-                  <a:t>Left:</a:t>
+                  <a:t>Left</a:t>
                 </a:r>
                 <a:r>
-                  <a:rPr lang="en-US" sz="1833" i="1" dirty="0">
+                  <a:rPr lang="en-US" sz="2000" i="1" dirty="0">
                     <a:solidFill>
                       <a:schemeClr val="dk1"/>
                     </a:solidFill>
@@ -12970,14 +12679,14 @@
                     <a:cs typeface="Calibri"/>
                     <a:sym typeface="Calibri"/>
                   </a:rPr>
-                  <a:t> A deployed Berkeley Environmental Air-quality and </a:t>
+                  <a:t>: A deployed Berkeley Environmental Air-quality and </a:t>
                 </a:r>
                 <a14:m>
                   <m:oMath xmlns:m="http://schemas.openxmlformats.org/officeDocument/2006/math">
                     <m:sSub>
                       <m:sSubPr>
                         <m:ctrlPr>
-                          <a:rPr lang="en-US" sz="1833" i="1">
+                          <a:rPr lang="en-US" sz="2000" i="1">
                             <a:solidFill>
                               <a:schemeClr val="dk1"/>
                             </a:solidFill>
@@ -12993,7 +12702,7 @@
                           <m:rPr>
                             <m:nor/>
                           </m:rPr>
-                          <a:rPr lang="en-US" sz="1833">
+                          <a:rPr lang="en-US" sz="2000">
                             <a:solidFill>
                               <a:schemeClr val="dk1"/>
                             </a:solidFill>
@@ -13007,7 +12716,7 @@
                       </m:e>
                       <m:sub>
                         <m:r>
-                          <a:rPr lang="en-US" sz="1833" i="1">
+                          <a:rPr lang="en-US" sz="2000" i="1">
                             <a:solidFill>
                               <a:schemeClr val="dk1"/>
                             </a:solidFill>
@@ -13023,7 +12732,7 @@
                   </m:oMath>
                 </a14:m>
                 <a:r>
-                  <a:rPr lang="en-US" sz="1833" i="1" dirty="0">
+                  <a:rPr lang="en-US" sz="2000" i="1" dirty="0">
                     <a:solidFill>
                       <a:schemeClr val="dk1"/>
                     </a:solidFill>
@@ -13042,7 +12751,7 @@
                   </a:buClr>
                   <a:buSzPts val="1100"/>
                 </a:pPr>
-                <a:endParaRPr lang="en-US" sz="1833" i="1" dirty="0">
+                <a:endParaRPr lang="en-US" sz="2000" i="1" dirty="0">
                   <a:solidFill>
                     <a:schemeClr val="dk1"/>
                   </a:solidFill>
@@ -13060,7 +12769,7 @@
                   <a:buSzPts val="1100"/>
                 </a:pPr>
                 <a:r>
-                  <a:rPr lang="en-US" sz="1833" i="1" u="sng" dirty="0">
+                  <a:rPr lang="en-US" sz="2000" i="1" u="sng" dirty="0">
                     <a:solidFill>
                       <a:schemeClr val="dk1"/>
                     </a:solidFill>
@@ -13069,10 +12778,10 @@
                     <a:cs typeface="Calibri"/>
                     <a:sym typeface="Calibri"/>
                   </a:rPr>
-                  <a:t>Right:</a:t>
+                  <a:t>Right</a:t>
                 </a:r>
                 <a:r>
-                  <a:rPr lang="en-US" sz="1833" i="1" dirty="0">
+                  <a:rPr lang="en-US" sz="2000" i="1" dirty="0">
                     <a:solidFill>
                       <a:schemeClr val="dk1"/>
                     </a:solidFill>
@@ -13081,10 +12790,10 @@
                     <a:cs typeface="Calibri"/>
                     <a:sym typeface="Calibri"/>
                   </a:rPr>
-                  <a:t> Internal components of a BEACO2N sensor, with the </a:t>
+                  <a:t>: Internal components of a BEACO2N sensor, with the </a:t>
                 </a:r>
                 <a:r>
-                  <a:rPr lang="en-US" sz="1833" i="1" dirty="0" err="1">
+                  <a:rPr lang="en-US" sz="2000" i="1" dirty="0" err="1">
                     <a:solidFill>
                       <a:schemeClr val="dk1"/>
                     </a:solidFill>
@@ -13096,7 +12805,7 @@
                   <a:t>Alphasense</a:t>
                 </a:r>
                 <a:r>
-                  <a:rPr lang="en-US" sz="1833" i="1" dirty="0">
+                  <a:rPr lang="en-US" sz="2000" i="1" dirty="0">
                     <a:solidFill>
                       <a:schemeClr val="dk1"/>
                     </a:solidFill>
@@ -13107,7 +12816,56 @@
                   </a:rPr>
                   <a:t> CO-B4 sensor emphasized.</a:t>
                 </a:r>
-                <a:endParaRPr lang="en-US" sz="1833" i="1" u="sng" dirty="0">
+              </a:p>
+              <a:p>
+                <a:pPr>
+                  <a:buClr>
+                    <a:schemeClr val="dk1"/>
+                  </a:buClr>
+                  <a:buSzPts val="1100"/>
+                </a:pPr>
+                <a:endParaRPr lang="en-US" sz="2000" i="1" u="sng" dirty="0">
+                  <a:solidFill>
+                    <a:schemeClr val="dk1"/>
+                  </a:solidFill>
+                  <a:latin typeface="Calibri"/>
+                  <a:ea typeface="Calibri"/>
+                  <a:cs typeface="Calibri"/>
+                  <a:sym typeface="Calibri"/>
+                </a:endParaRPr>
+              </a:p>
+              <a:p>
+                <a:pPr>
+                  <a:buClr>
+                    <a:schemeClr val="dk1"/>
+                  </a:buClr>
+                  <a:buSzPts val="1100"/>
+                </a:pPr>
+                <a:r>
+                  <a:rPr lang="en-US" sz="2000" i="1" u="sng" dirty="0">
+                    <a:solidFill>
+                      <a:schemeClr val="dk1"/>
+                    </a:solidFill>
+                    <a:latin typeface="Calibri"/>
+                    <a:ea typeface="Calibri"/>
+                    <a:cs typeface="Calibri"/>
+                    <a:sym typeface="Calibri"/>
+                  </a:rPr>
+                  <a:t>Bottom</a:t>
+                </a:r>
+                <a:r>
+                  <a:rPr lang="en-US" sz="2000" i="1" dirty="0">
+                    <a:solidFill>
+                      <a:schemeClr val="dk1"/>
+                    </a:solidFill>
+                    <a:latin typeface="Calibri"/>
+                    <a:ea typeface="Calibri"/>
+                    <a:cs typeface="Calibri"/>
+                    <a:sym typeface="Calibri"/>
+                  </a:rPr>
+                  <a:t>: A map of the Breathe Providence sensor network.</a:t>
+                </a:r>
+                <a:endParaRPr lang="en-US" sz="2000" i="1" u="sng" dirty="0">
                   <a:solidFill>
                     <a:schemeClr val="dk1"/>
                   </a:solidFill>
@@ -13120,7 +12878,7 @@
             </p:txBody>
           </p:sp>
         </mc:Choice>
-        <mc:Fallback xmlns="">
+        <mc:Fallback>
           <p:sp>
             <p:nvSpPr>
               <p:cNvPr id="12" name="Google Shape;114;p13">
@@ -13131,22 +12889,22 @@
                 </a:extLst>
               </p:cNvPr>
               <p:cNvSpPr txBox="1">
-                <a:spLocks noRot="1" noChangeAspect="1" noMove="1" noResize="1" noEditPoints="1" noAdjustHandles="1" noChangeArrowheads="1" noChangeShapeType="1" noTextEdit="1"/>
+                <a:spLocks noGrp="1" noRot="1" noChangeAspect="1" noMove="1" noResize="1" noEditPoints="1" noAdjustHandles="1" noChangeArrowheads="1" noChangeShapeType="1" noTextEdit="1"/>
               </p:cNvSpPr>
               <p:nvPr/>
             </p:nvSpPr>
             <p:spPr>
               <a:xfrm>
-                <a:off x="9224772" y="18571789"/>
-                <a:ext cx="2905053" cy="3256573"/>
+                <a:off x="7260405" y="17828935"/>
+                <a:ext cx="3488101" cy="4154959"/>
               </a:xfrm>
               <a:prstGeom prst="rect">
                 <a:avLst/>
               </a:prstGeom>
               <a:blipFill>
-                <a:blip r:embed="rId8"/>
+                <a:blip r:embed="rId7"/>
                 <a:stretch>
-                  <a:fillRect l="-2609" r="-3043" b="-1167"/>
+                  <a:fillRect l="-2174" t="-306" r="-2899" b="-1223"/>
                 </a:stretch>
               </a:blipFill>
               <a:ln>
@@ -13170,66 +12928,6 @@
       </mc:AlternateContent>
       <p:pic>
         <p:nvPicPr>
-          <p:cNvPr id="13" name="Picture 12">
-            <a:extLst>
-              <a:ext uri="{FF2B5EF4-FFF2-40B4-BE49-F238E27FC236}">
-                <a16:creationId xmlns:a16="http://schemas.microsoft.com/office/drawing/2014/main" id="{F18F6249-5E37-2D7C-B7B9-D756B6835F68}"/>
-              </a:ext>
-            </a:extLst>
-          </p:cNvPr>
-          <p:cNvPicPr>
-            <a:picLocks noChangeAspect="1"/>
-          </p:cNvPicPr>
-          <p:nvPr/>
-        </p:nvPicPr>
-        <p:blipFill>
-          <a:blip r:embed="rId9"/>
-          <a:stretch>
-            <a:fillRect/>
-          </a:stretch>
-        </p:blipFill>
-        <p:spPr>
-          <a:xfrm>
-            <a:off x="18452592" y="5760720"/>
-            <a:ext cx="5120641" cy="3657600"/>
-          </a:xfrm>
-          <a:prstGeom prst="rect">
-            <a:avLst/>
-          </a:prstGeom>
-        </p:spPr>
-      </p:pic>
-      <p:pic>
-        <p:nvPicPr>
-          <p:cNvPr id="16" name="Picture 15">
-            <a:extLst>
-              <a:ext uri="{FF2B5EF4-FFF2-40B4-BE49-F238E27FC236}">
-                <a16:creationId xmlns:a16="http://schemas.microsoft.com/office/drawing/2014/main" id="{5C227AA2-6902-0698-4DC0-2E27EF908B3C}"/>
-              </a:ext>
-            </a:extLst>
-          </p:cNvPr>
-          <p:cNvPicPr>
-            <a:picLocks noChangeAspect="1"/>
-          </p:cNvPicPr>
-          <p:nvPr/>
-        </p:nvPicPr>
-        <p:blipFill>
-          <a:blip r:embed="rId10"/>
-          <a:stretch>
-            <a:fillRect/>
-          </a:stretch>
-        </p:blipFill>
-        <p:spPr>
-          <a:xfrm>
-            <a:off x="18452592" y="9418320"/>
-            <a:ext cx="5120640" cy="3657600"/>
-          </a:xfrm>
-          <a:prstGeom prst="rect">
-            <a:avLst/>
-          </a:prstGeom>
-        </p:spPr>
-      </p:pic>
-      <p:pic>
-        <p:nvPicPr>
           <p:cNvPr id="18" name="Picture 17">
             <a:extLst>
               <a:ext uri="{FF2B5EF4-FFF2-40B4-BE49-F238E27FC236}">
@@ -13238,12 +12936,12 @@
             </a:extLst>
           </p:cNvPr>
           <p:cNvPicPr>
-            <a:picLocks noChangeAspect="1"/>
+            <a:picLocks noGrp="1" noRot="1" noChangeAspect="1" noMove="1" noResize="1" noEditPoints="1" noAdjustHandles="1" noChangeArrowheads="1" noChangeShapeType="1" noCrop="1"/>
           </p:cNvPicPr>
           <p:nvPr/>
         </p:nvPicPr>
         <p:blipFill>
-          <a:blip r:embed="rId11"/>
+          <a:blip r:embed="rId8"/>
           <a:stretch>
             <a:fillRect/>
           </a:stretch>
@@ -13273,14 +12971,14 @@
           <p:nvPr/>
         </p:nvPicPr>
         <p:blipFill>
-          <a:blip r:embed="rId12"/>
+          <a:blip r:embed="rId9"/>
           <a:stretch>
             <a:fillRect/>
           </a:stretch>
         </p:blipFill>
         <p:spPr>
           <a:xfrm>
-            <a:off x="24422881" y="14325311"/>
+            <a:off x="24505920" y="13898880"/>
             <a:ext cx="5371750" cy="3836965"/>
           </a:xfrm>
           <a:prstGeom prst="rect">
@@ -13303,14 +13001,14 @@
           <p:nvPr/>
         </p:nvPicPr>
         <p:blipFill>
-          <a:blip r:embed="rId13"/>
+          <a:blip r:embed="rId10"/>
           <a:stretch>
             <a:fillRect/>
           </a:stretch>
         </p:blipFill>
         <p:spPr>
           <a:xfrm>
-            <a:off x="30077110" y="14401802"/>
+            <a:off x="29992320" y="13898880"/>
             <a:ext cx="5371750" cy="3836965"/>
           </a:xfrm>
           <a:prstGeom prst="rect">
@@ -13332,7 +13030,7 @@
         </p:nvSpPr>
         <p:spPr>
           <a:xfrm>
-            <a:off x="24422881" y="19649060"/>
+            <a:off x="24414480" y="19202400"/>
             <a:ext cx="11308458" cy="4801379"/>
           </a:xfrm>
           <a:prstGeom prst="rect">
@@ -13403,8 +13101,8 @@
         </p:nvSpPr>
         <p:spPr>
           <a:xfrm>
-            <a:off x="24725485" y="18238767"/>
-            <a:ext cx="10703250" cy="1000058"/>
+            <a:off x="24505920" y="18013680"/>
+            <a:ext cx="11005854" cy="1031027"/>
           </a:xfrm>
           <a:prstGeom prst="rect">
             <a:avLst/>
@@ -13427,7 +13125,7 @@
               <a:buSzPts val="1100"/>
             </a:pPr>
             <a:r>
-              <a:rPr lang="en-US" sz="1833" i="1" dirty="0">
+              <a:rPr lang="en-US" sz="1900" i="1" dirty="0">
                 <a:solidFill>
                   <a:schemeClr val="dk1"/>
                 </a:solidFill>
@@ -13441,6 +13139,454 @@
           </a:p>
         </p:txBody>
       </p:sp>
+      <p:pic>
+        <p:nvPicPr>
+          <p:cNvPr id="3" name="Picture 2">
+            <a:extLst>
+              <a:ext uri="{FF2B5EF4-FFF2-40B4-BE49-F238E27FC236}">
+                <a16:creationId xmlns:a16="http://schemas.microsoft.com/office/drawing/2014/main" id="{1CD2F823-1A56-86FE-5110-3812142490C2}"/>
+              </a:ext>
+            </a:extLst>
+          </p:cNvPr>
+          <p:cNvPicPr>
+            <a:picLocks noGrp="1" noRot="1" noChangeAspect="1" noMove="1" noResize="1" noEditPoints="1" noAdjustHandles="1" noChangeArrowheads="1" noChangeShapeType="1" noCrop="1"/>
+          </p:cNvPicPr>
+          <p:nvPr/>
+        </p:nvPicPr>
+        <p:blipFill>
+          <a:blip r:embed="rId11"/>
+          <a:stretch>
+            <a:fillRect/>
+          </a:stretch>
+        </p:blipFill>
+        <p:spPr>
+          <a:xfrm>
+            <a:off x="1600200" y="17647920"/>
+            <a:ext cx="4906719" cy="4516991"/>
+          </a:xfrm>
+          <a:prstGeom prst="rect">
+            <a:avLst/>
+          </a:prstGeom>
+        </p:spPr>
+      </p:pic>
+      <p:sp>
+        <p:nvSpPr>
+          <p:cNvPr id="6" name="TextBox 5">
+            <a:extLst>
+              <a:ext uri="{FF2B5EF4-FFF2-40B4-BE49-F238E27FC236}">
+                <a16:creationId xmlns:a16="http://schemas.microsoft.com/office/drawing/2014/main" id="{9647C55E-889C-90E0-C457-ADF474DDFEC5}"/>
+              </a:ext>
+            </a:extLst>
+          </p:cNvPr>
+          <p:cNvSpPr txBox="1"/>
+          <p:nvPr/>
+        </p:nvSpPr>
+        <p:spPr>
+          <a:xfrm>
+            <a:off x="24545344" y="24140160"/>
+            <a:ext cx="11268655" cy="1554480"/>
+          </a:xfrm>
+          <a:prstGeom prst="rect">
+            <a:avLst/>
+          </a:prstGeom>
+          <a:noFill/>
+        </p:spPr>
+        <p:txBody>
+          <a:bodyPr wrap="square" rtlCol="0">
+            <a:spAutoFit/>
+          </a:bodyPr>
+          <a:lstStyle/>
+          <a:p>
+            <a:pPr marL="0" marR="0" lvl="0" indent="0" algn="l" defTabSz="914400" rtl="0" eaLnBrk="1" fontAlgn="auto" latinLnBrk="0" hangingPunct="1">
+              <a:lnSpc>
+                <a:spcPct val="100000"/>
+              </a:lnSpc>
+              <a:spcBef>
+                <a:spcPts val="0"/>
+              </a:spcBef>
+              <a:spcAft>
+                <a:spcPts val="0"/>
+              </a:spcAft>
+              <a:buClr>
+                <a:srgbClr val="000000"/>
+              </a:buClr>
+              <a:buSzTx/>
+              <a:buFont typeface="Arial"/>
+              <a:buNone/>
+              <a:tabLst/>
+              <a:defRPr/>
+            </a:pPr>
+            <a:r>
+              <a:rPr kumimoji="0" lang="en-US" sz="2800" b="1" i="0" u="none" strike="noStrike" kern="0" cap="none" spc="0" normalizeH="0" baseline="0" noProof="0" dirty="0">
+                <a:ln>
+                  <a:noFill/>
+                </a:ln>
+                <a:solidFill>
+                  <a:srgbClr val="595959"/>
+                </a:solidFill>
+                <a:effectLst/>
+                <a:uLnTx/>
+                <a:uFillTx/>
+                <a:latin typeface="Calibri"/>
+                <a:ea typeface="Calibri"/>
+                <a:cs typeface="Calibri"/>
+                <a:sym typeface="Calibri"/>
+              </a:rPr>
+              <a:t>REFERENCES</a:t>
+            </a:r>
+          </a:p>
+          <a:p>
+            <a:pPr marL="0" marR="0" lvl="0" indent="0" algn="l" defTabSz="914400" rtl="0" eaLnBrk="1" fontAlgn="auto" latinLnBrk="0" hangingPunct="1">
+              <a:lnSpc>
+                <a:spcPct val="100000"/>
+              </a:lnSpc>
+              <a:spcBef>
+                <a:spcPts val="0"/>
+              </a:spcBef>
+              <a:spcAft>
+                <a:spcPts val="0"/>
+              </a:spcAft>
+              <a:buClr>
+                <a:srgbClr val="000000"/>
+              </a:buClr>
+              <a:buSzTx/>
+              <a:buFont typeface="Arial"/>
+              <a:buNone/>
+              <a:tabLst/>
+              <a:defRPr/>
+            </a:pPr>
+            <a:r>
+              <a:rPr kumimoji="0" lang="en-US" sz="2000" b="0" i="0" u="none" strike="noStrike" kern="0" cap="none" spc="0" normalizeH="0" baseline="0" noProof="0" dirty="0">
+                <a:ln>
+                  <a:noFill/>
+                </a:ln>
+                <a:solidFill>
+                  <a:srgbClr val="000000"/>
+                </a:solidFill>
+                <a:effectLst/>
+                <a:uLnTx/>
+                <a:uFillTx/>
+                <a:latin typeface="Calibri" panose="020F0502020204030204" pitchFamily="34" charset="0"/>
+                <a:ea typeface="Calibri" panose="020F0502020204030204" pitchFamily="34" charset="0"/>
+                <a:cs typeface="Calibri" panose="020F0502020204030204" pitchFamily="34" charset="0"/>
+                <a:sym typeface="Calibri"/>
+              </a:rPr>
+              <a:t>[1] </a:t>
+            </a:r>
+            <a:r>
+              <a:rPr kumimoji="0" lang="en-US" sz="2000" b="1" i="0" u="none" strike="noStrike" kern="0" cap="none" spc="0" normalizeH="0" baseline="0" noProof="0" dirty="0">
+                <a:ln>
+                  <a:noFill/>
+                </a:ln>
+                <a:solidFill>
+                  <a:srgbClr val="000000"/>
+                </a:solidFill>
+                <a:effectLst/>
+                <a:uLnTx/>
+                <a:uFillTx/>
+                <a:latin typeface="Calibri" panose="020F0502020204030204" pitchFamily="34" charset="0"/>
+                <a:ea typeface="Calibri" panose="020F0502020204030204" pitchFamily="34" charset="0"/>
+                <a:cs typeface="Calibri" panose="020F0502020204030204" pitchFamily="34" charset="0"/>
+                <a:sym typeface="Arial"/>
+              </a:rPr>
+              <a:t>Sustained Performance of Low-Cost Air Quality Sensors in Long-Term Deployments. </a:t>
+            </a:r>
+            <a:r>
+              <a:rPr kumimoji="0" lang="en-US" sz="2000" b="0" i="0" u="none" strike="noStrike" kern="0" cap="none" spc="0" normalizeH="0" baseline="0" noProof="0" dirty="0">
+                <a:ln>
+                  <a:noFill/>
+                </a:ln>
+                <a:solidFill>
+                  <a:srgbClr val="000000"/>
+                </a:solidFill>
+                <a:effectLst/>
+                <a:uLnTx/>
+                <a:uFillTx/>
+                <a:latin typeface="Calibri" panose="020F0502020204030204" pitchFamily="34" charset="0"/>
+                <a:ea typeface="Calibri" panose="020F0502020204030204" pitchFamily="34" charset="0"/>
+                <a:cs typeface="Calibri" panose="020F0502020204030204" pitchFamily="34" charset="0"/>
+                <a:sym typeface="Arial"/>
+              </a:rPr>
+              <a:t>Anna R. Winter, </a:t>
+            </a:r>
+            <a:r>
+              <a:rPr kumimoji="0" lang="en-US" sz="2000" b="0" i="0" u="none" strike="noStrike" kern="0" cap="none" spc="0" normalizeH="0" baseline="0" noProof="0" dirty="0" err="1">
+                <a:ln>
+                  <a:noFill/>
+                </a:ln>
+                <a:solidFill>
+                  <a:srgbClr val="000000"/>
+                </a:solidFill>
+                <a:effectLst/>
+                <a:uLnTx/>
+                <a:uFillTx/>
+                <a:latin typeface="Calibri" panose="020F0502020204030204" pitchFamily="34" charset="0"/>
+                <a:ea typeface="Calibri" panose="020F0502020204030204" pitchFamily="34" charset="0"/>
+                <a:cs typeface="Calibri" panose="020F0502020204030204" pitchFamily="34" charset="0"/>
+                <a:sym typeface="Arial"/>
+              </a:rPr>
+              <a:t>Yishu</a:t>
+            </a:r>
+            <a:r>
+              <a:rPr kumimoji="0" lang="en-US" sz="2000" b="0" i="0" u="none" strike="noStrike" kern="0" cap="none" spc="0" normalizeH="0" baseline="0" noProof="0" dirty="0">
+                <a:ln>
+                  <a:noFill/>
+                </a:ln>
+                <a:solidFill>
+                  <a:srgbClr val="000000"/>
+                </a:solidFill>
+                <a:effectLst/>
+                <a:uLnTx/>
+                <a:uFillTx/>
+                <a:latin typeface="Calibri" panose="020F0502020204030204" pitchFamily="34" charset="0"/>
+                <a:ea typeface="Calibri" panose="020F0502020204030204" pitchFamily="34" charset="0"/>
+                <a:cs typeface="Calibri" panose="020F0502020204030204" pitchFamily="34" charset="0"/>
+                <a:sym typeface="Arial"/>
+              </a:rPr>
+              <a:t> Zhu, Naomi G. </a:t>
+            </a:r>
+            <a:r>
+              <a:rPr kumimoji="0" lang="en-US" sz="2000" b="0" i="0" u="none" strike="noStrike" kern="0" cap="none" spc="0" normalizeH="0" baseline="0" noProof="0" dirty="0" err="1">
+                <a:ln>
+                  <a:noFill/>
+                </a:ln>
+                <a:solidFill>
+                  <a:srgbClr val="000000"/>
+                </a:solidFill>
+                <a:effectLst/>
+                <a:uLnTx/>
+                <a:uFillTx/>
+                <a:latin typeface="Calibri" panose="020F0502020204030204" pitchFamily="34" charset="0"/>
+                <a:ea typeface="Calibri" panose="020F0502020204030204" pitchFamily="34" charset="0"/>
+                <a:cs typeface="Calibri" panose="020F0502020204030204" pitchFamily="34" charset="0"/>
+                <a:sym typeface="Arial"/>
+              </a:rPr>
+              <a:t>Asimow</a:t>
+            </a:r>
+            <a:r>
+              <a:rPr kumimoji="0" lang="en-US" sz="2000" b="0" i="0" u="none" strike="noStrike" kern="0" cap="none" spc="0" normalizeH="0" baseline="0" noProof="0" dirty="0">
+                <a:ln>
+                  <a:noFill/>
+                </a:ln>
+                <a:solidFill>
+                  <a:srgbClr val="000000"/>
+                </a:solidFill>
+                <a:effectLst/>
+                <a:uLnTx/>
+                <a:uFillTx/>
+                <a:latin typeface="Calibri" panose="020F0502020204030204" pitchFamily="34" charset="0"/>
+                <a:ea typeface="Calibri" panose="020F0502020204030204" pitchFamily="34" charset="0"/>
+                <a:cs typeface="Calibri" panose="020F0502020204030204" pitchFamily="34" charset="0"/>
+                <a:sym typeface="Arial"/>
+              </a:rPr>
+              <a:t>, Milan Y. Patel, and Ronald C. Cohen. </a:t>
+            </a:r>
+            <a:r>
+              <a:rPr kumimoji="0" lang="en-US" sz="2000" b="0" i="1" u="none" strike="noStrike" kern="0" cap="none" spc="0" normalizeH="0" baseline="0" noProof="0" dirty="0">
+                <a:ln>
+                  <a:noFill/>
+                </a:ln>
+                <a:solidFill>
+                  <a:srgbClr val="000000"/>
+                </a:solidFill>
+                <a:effectLst/>
+                <a:uLnTx/>
+                <a:uFillTx/>
+                <a:latin typeface="Calibri" panose="020F0502020204030204" pitchFamily="34" charset="0"/>
+                <a:ea typeface="Calibri" panose="020F0502020204030204" pitchFamily="34" charset="0"/>
+                <a:cs typeface="Calibri" panose="020F0502020204030204" pitchFamily="34" charset="0"/>
+                <a:sym typeface="Arial"/>
+              </a:rPr>
+              <a:t>ACS Sensors</a:t>
+            </a:r>
+            <a:r>
+              <a:rPr kumimoji="0" lang="en-US" sz="2000" b="0" i="0" u="none" strike="noStrike" kern="0" cap="none" spc="0" normalizeH="0" baseline="0" noProof="0" dirty="0">
+                <a:ln>
+                  <a:noFill/>
+                </a:ln>
+                <a:solidFill>
+                  <a:srgbClr val="000000"/>
+                </a:solidFill>
+                <a:effectLst/>
+                <a:uLnTx/>
+                <a:uFillTx/>
+                <a:latin typeface="Calibri" panose="020F0502020204030204" pitchFamily="34" charset="0"/>
+                <a:ea typeface="Calibri" panose="020F0502020204030204" pitchFamily="34" charset="0"/>
+                <a:cs typeface="Calibri" panose="020F0502020204030204" pitchFamily="34" charset="0"/>
+                <a:sym typeface="Arial"/>
+              </a:rPr>
+              <a:t> </a:t>
+            </a:r>
+            <a:r>
+              <a:rPr kumimoji="0" lang="en-US" sz="2000" b="1" i="0" u="none" strike="noStrike" kern="0" cap="none" spc="0" normalizeH="0" baseline="0" noProof="0" dirty="0">
+                <a:ln>
+                  <a:noFill/>
+                </a:ln>
+                <a:solidFill>
+                  <a:srgbClr val="000000"/>
+                </a:solidFill>
+                <a:effectLst/>
+                <a:uLnTx/>
+                <a:uFillTx/>
+                <a:latin typeface="Calibri" panose="020F0502020204030204" pitchFamily="34" charset="0"/>
+                <a:ea typeface="Calibri" panose="020F0502020204030204" pitchFamily="34" charset="0"/>
+                <a:cs typeface="Calibri" panose="020F0502020204030204" pitchFamily="34" charset="0"/>
+                <a:sym typeface="Arial"/>
+              </a:rPr>
+              <a:t>2025</a:t>
+            </a:r>
+            <a:r>
+              <a:rPr kumimoji="0" lang="en-US" sz="2000" b="0" i="0" u="none" strike="noStrike" kern="0" cap="none" spc="0" normalizeH="0" baseline="0" noProof="0" dirty="0">
+                <a:ln>
+                  <a:noFill/>
+                </a:ln>
+                <a:solidFill>
+                  <a:srgbClr val="000000"/>
+                </a:solidFill>
+                <a:effectLst/>
+                <a:uLnTx/>
+                <a:uFillTx/>
+                <a:latin typeface="Calibri" panose="020F0502020204030204" pitchFamily="34" charset="0"/>
+                <a:ea typeface="Calibri" panose="020F0502020204030204" pitchFamily="34" charset="0"/>
+                <a:cs typeface="Calibri" panose="020F0502020204030204" pitchFamily="34" charset="0"/>
+                <a:sym typeface="Arial"/>
+              </a:rPr>
+              <a:t> </a:t>
+            </a:r>
+            <a:r>
+              <a:rPr kumimoji="0" lang="en-US" sz="2000" b="0" i="1" u="none" strike="noStrike" kern="0" cap="none" spc="0" normalizeH="0" baseline="0" noProof="0" dirty="0">
+                <a:ln>
+                  <a:noFill/>
+                </a:ln>
+                <a:solidFill>
+                  <a:srgbClr val="000000"/>
+                </a:solidFill>
+                <a:effectLst/>
+                <a:uLnTx/>
+                <a:uFillTx/>
+                <a:latin typeface="Calibri" panose="020F0502020204030204" pitchFamily="34" charset="0"/>
+                <a:ea typeface="Calibri" panose="020F0502020204030204" pitchFamily="34" charset="0"/>
+                <a:cs typeface="Calibri" panose="020F0502020204030204" pitchFamily="34" charset="0"/>
+                <a:sym typeface="Arial"/>
+              </a:rPr>
+              <a:t>10</a:t>
+            </a:r>
+            <a:r>
+              <a:rPr kumimoji="0" lang="en-US" sz="2000" b="0" i="0" u="none" strike="noStrike" kern="0" cap="none" spc="0" normalizeH="0" baseline="0" noProof="0" dirty="0">
+                <a:ln>
+                  <a:noFill/>
+                </a:ln>
+                <a:solidFill>
+                  <a:srgbClr val="000000"/>
+                </a:solidFill>
+                <a:effectLst/>
+                <a:uLnTx/>
+                <a:uFillTx/>
+                <a:latin typeface="Calibri" panose="020F0502020204030204" pitchFamily="34" charset="0"/>
+                <a:ea typeface="Calibri" panose="020F0502020204030204" pitchFamily="34" charset="0"/>
+                <a:cs typeface="Calibri" panose="020F0502020204030204" pitchFamily="34" charset="0"/>
+                <a:sym typeface="Arial"/>
+              </a:rPr>
+              <a:t> (6), 4329-4335. DOI: 10.1021/acssensors.5c00566 </a:t>
+            </a:r>
+            <a:endParaRPr kumimoji="0" lang="en-US" sz="2000" b="0" i="1" u="none" strike="noStrike" kern="0" cap="none" spc="0" normalizeH="0" baseline="0" noProof="0" dirty="0">
+              <a:ln>
+                <a:noFill/>
+              </a:ln>
+              <a:solidFill>
+                <a:srgbClr val="000000"/>
+              </a:solidFill>
+              <a:effectLst/>
+              <a:uLnTx/>
+              <a:uFillTx/>
+              <a:latin typeface="Calibri" panose="020F0502020204030204" pitchFamily="34" charset="0"/>
+              <a:ea typeface="Calibri" panose="020F0502020204030204" pitchFamily="34" charset="0"/>
+              <a:cs typeface="Calibri" panose="020F0502020204030204" pitchFamily="34" charset="0"/>
+              <a:sym typeface="Calibri"/>
+            </a:endParaRPr>
+          </a:p>
+          <a:p>
+            <a:endParaRPr lang="en-US" dirty="0"/>
+          </a:p>
+        </p:txBody>
+      </p:sp>
+      <p:pic>
+        <p:nvPicPr>
+          <p:cNvPr id="10" name="Picture 9">
+            <a:extLst>
+              <a:ext uri="{FF2B5EF4-FFF2-40B4-BE49-F238E27FC236}">
+                <a16:creationId xmlns:a16="http://schemas.microsoft.com/office/drawing/2014/main" id="{B5EC526B-12D6-5ACF-1D40-EB66F08E4E8F}"/>
+              </a:ext>
+            </a:extLst>
+          </p:cNvPr>
+          <p:cNvPicPr>
+            <a:picLocks noGrp="1" noRot="1" noChangeAspect="1" noMove="1" noResize="1" noEditPoints="1" noAdjustHandles="1" noChangeArrowheads="1" noChangeShapeType="1" noCrop="1"/>
+          </p:cNvPicPr>
+          <p:nvPr/>
+        </p:nvPicPr>
+        <p:blipFill>
+          <a:blip r:embed="rId12"/>
+          <a:stretch>
+            <a:fillRect/>
+          </a:stretch>
+        </p:blipFill>
+        <p:spPr>
+          <a:xfrm>
+            <a:off x="18653760" y="5760720"/>
+            <a:ext cx="5120640" cy="3657600"/>
+          </a:xfrm>
+          <a:prstGeom prst="rect">
+            <a:avLst/>
+          </a:prstGeom>
+        </p:spPr>
+      </p:pic>
+      <p:pic>
+        <p:nvPicPr>
+          <p:cNvPr id="11" name="Picture 4">
+            <a:extLst>
+              <a:ext uri="{FF2B5EF4-FFF2-40B4-BE49-F238E27FC236}">
+                <a16:creationId xmlns:a16="http://schemas.microsoft.com/office/drawing/2014/main" id="{0F3F3BE3-437C-7F12-29AA-725E4FF80AB4}"/>
+              </a:ext>
+            </a:extLst>
+          </p:cNvPr>
+          <p:cNvPicPr>
+            <a:picLocks noGrp="1" noRot="1" noChangeAspect="1" noMove="1" noResize="1" noEditPoints="1" noAdjustHandles="1" noChangeArrowheads="1" noChangeShapeType="1" noCrop="1"/>
+          </p:cNvPicPr>
+          <p:nvPr/>
+        </p:nvPicPr>
+        <p:blipFill>
+          <a:blip r:embed="rId13">
+            <a:extLst>
+              <a:ext uri="{28A0092B-C50C-407E-A947-70E740481C1C}">
+                <a14:useLocalDpi xmlns:a14="http://schemas.microsoft.com/office/drawing/2010/main" val="0"/>
+              </a:ext>
+            </a:extLst>
+          </a:blip>
+          <a:srcRect/>
+          <a:stretch>
+            <a:fillRect/>
+          </a:stretch>
+        </p:blipFill>
+        <p:spPr bwMode="auto">
+          <a:xfrm>
+            <a:off x="18653760" y="9418321"/>
+            <a:ext cx="5120640" cy="3657600"/>
+          </a:xfrm>
+          <a:prstGeom prst="rect">
+            <a:avLst/>
+          </a:prstGeom>
+          <a:noFill/>
+          <a:extLst>
+            <a:ext uri="{909E8E84-426E-40DD-AFC4-6F175D3DCCD1}">
+              <a14:hiddenFill xmlns:a14="http://schemas.microsoft.com/office/drawing/2010/main">
+                <a:solidFill>
+                  <a:srgbClr val="FFFFFF"/>
+                </a:solidFill>
+              </a14:hiddenFill>
+            </a:ext>
+          </a:extLst>
+        </p:spPr>
+      </p:pic>
     </p:spTree>
   </p:cSld>
   <p:clrMapOvr>
